--- a/docs/pitch/TheEngOrg-Pitch-Deck.pptx
+++ b/docs/pitch/TheEngOrg-Pitch-Deck.pptx
@@ -3117,7 +3117,7 @@
         </p:nvSpPr>
         <p:spPr>
           <a:xfrm>
-            <a:off x="1371600" y="2743200"/>
+            <a:off x="1371600" y="2286000"/>
             <a:ext cx="11887200" cy="1371600"/>
           </a:xfrm>
           <a:prstGeom prst="rect">
@@ -3153,8 +3153,8 @@
         </p:nvSpPr>
         <p:spPr>
           <a:xfrm>
-            <a:off x="1371600" y="4114800"/>
-            <a:ext cx="11887200" cy="731520"/>
+            <a:off x="1371600" y="3840480"/>
+            <a:ext cx="11887200" cy="548640"/>
           </a:xfrm>
           <a:prstGeom prst="rect">
             <a:avLst/>
@@ -3189,8 +3189,8 @@
         </p:nvSpPr>
         <p:spPr>
           <a:xfrm>
-            <a:off x="1371600" y="5303520"/>
-            <a:ext cx="11887200" cy="457200"/>
+            <a:off x="1371600" y="5029200"/>
+            <a:ext cx="11887200" cy="365760"/>
           </a:xfrm>
           <a:prstGeom prst="rect">
             <a:avLst/>
@@ -3251,8 +3251,8 @@
         </p:nvSpPr>
         <p:spPr>
           <a:xfrm>
-            <a:off x="1097280" y="731520"/>
-            <a:ext cx="3657600" cy="365760"/>
+            <a:off x="1097280" y="548640"/>
+            <a:ext cx="3657600" cy="274320"/>
           </a:xfrm>
           <a:prstGeom prst="rect">
             <a:avLst/>
@@ -3287,22 +3287,22 @@
         </p:nvSpPr>
         <p:spPr>
           <a:xfrm>
-            <a:off x="1097280" y="1188720"/>
-            <a:ext cx="11887200" cy="914400"/>
-          </a:xfrm>
-          <a:prstGeom prst="rect">
-            <a:avLst/>
-          </a:prstGeom>
-          <a:noFill/>
-        </p:spPr>
-        <p:txBody>
-          <a:bodyPr wrap="square">
-            <a:spAutoFit/>
-          </a:bodyPr>
-          <a:lstStyle/>
-          <a:p>
-            <a:pPr algn="l">
-              <a:defRPr sz="4000" b="1">
+            <a:off x="1097280" y="914400"/>
+            <a:ext cx="11887200" cy="731520"/>
+          </a:xfrm>
+          <a:prstGeom prst="rect">
+            <a:avLst/>
+          </a:prstGeom>
+          <a:noFill/>
+        </p:spPr>
+        <p:txBody>
+          <a:bodyPr wrap="square">
+            <a:spAutoFit/>
+          </a:bodyPr>
+          <a:lstStyle/>
+          <a:p>
+            <a:pPr algn="l">
+              <a:defRPr sz="3800" b="1">
                 <a:solidFill>
                   <a:srgbClr val="E8E8E8"/>
                 </a:solidFill>
@@ -3317,28 +3317,71 @@
       </p:sp>
       <p:sp>
         <p:nvSpPr>
-          <p:cNvPr id="4" name="TextBox 3"/>
-          <p:cNvSpPr txBox="1"/>
-          <p:nvPr/>
-        </p:nvSpPr>
-        <p:spPr>
-          <a:xfrm>
-            <a:off x="1371600" y="2926080"/>
-            <a:ext cx="3657600" cy="457200"/>
-          </a:xfrm>
-          <a:prstGeom prst="rect">
-            <a:avLst/>
-          </a:prstGeom>
-          <a:noFill/>
-        </p:spPr>
-        <p:txBody>
-          <a:bodyPr wrap="square">
-            <a:spAutoFit/>
-          </a:bodyPr>
-          <a:lstStyle/>
-          <a:p>
-            <a:pPr algn="l">
-              <a:defRPr sz="1600" b="1">
+          <p:cNvPr id="4" name="Rounded Rectangle 3"/>
+          <p:cNvSpPr/>
+          <p:nvPr/>
+        </p:nvSpPr>
+        <p:spPr>
+          <a:xfrm>
+            <a:off x="1371600" y="2286000"/>
+            <a:ext cx="3840480" cy="2743200"/>
+          </a:xfrm>
+          <a:prstGeom prst="roundRect">
+            <a:avLst>
+              <a:gd name="adj" fmla="val 5000"/>
+            </a:avLst>
+          </a:prstGeom>
+          <a:solidFill>
+            <a:srgbClr val="1E2A38"/>
+          </a:solidFill>
+          <a:ln/>
+        </p:spPr>
+        <p:style>
+          <a:lnRef idx="1">
+            <a:schemeClr val="accent1"/>
+          </a:lnRef>
+          <a:fillRef idx="3">
+            <a:schemeClr val="accent1"/>
+          </a:fillRef>
+          <a:effectRef idx="2">
+            <a:schemeClr val="accent1"/>
+          </a:effectRef>
+          <a:fontRef idx="minor">
+            <a:schemeClr val="lt1"/>
+          </a:fontRef>
+        </p:style>
+        <p:txBody>
+          <a:bodyPr rtlCol="0" anchor="ctr"/>
+          <a:lstStyle/>
+          <a:p>
+            <a:pPr algn="ctr"/>
+          </a:p>
+        </p:txBody>
+      </p:sp>
+      <p:sp>
+        <p:nvSpPr>
+          <p:cNvPr id="5" name="TextBox 4"/>
+          <p:cNvSpPr txBox="1"/>
+          <p:nvPr/>
+        </p:nvSpPr>
+        <p:spPr>
+          <a:xfrm>
+            <a:off x="1645920" y="2377440"/>
+            <a:ext cx="3200400" cy="365760"/>
+          </a:xfrm>
+          <a:prstGeom prst="rect">
+            <a:avLst/>
+          </a:prstGeom>
+          <a:noFill/>
+        </p:spPr>
+        <p:txBody>
+          <a:bodyPr wrap="square">
+            <a:spAutoFit/>
+          </a:bodyPr>
+          <a:lstStyle/>
+          <a:p>
+            <a:pPr algn="l">
+              <a:defRPr sz="1400" b="1">
                 <a:solidFill>
                   <a:srgbClr val="2E8B8B"/>
                 </a:solidFill>
@@ -3353,14 +3396,14 @@
       </p:sp>
       <p:sp>
         <p:nvSpPr>
-          <p:cNvPr id="5" name="TextBox 4"/>
-          <p:cNvSpPr txBox="1"/>
-          <p:nvPr/>
-        </p:nvSpPr>
-        <p:spPr>
-          <a:xfrm>
-            <a:off x="1371600" y="3566160"/>
-            <a:ext cx="4114800" cy="365760"/>
+          <p:cNvPr id="6" name="TextBox 5"/>
+          <p:cNvSpPr txBox="1"/>
+          <p:nvPr/>
+        </p:nvSpPr>
+        <p:spPr>
+          <a:xfrm>
+            <a:off x="1645920" y="2926080"/>
+            <a:ext cx="3474720" cy="365760"/>
           </a:xfrm>
           <a:prstGeom prst="rect">
             <a:avLst/>
@@ -3382,21 +3425,21 @@
               </a:defRPr>
             </a:pPr>
             <a:r>
-              <a:t>— v4.2 shipped — 24 agents</a:t>
-            </a:r>
-          </a:p>
-        </p:txBody>
-      </p:sp>
-      <p:sp>
-        <p:nvSpPr>
-          <p:cNvPr id="6" name="TextBox 5"/>
-          <p:cNvSpPr txBox="1"/>
-          <p:nvPr/>
-        </p:nvSpPr>
-        <p:spPr>
-          <a:xfrm>
-            <a:off x="1371600" y="4023360"/>
-            <a:ext cx="4114800" cy="365760"/>
+              <a:t>— v4.2 — 24 agents</a:t>
+            </a:r>
+          </a:p>
+        </p:txBody>
+      </p:sp>
+      <p:sp>
+        <p:nvSpPr>
+          <p:cNvPr id="7" name="TextBox 6"/>
+          <p:cNvSpPr txBox="1"/>
+          <p:nvPr/>
+        </p:nvSpPr>
+        <p:spPr>
+          <a:xfrm>
+            <a:off x="1645920" y="3383280"/>
+            <a:ext cx="3474720" cy="365760"/>
           </a:xfrm>
           <a:prstGeom prst="rect">
             <a:avLst/>
@@ -3418,21 +3461,21 @@
               </a:defRPr>
             </a:pPr>
             <a:r>
-              <a:t>— Autonomous daemon pipeline</a:t>
-            </a:r>
-          </a:p>
-        </p:txBody>
-      </p:sp>
-      <p:sp>
-        <p:nvSpPr>
-          <p:cNvPr id="7" name="TextBox 6"/>
-          <p:cNvSpPr txBox="1"/>
-          <p:nvPr/>
-        </p:nvSpPr>
-        <p:spPr>
-          <a:xfrm>
-            <a:off x="1371600" y="4480560"/>
-            <a:ext cx="4114800" cy="365760"/>
+              <a:t>— Autonomous daemon</a:t>
+            </a:r>
+          </a:p>
+        </p:txBody>
+      </p:sp>
+      <p:sp>
+        <p:nvSpPr>
+          <p:cNvPr id="8" name="TextBox 7"/>
+          <p:cNvSpPr txBox="1"/>
+          <p:nvPr/>
+        </p:nvSpPr>
+        <p:spPr>
+          <a:xfrm>
+            <a:off x="1645920" y="3840480"/>
+            <a:ext cx="3474720" cy="365760"/>
           </a:xfrm>
           <a:prstGeom prst="rect">
             <a:avLst/>
@@ -3454,35 +3497,78 @@
               </a:defRPr>
             </a:pPr>
             <a:r>
-              <a:t>— Multiple releases per day</a:t>
-            </a:r>
-          </a:p>
-        </p:txBody>
-      </p:sp>
-      <p:sp>
-        <p:nvSpPr>
-          <p:cNvPr id="8" name="TextBox 7"/>
-          <p:cNvSpPr txBox="1"/>
-          <p:nvPr/>
-        </p:nvSpPr>
-        <p:spPr>
-          <a:xfrm>
-            <a:off x="5760720" y="2926080"/>
-            <a:ext cx="3657600" cy="457200"/>
-          </a:xfrm>
-          <a:prstGeom prst="rect">
-            <a:avLst/>
-          </a:prstGeom>
-          <a:noFill/>
-        </p:spPr>
-        <p:txBody>
-          <a:bodyPr wrap="square">
-            <a:spAutoFit/>
-          </a:bodyPr>
-          <a:lstStyle/>
-          <a:p>
-            <a:pPr algn="l">
-              <a:defRPr sz="1600" b="1">
+              <a:t>— Multiple releases/day</a:t>
+            </a:r>
+          </a:p>
+        </p:txBody>
+      </p:sp>
+      <p:sp>
+        <p:nvSpPr>
+          <p:cNvPr id="9" name="Rounded Rectangle 8"/>
+          <p:cNvSpPr/>
+          <p:nvPr/>
+        </p:nvSpPr>
+        <p:spPr>
+          <a:xfrm>
+            <a:off x="5760720" y="2286000"/>
+            <a:ext cx="3840480" cy="2743200"/>
+          </a:xfrm>
+          <a:prstGeom prst="roundRect">
+            <a:avLst>
+              <a:gd name="adj" fmla="val 5000"/>
+            </a:avLst>
+          </a:prstGeom>
+          <a:solidFill>
+            <a:srgbClr val="1E2A38"/>
+          </a:solidFill>
+          <a:ln/>
+        </p:spPr>
+        <p:style>
+          <a:lnRef idx="1">
+            <a:schemeClr val="accent1"/>
+          </a:lnRef>
+          <a:fillRef idx="3">
+            <a:schemeClr val="accent1"/>
+          </a:fillRef>
+          <a:effectRef idx="2">
+            <a:schemeClr val="accent1"/>
+          </a:effectRef>
+          <a:fontRef idx="minor">
+            <a:schemeClr val="lt1"/>
+          </a:fontRef>
+        </p:style>
+        <p:txBody>
+          <a:bodyPr rtlCol="0" anchor="ctr"/>
+          <a:lstStyle/>
+          <a:p>
+            <a:pPr algn="ctr"/>
+          </a:p>
+        </p:txBody>
+      </p:sp>
+      <p:sp>
+        <p:nvSpPr>
+          <p:cNvPr id="10" name="TextBox 9"/>
+          <p:cNvSpPr txBox="1"/>
+          <p:nvPr/>
+        </p:nvSpPr>
+        <p:spPr>
+          <a:xfrm>
+            <a:off x="6035040" y="2377440"/>
+            <a:ext cx="3200400" cy="365760"/>
+          </a:xfrm>
+          <a:prstGeom prst="rect">
+            <a:avLst/>
+          </a:prstGeom>
+          <a:noFill/>
+        </p:spPr>
+        <p:txBody>
+          <a:bodyPr wrap="square">
+            <a:spAutoFit/>
+          </a:bodyPr>
+          <a:lstStyle/>
+          <a:p>
+            <a:pPr algn="l">
+              <a:defRPr sz="1400" b="1">
                 <a:solidFill>
                   <a:srgbClr val="2E8B8B"/>
                 </a:solidFill>
@@ -3497,14 +3583,14 @@
       </p:sp>
       <p:sp>
         <p:nvSpPr>
-          <p:cNvPr id="9" name="TextBox 8"/>
-          <p:cNvSpPr txBox="1"/>
-          <p:nvPr/>
-        </p:nvSpPr>
-        <p:spPr>
-          <a:xfrm>
-            <a:off x="5760720" y="3566160"/>
-            <a:ext cx="4114800" cy="365760"/>
+          <p:cNvPr id="11" name="TextBox 10"/>
+          <p:cNvSpPr txBox="1"/>
+          <p:nvPr/>
+        </p:nvSpPr>
+        <p:spPr>
+          <a:xfrm>
+            <a:off x="6035040" y="2926080"/>
+            <a:ext cx="3474720" cy="365760"/>
           </a:xfrm>
           <a:prstGeom prst="rect">
             <a:avLst/>
@@ -3526,21 +3612,21 @@
               </a:defRPr>
             </a:pPr>
             <a:r>
-              <a:t>— Sage: 1.000 / 1.000</a:t>
-            </a:r>
-          </a:p>
-        </p:txBody>
-      </p:sp>
-      <p:sp>
-        <p:nvSpPr>
-          <p:cNvPr id="10" name="TextBox 9"/>
-          <p:cNvSpPr txBox="1"/>
-          <p:nvPr/>
-        </p:nvSpPr>
-        <p:spPr>
-          <a:xfrm>
-            <a:off x="5760720" y="4023360"/>
-            <a:ext cx="4114800" cy="365760"/>
+              <a:t>— Sage: 1.000/1.000</a:t>
+            </a:r>
+          </a:p>
+        </p:txBody>
+      </p:sp>
+      <p:sp>
+        <p:nvSpPr>
+          <p:cNvPr id="12" name="TextBox 11"/>
+          <p:cNvSpPr txBox="1"/>
+          <p:nvPr/>
+        </p:nvSpPr>
+        <p:spPr>
+          <a:xfrm>
+            <a:off x="6035040" y="3383280"/>
+            <a:ext cx="3474720" cy="365760"/>
           </a:xfrm>
           <a:prstGeom prst="rect">
             <a:avLst/>
@@ -3562,21 +3648,21 @@
               </a:defRPr>
             </a:pPr>
             <a:r>
-              <a:t>— Config C: 60% cost, same quality</a:t>
-            </a:r>
-          </a:p>
-        </p:txBody>
-      </p:sp>
-      <p:sp>
-        <p:nvSpPr>
-          <p:cNvPr id="11" name="TextBox 10"/>
-          <p:cNvSpPr txBox="1"/>
-          <p:nvPr/>
-        </p:nvSpPr>
-        <p:spPr>
-          <a:xfrm>
-            <a:off x="5760720" y="4480560"/>
-            <a:ext cx="4114800" cy="365760"/>
+              <a:t>— Config C: 60% cost</a:t>
+            </a:r>
+          </a:p>
+        </p:txBody>
+      </p:sp>
+      <p:sp>
+        <p:nvSpPr>
+          <p:cNvPr id="13" name="TextBox 12"/>
+          <p:cNvSpPr txBox="1"/>
+          <p:nvPr/>
+        </p:nvSpPr>
+        <p:spPr>
+          <a:xfrm>
+            <a:off x="6035040" y="3840480"/>
+            <a:ext cx="3474720" cy="365760"/>
           </a:xfrm>
           <a:prstGeom prst="rect">
             <a:avLst/>
@@ -3598,35 +3684,78 @@
               </a:defRPr>
             </a:pPr>
             <a:r>
-              <a:t>— Model-agnostic results</a:t>
-            </a:r>
-          </a:p>
-        </p:txBody>
-      </p:sp>
-      <p:sp>
-        <p:nvSpPr>
-          <p:cNvPr id="12" name="TextBox 11"/>
-          <p:cNvSpPr txBox="1"/>
-          <p:nvPr/>
-        </p:nvSpPr>
-        <p:spPr>
-          <a:xfrm>
-            <a:off x="10149840" y="2926080"/>
-            <a:ext cx="3657600" cy="457200"/>
-          </a:xfrm>
-          <a:prstGeom prst="rect">
-            <a:avLst/>
-          </a:prstGeom>
-          <a:noFill/>
-        </p:spPr>
-        <p:txBody>
-          <a:bodyPr wrap="square">
-            <a:spAutoFit/>
-          </a:bodyPr>
-          <a:lstStyle/>
-          <a:p>
-            <a:pPr algn="l">
-              <a:defRPr sz="1600" b="1">
+              <a:t>— Model-agnostic</a:t>
+            </a:r>
+          </a:p>
+        </p:txBody>
+      </p:sp>
+      <p:sp>
+        <p:nvSpPr>
+          <p:cNvPr id="14" name="Rounded Rectangle 13"/>
+          <p:cNvSpPr/>
+          <p:nvPr/>
+        </p:nvSpPr>
+        <p:spPr>
+          <a:xfrm>
+            <a:off x="10149840" y="2286000"/>
+            <a:ext cx="3840480" cy="2743200"/>
+          </a:xfrm>
+          <a:prstGeom prst="roundRect">
+            <a:avLst>
+              <a:gd name="adj" fmla="val 5000"/>
+            </a:avLst>
+          </a:prstGeom>
+          <a:solidFill>
+            <a:srgbClr val="1E2A38"/>
+          </a:solidFill>
+          <a:ln/>
+        </p:spPr>
+        <p:style>
+          <a:lnRef idx="1">
+            <a:schemeClr val="accent1"/>
+          </a:lnRef>
+          <a:fillRef idx="3">
+            <a:schemeClr val="accent1"/>
+          </a:fillRef>
+          <a:effectRef idx="2">
+            <a:schemeClr val="accent1"/>
+          </a:effectRef>
+          <a:fontRef idx="minor">
+            <a:schemeClr val="lt1"/>
+          </a:fontRef>
+        </p:style>
+        <p:txBody>
+          <a:bodyPr rtlCol="0" anchor="ctr"/>
+          <a:lstStyle/>
+          <a:p>
+            <a:pPr algn="ctr"/>
+          </a:p>
+        </p:txBody>
+      </p:sp>
+      <p:sp>
+        <p:nvSpPr>
+          <p:cNvPr id="15" name="TextBox 14"/>
+          <p:cNvSpPr txBox="1"/>
+          <p:nvPr/>
+        </p:nvSpPr>
+        <p:spPr>
+          <a:xfrm>
+            <a:off x="10424160" y="2377440"/>
+            <a:ext cx="3200400" cy="365760"/>
+          </a:xfrm>
+          <a:prstGeom prst="rect">
+            <a:avLst/>
+          </a:prstGeom>
+          <a:noFill/>
+        </p:spPr>
+        <p:txBody>
+          <a:bodyPr wrap="square">
+            <a:spAutoFit/>
+          </a:bodyPr>
+          <a:lstStyle/>
+          <a:p>
+            <a:pPr algn="l">
+              <a:defRPr sz="1400" b="1">
                 <a:solidFill>
                   <a:srgbClr val="2E8B8B"/>
                 </a:solidFill>
@@ -3641,14 +3770,14 @@
       </p:sp>
       <p:sp>
         <p:nvSpPr>
-          <p:cNvPr id="13" name="TextBox 12"/>
-          <p:cNvSpPr txBox="1"/>
-          <p:nvPr/>
-        </p:nvSpPr>
-        <p:spPr>
-          <a:xfrm>
-            <a:off x="10149840" y="3566160"/>
-            <a:ext cx="4114800" cy="365760"/>
+          <p:cNvPr id="16" name="TextBox 15"/>
+          <p:cNvSpPr txBox="1"/>
+          <p:nvPr/>
+        </p:nvSpPr>
+        <p:spPr>
+          <a:xfrm>
+            <a:off x="10424160" y="2926080"/>
+            <a:ext cx="3474720" cy="365760"/>
           </a:xfrm>
           <a:prstGeom prst="rect">
             <a:avLst/>
@@ -3670,21 +3799,21 @@
               </a:defRPr>
             </a:pPr>
             <a:r>
-              <a:t>— 2 startup clients onboarded</a:t>
-            </a:r>
-          </a:p>
-        </p:txBody>
-      </p:sp>
-      <p:sp>
-        <p:nvSpPr>
-          <p:cNvPr id="14" name="TextBox 13"/>
-          <p:cNvSpPr txBox="1"/>
-          <p:nvPr/>
-        </p:nvSpPr>
-        <p:spPr>
-          <a:xfrm>
-            <a:off x="10149840" y="4023360"/>
-            <a:ext cx="4114800" cy="365760"/>
+              <a:t>— 2 startups onboarded</a:t>
+            </a:r>
+          </a:p>
+        </p:txBody>
+      </p:sp>
+      <p:sp>
+        <p:nvSpPr>
+          <p:cNvPr id="17" name="TextBox 16"/>
+          <p:cNvSpPr txBox="1"/>
+          <p:nvPr/>
+        </p:nvSpPr>
+        <p:spPr>
+          <a:xfrm>
+            <a:off x="10424160" y="3383280"/>
+            <a:ext cx="3474720" cy="365760"/>
           </a:xfrm>
           <a:prstGeom prst="rect">
             <a:avLst/>
@@ -3713,14 +3842,14 @@
       </p:sp>
       <p:sp>
         <p:nvSpPr>
-          <p:cNvPr id="15" name="TextBox 14"/>
-          <p:cNvSpPr txBox="1"/>
-          <p:nvPr/>
-        </p:nvSpPr>
-        <p:spPr>
-          <a:xfrm>
-            <a:off x="10149840" y="4480560"/>
-            <a:ext cx="4114800" cy="365760"/>
+          <p:cNvPr id="18" name="TextBox 17"/>
+          <p:cNvSpPr txBox="1"/>
+          <p:nvPr/>
+        </p:nvSpPr>
+        <p:spPr>
+          <a:xfrm>
+            <a:off x="10424160" y="3840480"/>
+            <a:ext cx="3474720" cy="365760"/>
           </a:xfrm>
           <a:prstGeom prst="rect">
             <a:avLst/>
@@ -3742,20 +3871,20 @@
               </a:defRPr>
             </a:pPr>
             <a:r>
-              <a:t>— Founding Partner pricing locked</a:t>
-            </a:r>
-          </a:p>
-        </p:txBody>
-      </p:sp>
-      <p:sp>
-        <p:nvSpPr>
-          <p:cNvPr id="16" name="TextBox 15"/>
-          <p:cNvSpPr txBox="1"/>
-          <p:nvPr/>
-        </p:nvSpPr>
-        <p:spPr>
-          <a:xfrm>
-            <a:off x="4572000" y="5943600"/>
+              <a:t>— Founding pricing locked</a:t>
+            </a:r>
+          </a:p>
+        </p:txBody>
+      </p:sp>
+      <p:sp>
+        <p:nvSpPr>
+          <p:cNvPr id="19" name="TextBox 18"/>
+          <p:cNvSpPr txBox="1"/>
+          <p:nvPr/>
+        </p:nvSpPr>
+        <p:spPr>
+          <a:xfrm>
+            <a:off x="4572000" y="5669280"/>
             <a:ext cx="5486400" cy="914400"/>
           </a:xfrm>
           <a:prstGeom prst="rect">
@@ -3785,13 +3914,13 @@
       </p:sp>
       <p:sp>
         <p:nvSpPr>
-          <p:cNvPr id="17" name="TextBox 16"/>
-          <p:cNvSpPr txBox="1"/>
-          <p:nvPr/>
-        </p:nvSpPr>
-        <p:spPr>
-          <a:xfrm>
-            <a:off x="3657600" y="6858000"/>
+          <p:cNvPr id="20" name="TextBox 19"/>
+          <p:cNvSpPr txBox="1"/>
+          <p:nvPr/>
+        </p:nvSpPr>
+        <p:spPr>
+          <a:xfrm>
+            <a:off x="3657600" y="6675120"/>
             <a:ext cx="7315200" cy="365760"/>
           </a:xfrm>
           <a:prstGeom prst="rect">
@@ -3853,8 +3982,8 @@
         </p:nvSpPr>
         <p:spPr>
           <a:xfrm>
-            <a:off x="1097280" y="731520"/>
-            <a:ext cx="3657600" cy="365760"/>
+            <a:off x="1097280" y="548640"/>
+            <a:ext cx="3657600" cy="274320"/>
           </a:xfrm>
           <a:prstGeom prst="rect">
             <a:avLst/>
@@ -3889,22 +4018,22 @@
         </p:nvSpPr>
         <p:spPr>
           <a:xfrm>
-            <a:off x="1097280" y="1188720"/>
-            <a:ext cx="11887200" cy="914400"/>
-          </a:xfrm>
-          <a:prstGeom prst="rect">
-            <a:avLst/>
-          </a:prstGeom>
-          <a:noFill/>
-        </p:spPr>
-        <p:txBody>
-          <a:bodyPr wrap="square">
-            <a:spAutoFit/>
-          </a:bodyPr>
-          <a:lstStyle/>
-          <a:p>
-            <a:pPr algn="l">
-              <a:defRPr sz="4000" b="1">
+            <a:off x="1097280" y="914400"/>
+            <a:ext cx="11887200" cy="731520"/>
+          </a:xfrm>
+          <a:prstGeom prst="rect">
+            <a:avLst/>
+          </a:prstGeom>
+          <a:noFill/>
+        </p:spPr>
+        <p:txBody>
+          <a:bodyPr wrap="square">
+            <a:spAutoFit/>
+          </a:bodyPr>
+          <a:lstStyle/>
+          <a:p>
+            <a:pPr algn="l">
+              <a:defRPr sz="3800" b="1">
                 <a:solidFill>
                   <a:srgbClr val="E8E8E8"/>
                 </a:solidFill>
@@ -3926,6 +4055,150 @@
         <p:spPr>
           <a:xfrm>
             <a:off x="1371600" y="2743200"/>
+            <a:ext cx="2743200" cy="274320"/>
+          </a:xfrm>
+          <a:prstGeom prst="rect">
+            <a:avLst/>
+          </a:prstGeom>
+          <a:noFill/>
+        </p:spPr>
+        <p:txBody>
+          <a:bodyPr wrap="square">
+            <a:spAutoFit/>
+          </a:bodyPr>
+          <a:lstStyle/>
+          <a:p>
+            <a:pPr algn="l">
+              <a:defRPr sz="1200" b="1">
+                <a:solidFill>
+                  <a:srgbClr val="8A9BB0"/>
+                </a:solidFill>
+                <a:latin typeface="Courier New"/>
+              </a:defRPr>
+            </a:pPr>
+            <a:r>
+              <a:t>Scenario</a:t>
+            </a:r>
+          </a:p>
+        </p:txBody>
+      </p:sp>
+      <p:sp>
+        <p:nvSpPr>
+          <p:cNvPr id="5" name="TextBox 4"/>
+          <p:cNvSpPr txBox="1"/>
+          <p:nvPr/>
+        </p:nvSpPr>
+        <p:spPr>
+          <a:xfrm>
+            <a:off x="4389120" y="2743200"/>
+            <a:ext cx="2743200" cy="274320"/>
+          </a:xfrm>
+          <a:prstGeom prst="rect">
+            <a:avLst/>
+          </a:prstGeom>
+          <a:noFill/>
+        </p:spPr>
+        <p:txBody>
+          <a:bodyPr wrap="square">
+            <a:spAutoFit/>
+          </a:bodyPr>
+          <a:lstStyle/>
+          <a:p>
+            <a:pPr algn="l">
+              <a:defRPr sz="1200" b="1">
+                <a:solidFill>
+                  <a:srgbClr val="8A9BB0"/>
+                </a:solidFill>
+                <a:latin typeface="Courier New"/>
+              </a:defRPr>
+            </a:pPr>
+            <a:r>
+              <a:t>Exit ARR</a:t>
+            </a:r>
+          </a:p>
+        </p:txBody>
+      </p:sp>
+      <p:sp>
+        <p:nvSpPr>
+          <p:cNvPr id="6" name="TextBox 5"/>
+          <p:cNvSpPr txBox="1"/>
+          <p:nvPr/>
+        </p:nvSpPr>
+        <p:spPr>
+          <a:xfrm>
+            <a:off x="7406640" y="2743200"/>
+            <a:ext cx="2743200" cy="274320"/>
+          </a:xfrm>
+          <a:prstGeom prst="rect">
+            <a:avLst/>
+          </a:prstGeom>
+          <a:noFill/>
+        </p:spPr>
+        <p:txBody>
+          <a:bodyPr wrap="square">
+            <a:spAutoFit/>
+          </a:bodyPr>
+          <a:lstStyle/>
+          <a:p>
+            <a:pPr algn="l">
+              <a:defRPr sz="1200" b="1">
+                <a:solidFill>
+                  <a:srgbClr val="8A9BB0"/>
+                </a:solidFill>
+                <a:latin typeface="Courier New"/>
+              </a:defRPr>
+            </a:pPr>
+            <a:r>
+              <a:t>Multiple</a:t>
+            </a:r>
+          </a:p>
+        </p:txBody>
+      </p:sp>
+      <p:sp>
+        <p:nvSpPr>
+          <p:cNvPr id="7" name="TextBox 6"/>
+          <p:cNvSpPr txBox="1"/>
+          <p:nvPr/>
+        </p:nvSpPr>
+        <p:spPr>
+          <a:xfrm>
+            <a:off x="10424159" y="2743200"/>
+            <a:ext cx="2743200" cy="274320"/>
+          </a:xfrm>
+          <a:prstGeom prst="rect">
+            <a:avLst/>
+          </a:prstGeom>
+          <a:noFill/>
+        </p:spPr>
+        <p:txBody>
+          <a:bodyPr wrap="square">
+            <a:spAutoFit/>
+          </a:bodyPr>
+          <a:lstStyle/>
+          <a:p>
+            <a:pPr algn="l">
+              <a:defRPr sz="1200" b="1">
+                <a:solidFill>
+                  <a:srgbClr val="8A9BB0"/>
+                </a:solidFill>
+                <a:latin typeface="Courier New"/>
+              </a:defRPr>
+            </a:pPr>
+            <a:r>
+              <a:t>Return</a:t>
+            </a:r>
+          </a:p>
+        </p:txBody>
+      </p:sp>
+      <p:sp>
+        <p:nvSpPr>
+          <p:cNvPr id="8" name="TextBox 7"/>
+          <p:cNvSpPr txBox="1"/>
+          <p:nvPr/>
+        </p:nvSpPr>
+        <p:spPr>
+          <a:xfrm>
+            <a:off x="1371600" y="3200400"/>
             <a:ext cx="2743200" cy="365760"/>
           </a:xfrm>
           <a:prstGeom prst="rect">
@@ -3940,28 +4213,28 @@
           <a:lstStyle/>
           <a:p>
             <a:pPr algn="l">
-              <a:defRPr sz="1200" b="1">
-                <a:solidFill>
-                  <a:srgbClr val="8A9BB0"/>
-                </a:solidFill>
-                <a:latin typeface="Courier New"/>
-              </a:defRPr>
-            </a:pPr>
-            <a:r>
-              <a:t>Scenario</a:t>
-            </a:r>
-          </a:p>
-        </p:txBody>
-      </p:sp>
-      <p:sp>
-        <p:nvSpPr>
-          <p:cNvPr id="5" name="TextBox 4"/>
-          <p:cNvSpPr txBox="1"/>
-          <p:nvPr/>
-        </p:nvSpPr>
-        <p:spPr>
-          <a:xfrm>
-            <a:off x="4389120" y="2743200"/>
+              <a:defRPr sz="1600" b="0">
+                <a:solidFill>
+                  <a:srgbClr val="E8E8E8"/>
+                </a:solidFill>
+                <a:latin typeface="Courier New"/>
+              </a:defRPr>
+            </a:pPr>
+            <a:r>
+              <a:t>Base</a:t>
+            </a:r>
+          </a:p>
+        </p:txBody>
+      </p:sp>
+      <p:sp>
+        <p:nvSpPr>
+          <p:cNvPr id="9" name="TextBox 8"/>
+          <p:cNvSpPr txBox="1"/>
+          <p:nvPr/>
+        </p:nvSpPr>
+        <p:spPr>
+          <a:xfrm>
+            <a:off x="4389120" y="3200400"/>
             <a:ext cx="2743200" cy="365760"/>
           </a:xfrm>
           <a:prstGeom prst="rect">
@@ -3976,28 +4249,28 @@
           <a:lstStyle/>
           <a:p>
             <a:pPr algn="l">
-              <a:defRPr sz="1200" b="1">
-                <a:solidFill>
-                  <a:srgbClr val="8A9BB0"/>
-                </a:solidFill>
-                <a:latin typeface="Courier New"/>
-              </a:defRPr>
-            </a:pPr>
-            <a:r>
-              <a:t>Exit ARR</a:t>
-            </a:r>
-          </a:p>
-        </p:txBody>
-      </p:sp>
-      <p:sp>
-        <p:nvSpPr>
-          <p:cNvPr id="6" name="TextBox 5"/>
-          <p:cNvSpPr txBox="1"/>
-          <p:nvPr/>
-        </p:nvSpPr>
-        <p:spPr>
-          <a:xfrm>
-            <a:off x="7406640" y="2743200"/>
+              <a:defRPr sz="1600" b="0">
+                <a:solidFill>
+                  <a:srgbClr val="E8E8E8"/>
+                </a:solidFill>
+                <a:latin typeface="Courier New"/>
+              </a:defRPr>
+            </a:pPr>
+            <a:r>
+              <a:t>$15M</a:t>
+            </a:r>
+          </a:p>
+        </p:txBody>
+      </p:sp>
+      <p:sp>
+        <p:nvSpPr>
+          <p:cNvPr id="10" name="TextBox 9"/>
+          <p:cNvSpPr txBox="1"/>
+          <p:nvPr/>
+        </p:nvSpPr>
+        <p:spPr>
+          <a:xfrm>
+            <a:off x="7406640" y="3200400"/>
             <a:ext cx="2743200" cy="365760"/>
           </a:xfrm>
           <a:prstGeom prst="rect">
@@ -4012,28 +4285,28 @@
           <a:lstStyle/>
           <a:p>
             <a:pPr algn="l">
-              <a:defRPr sz="1200" b="1">
-                <a:solidFill>
-                  <a:srgbClr val="8A9BB0"/>
-                </a:solidFill>
-                <a:latin typeface="Courier New"/>
-              </a:defRPr>
-            </a:pPr>
-            <a:r>
-              <a:t>Multiple</a:t>
-            </a:r>
-          </a:p>
-        </p:txBody>
-      </p:sp>
-      <p:sp>
-        <p:nvSpPr>
-          <p:cNvPr id="7" name="TextBox 6"/>
-          <p:cNvSpPr txBox="1"/>
-          <p:nvPr/>
-        </p:nvSpPr>
-        <p:spPr>
-          <a:xfrm>
-            <a:off x="10424159" y="2743200"/>
+              <a:defRPr sz="1600" b="0">
+                <a:solidFill>
+                  <a:srgbClr val="E8E8E8"/>
+                </a:solidFill>
+                <a:latin typeface="Courier New"/>
+              </a:defRPr>
+            </a:pPr>
+            <a:r>
+              <a:t>6x</a:t>
+            </a:r>
+          </a:p>
+        </p:txBody>
+      </p:sp>
+      <p:sp>
+        <p:nvSpPr>
+          <p:cNvPr id="11" name="TextBox 10"/>
+          <p:cNvSpPr txBox="1"/>
+          <p:nvPr/>
+        </p:nvSpPr>
+        <p:spPr>
+          <a:xfrm>
+            <a:off x="10424159" y="3200400"/>
             <a:ext cx="2743200" cy="365760"/>
           </a:xfrm>
           <a:prstGeom prst="rect">
@@ -4048,28 +4321,28 @@
           <a:lstStyle/>
           <a:p>
             <a:pPr algn="l">
-              <a:defRPr sz="1200" b="1">
-                <a:solidFill>
-                  <a:srgbClr val="8A9BB0"/>
-                </a:solidFill>
-                <a:latin typeface="Courier New"/>
-              </a:defRPr>
-            </a:pPr>
-            <a:r>
-              <a:t>Return</a:t>
-            </a:r>
-          </a:p>
-        </p:txBody>
-      </p:sp>
-      <p:sp>
-        <p:nvSpPr>
-          <p:cNvPr id="8" name="TextBox 7"/>
-          <p:cNvSpPr txBox="1"/>
-          <p:nvPr/>
-        </p:nvSpPr>
-        <p:spPr>
-          <a:xfrm>
-            <a:off x="1371600" y="3291840"/>
+              <a:defRPr sz="1600" b="0">
+                <a:solidFill>
+                  <a:srgbClr val="E8E8E8"/>
+                </a:solidFill>
+                <a:latin typeface="Courier New"/>
+              </a:defRPr>
+            </a:pPr>
+            <a:r>
+              <a:t>15x — $45M</a:t>
+            </a:r>
+          </a:p>
+        </p:txBody>
+      </p:sp>
+      <p:sp>
+        <p:nvSpPr>
+          <p:cNvPr id="12" name="TextBox 11"/>
+          <p:cNvSpPr txBox="1"/>
+          <p:nvPr/>
+        </p:nvSpPr>
+        <p:spPr>
+          <a:xfrm>
+            <a:off x="1371600" y="3840480"/>
             <a:ext cx="2743200" cy="365760"/>
           </a:xfrm>
           <a:prstGeom prst="rect">
@@ -4086,26 +4359,170 @@
             <a:pPr algn="l">
               <a:defRPr sz="1600" b="0">
                 <a:solidFill>
+                  <a:srgbClr val="D4A84B"/>
+                </a:solidFill>
+                <a:latin typeface="Courier New"/>
+              </a:defRPr>
+            </a:pPr>
+            <a:r>
+              <a:t>Expected</a:t>
+            </a:r>
+          </a:p>
+        </p:txBody>
+      </p:sp>
+      <p:sp>
+        <p:nvSpPr>
+          <p:cNvPr id="13" name="TextBox 12"/>
+          <p:cNvSpPr txBox="1"/>
+          <p:nvPr/>
+        </p:nvSpPr>
+        <p:spPr>
+          <a:xfrm>
+            <a:off x="4389120" y="3840480"/>
+            <a:ext cx="2743200" cy="365760"/>
+          </a:xfrm>
+          <a:prstGeom prst="rect">
+            <a:avLst/>
+          </a:prstGeom>
+          <a:noFill/>
+        </p:spPr>
+        <p:txBody>
+          <a:bodyPr wrap="square">
+            <a:spAutoFit/>
+          </a:bodyPr>
+          <a:lstStyle/>
+          <a:p>
+            <a:pPr algn="l">
+              <a:defRPr sz="1600" b="0">
+                <a:solidFill>
+                  <a:srgbClr val="D4A84B"/>
+                </a:solidFill>
+                <a:latin typeface="Courier New"/>
+              </a:defRPr>
+            </a:pPr>
+            <a:r>
+              <a:t>$20M</a:t>
+            </a:r>
+          </a:p>
+        </p:txBody>
+      </p:sp>
+      <p:sp>
+        <p:nvSpPr>
+          <p:cNvPr id="14" name="TextBox 13"/>
+          <p:cNvSpPr txBox="1"/>
+          <p:nvPr/>
+        </p:nvSpPr>
+        <p:spPr>
+          <a:xfrm>
+            <a:off x="7406640" y="3840480"/>
+            <a:ext cx="2743200" cy="365760"/>
+          </a:xfrm>
+          <a:prstGeom prst="rect">
+            <a:avLst/>
+          </a:prstGeom>
+          <a:noFill/>
+        </p:spPr>
+        <p:txBody>
+          <a:bodyPr wrap="square">
+            <a:spAutoFit/>
+          </a:bodyPr>
+          <a:lstStyle/>
+          <a:p>
+            <a:pPr algn="l">
+              <a:defRPr sz="1600" b="0">
+                <a:solidFill>
+                  <a:srgbClr val="D4A84B"/>
+                </a:solidFill>
+                <a:latin typeface="Courier New"/>
+              </a:defRPr>
+            </a:pPr>
+            <a:r>
+              <a:t>8x</a:t>
+            </a:r>
+          </a:p>
+        </p:txBody>
+      </p:sp>
+      <p:sp>
+        <p:nvSpPr>
+          <p:cNvPr id="15" name="TextBox 14"/>
+          <p:cNvSpPr txBox="1"/>
+          <p:nvPr/>
+        </p:nvSpPr>
+        <p:spPr>
+          <a:xfrm>
+            <a:off x="10424159" y="3840480"/>
+            <a:ext cx="2743200" cy="365760"/>
+          </a:xfrm>
+          <a:prstGeom prst="rect">
+            <a:avLst/>
+          </a:prstGeom>
+          <a:noFill/>
+        </p:spPr>
+        <p:txBody>
+          <a:bodyPr wrap="square">
+            <a:spAutoFit/>
+          </a:bodyPr>
+          <a:lstStyle/>
+          <a:p>
+            <a:pPr algn="l">
+              <a:defRPr sz="1600" b="0">
+                <a:solidFill>
+                  <a:srgbClr val="D4A84B"/>
+                </a:solidFill>
+                <a:latin typeface="Courier New"/>
+              </a:defRPr>
+            </a:pPr>
+            <a:r>
+              <a:t>16x — $48M</a:t>
+            </a:r>
+          </a:p>
+        </p:txBody>
+      </p:sp>
+      <p:sp>
+        <p:nvSpPr>
+          <p:cNvPr id="16" name="TextBox 15"/>
+          <p:cNvSpPr txBox="1"/>
+          <p:nvPr/>
+        </p:nvSpPr>
+        <p:spPr>
+          <a:xfrm>
+            <a:off x="1371600" y="4480560"/>
+            <a:ext cx="2743200" cy="365760"/>
+          </a:xfrm>
+          <a:prstGeom prst="rect">
+            <a:avLst/>
+          </a:prstGeom>
+          <a:noFill/>
+        </p:spPr>
+        <p:txBody>
+          <a:bodyPr wrap="square">
+            <a:spAutoFit/>
+          </a:bodyPr>
+          <a:lstStyle/>
+          <a:p>
+            <a:pPr algn="l">
+              <a:defRPr sz="1600" b="0">
+                <a:solidFill>
                   <a:srgbClr val="E8E8E8"/>
                 </a:solidFill>
                 <a:latin typeface="Courier New"/>
               </a:defRPr>
             </a:pPr>
             <a:r>
-              <a:t>Base</a:t>
-            </a:r>
-          </a:p>
-        </p:txBody>
-      </p:sp>
-      <p:sp>
-        <p:nvSpPr>
-          <p:cNvPr id="9" name="TextBox 8"/>
-          <p:cNvSpPr txBox="1"/>
-          <p:nvPr/>
-        </p:nvSpPr>
-        <p:spPr>
-          <a:xfrm>
-            <a:off x="4389120" y="3291840"/>
+              <a:t>Upside</a:t>
+            </a:r>
+          </a:p>
+        </p:txBody>
+      </p:sp>
+      <p:sp>
+        <p:nvSpPr>
+          <p:cNvPr id="17" name="TextBox 16"/>
+          <p:cNvSpPr txBox="1"/>
+          <p:nvPr/>
+        </p:nvSpPr>
+        <p:spPr>
+          <a:xfrm>
+            <a:off x="4389120" y="4480560"/>
             <a:ext cx="2743200" cy="365760"/>
           </a:xfrm>
           <a:prstGeom prst="rect">
@@ -4128,20 +4545,20 @@
               </a:defRPr>
             </a:pPr>
             <a:r>
-              <a:t>$15M</a:t>
-            </a:r>
-          </a:p>
-        </p:txBody>
-      </p:sp>
-      <p:sp>
-        <p:nvSpPr>
-          <p:cNvPr id="10" name="TextBox 9"/>
-          <p:cNvSpPr txBox="1"/>
-          <p:nvPr/>
-        </p:nvSpPr>
-        <p:spPr>
-          <a:xfrm>
-            <a:off x="7406640" y="3291840"/>
+              <a:t>$100M+</a:t>
+            </a:r>
+          </a:p>
+        </p:txBody>
+      </p:sp>
+      <p:sp>
+        <p:nvSpPr>
+          <p:cNvPr id="18" name="TextBox 17"/>
+          <p:cNvSpPr txBox="1"/>
+          <p:nvPr/>
+        </p:nvSpPr>
+        <p:spPr>
+          <a:xfrm>
+            <a:off x="7406640" y="4480560"/>
             <a:ext cx="2743200" cy="365760"/>
           </a:xfrm>
           <a:prstGeom prst="rect">
@@ -4164,20 +4581,20 @@
               </a:defRPr>
             </a:pPr>
             <a:r>
-              <a:t>6x</a:t>
-            </a:r>
-          </a:p>
-        </p:txBody>
-      </p:sp>
-      <p:sp>
-        <p:nvSpPr>
-          <p:cNvPr id="11" name="TextBox 10"/>
-          <p:cNvSpPr txBox="1"/>
-          <p:nvPr/>
-        </p:nvSpPr>
-        <p:spPr>
-          <a:xfrm>
-            <a:off x="10424159" y="3291840"/>
+              <a:t>15x</a:t>
+            </a:r>
+          </a:p>
+        </p:txBody>
+      </p:sp>
+      <p:sp>
+        <p:nvSpPr>
+          <p:cNvPr id="19" name="TextBox 18"/>
+          <p:cNvSpPr txBox="1"/>
+          <p:nvPr/>
+        </p:nvSpPr>
+        <p:spPr>
+          <a:xfrm>
+            <a:off x="10424159" y="4480560"/>
             <a:ext cx="2743200" cy="365760"/>
           </a:xfrm>
           <a:prstGeom prst="rect">
@@ -4200,294 +4617,6 @@
               </a:defRPr>
             </a:pPr>
             <a:r>
-              <a:t>15x — $45M</a:t>
-            </a:r>
-          </a:p>
-        </p:txBody>
-      </p:sp>
-      <p:sp>
-        <p:nvSpPr>
-          <p:cNvPr id="12" name="TextBox 11"/>
-          <p:cNvSpPr txBox="1"/>
-          <p:nvPr/>
-        </p:nvSpPr>
-        <p:spPr>
-          <a:xfrm>
-            <a:off x="1371600" y="3931920"/>
-            <a:ext cx="2743200" cy="365760"/>
-          </a:xfrm>
-          <a:prstGeom prst="rect">
-            <a:avLst/>
-          </a:prstGeom>
-          <a:noFill/>
-        </p:spPr>
-        <p:txBody>
-          <a:bodyPr wrap="square">
-            <a:spAutoFit/>
-          </a:bodyPr>
-          <a:lstStyle/>
-          <a:p>
-            <a:pPr algn="l">
-              <a:defRPr sz="1600" b="0">
-                <a:solidFill>
-                  <a:srgbClr val="D4A84B"/>
-                </a:solidFill>
-                <a:latin typeface="Courier New"/>
-              </a:defRPr>
-            </a:pPr>
-            <a:r>
-              <a:t>Expected</a:t>
-            </a:r>
-          </a:p>
-        </p:txBody>
-      </p:sp>
-      <p:sp>
-        <p:nvSpPr>
-          <p:cNvPr id="13" name="TextBox 12"/>
-          <p:cNvSpPr txBox="1"/>
-          <p:nvPr/>
-        </p:nvSpPr>
-        <p:spPr>
-          <a:xfrm>
-            <a:off x="4389120" y="3931920"/>
-            <a:ext cx="2743200" cy="365760"/>
-          </a:xfrm>
-          <a:prstGeom prst="rect">
-            <a:avLst/>
-          </a:prstGeom>
-          <a:noFill/>
-        </p:spPr>
-        <p:txBody>
-          <a:bodyPr wrap="square">
-            <a:spAutoFit/>
-          </a:bodyPr>
-          <a:lstStyle/>
-          <a:p>
-            <a:pPr algn="l">
-              <a:defRPr sz="1600" b="0">
-                <a:solidFill>
-                  <a:srgbClr val="D4A84B"/>
-                </a:solidFill>
-                <a:latin typeface="Courier New"/>
-              </a:defRPr>
-            </a:pPr>
-            <a:r>
-              <a:t>$20M</a:t>
-            </a:r>
-          </a:p>
-        </p:txBody>
-      </p:sp>
-      <p:sp>
-        <p:nvSpPr>
-          <p:cNvPr id="14" name="TextBox 13"/>
-          <p:cNvSpPr txBox="1"/>
-          <p:nvPr/>
-        </p:nvSpPr>
-        <p:spPr>
-          <a:xfrm>
-            <a:off x="7406640" y="3931920"/>
-            <a:ext cx="2743200" cy="365760"/>
-          </a:xfrm>
-          <a:prstGeom prst="rect">
-            <a:avLst/>
-          </a:prstGeom>
-          <a:noFill/>
-        </p:spPr>
-        <p:txBody>
-          <a:bodyPr wrap="square">
-            <a:spAutoFit/>
-          </a:bodyPr>
-          <a:lstStyle/>
-          <a:p>
-            <a:pPr algn="l">
-              <a:defRPr sz="1600" b="0">
-                <a:solidFill>
-                  <a:srgbClr val="D4A84B"/>
-                </a:solidFill>
-                <a:latin typeface="Courier New"/>
-              </a:defRPr>
-            </a:pPr>
-            <a:r>
-              <a:t>8x</a:t>
-            </a:r>
-          </a:p>
-        </p:txBody>
-      </p:sp>
-      <p:sp>
-        <p:nvSpPr>
-          <p:cNvPr id="15" name="TextBox 14"/>
-          <p:cNvSpPr txBox="1"/>
-          <p:nvPr/>
-        </p:nvSpPr>
-        <p:spPr>
-          <a:xfrm>
-            <a:off x="10424159" y="3931920"/>
-            <a:ext cx="2743200" cy="365760"/>
-          </a:xfrm>
-          <a:prstGeom prst="rect">
-            <a:avLst/>
-          </a:prstGeom>
-          <a:noFill/>
-        </p:spPr>
-        <p:txBody>
-          <a:bodyPr wrap="square">
-            <a:spAutoFit/>
-          </a:bodyPr>
-          <a:lstStyle/>
-          <a:p>
-            <a:pPr algn="l">
-              <a:defRPr sz="1600" b="0">
-                <a:solidFill>
-                  <a:srgbClr val="D4A84B"/>
-                </a:solidFill>
-                <a:latin typeface="Courier New"/>
-              </a:defRPr>
-            </a:pPr>
-            <a:r>
-              <a:t>16x — $48M</a:t>
-            </a:r>
-          </a:p>
-        </p:txBody>
-      </p:sp>
-      <p:sp>
-        <p:nvSpPr>
-          <p:cNvPr id="16" name="TextBox 15"/>
-          <p:cNvSpPr txBox="1"/>
-          <p:nvPr/>
-        </p:nvSpPr>
-        <p:spPr>
-          <a:xfrm>
-            <a:off x="1371600" y="4572000"/>
-            <a:ext cx="2743200" cy="365760"/>
-          </a:xfrm>
-          <a:prstGeom prst="rect">
-            <a:avLst/>
-          </a:prstGeom>
-          <a:noFill/>
-        </p:spPr>
-        <p:txBody>
-          <a:bodyPr wrap="square">
-            <a:spAutoFit/>
-          </a:bodyPr>
-          <a:lstStyle/>
-          <a:p>
-            <a:pPr algn="l">
-              <a:defRPr sz="1600" b="0">
-                <a:solidFill>
-                  <a:srgbClr val="E8E8E8"/>
-                </a:solidFill>
-                <a:latin typeface="Courier New"/>
-              </a:defRPr>
-            </a:pPr>
-            <a:r>
-              <a:t>Upside</a:t>
-            </a:r>
-          </a:p>
-        </p:txBody>
-      </p:sp>
-      <p:sp>
-        <p:nvSpPr>
-          <p:cNvPr id="17" name="TextBox 16"/>
-          <p:cNvSpPr txBox="1"/>
-          <p:nvPr/>
-        </p:nvSpPr>
-        <p:spPr>
-          <a:xfrm>
-            <a:off x="4389120" y="4572000"/>
-            <a:ext cx="2743200" cy="365760"/>
-          </a:xfrm>
-          <a:prstGeom prst="rect">
-            <a:avLst/>
-          </a:prstGeom>
-          <a:noFill/>
-        </p:spPr>
-        <p:txBody>
-          <a:bodyPr wrap="square">
-            <a:spAutoFit/>
-          </a:bodyPr>
-          <a:lstStyle/>
-          <a:p>
-            <a:pPr algn="l">
-              <a:defRPr sz="1600" b="0">
-                <a:solidFill>
-                  <a:srgbClr val="E8E8E8"/>
-                </a:solidFill>
-                <a:latin typeface="Courier New"/>
-              </a:defRPr>
-            </a:pPr>
-            <a:r>
-              <a:t>$100M+</a:t>
-            </a:r>
-          </a:p>
-        </p:txBody>
-      </p:sp>
-      <p:sp>
-        <p:nvSpPr>
-          <p:cNvPr id="18" name="TextBox 17"/>
-          <p:cNvSpPr txBox="1"/>
-          <p:nvPr/>
-        </p:nvSpPr>
-        <p:spPr>
-          <a:xfrm>
-            <a:off x="7406640" y="4572000"/>
-            <a:ext cx="2743200" cy="365760"/>
-          </a:xfrm>
-          <a:prstGeom prst="rect">
-            <a:avLst/>
-          </a:prstGeom>
-          <a:noFill/>
-        </p:spPr>
-        <p:txBody>
-          <a:bodyPr wrap="square">
-            <a:spAutoFit/>
-          </a:bodyPr>
-          <a:lstStyle/>
-          <a:p>
-            <a:pPr algn="l">
-              <a:defRPr sz="1600" b="0">
-                <a:solidFill>
-                  <a:srgbClr val="E8E8E8"/>
-                </a:solidFill>
-                <a:latin typeface="Courier New"/>
-              </a:defRPr>
-            </a:pPr>
-            <a:r>
-              <a:t>15x</a:t>
-            </a:r>
-          </a:p>
-        </p:txBody>
-      </p:sp>
-      <p:sp>
-        <p:nvSpPr>
-          <p:cNvPr id="19" name="TextBox 18"/>
-          <p:cNvSpPr txBox="1"/>
-          <p:nvPr/>
-        </p:nvSpPr>
-        <p:spPr>
-          <a:xfrm>
-            <a:off x="10424159" y="4572000"/>
-            <a:ext cx="2743200" cy="365760"/>
-          </a:xfrm>
-          <a:prstGeom prst="rect">
-            <a:avLst/>
-          </a:prstGeom>
-          <a:noFill/>
-        </p:spPr>
-        <p:txBody>
-          <a:bodyPr wrap="square">
-            <a:spAutoFit/>
-          </a:bodyPr>
-          <a:lstStyle/>
-          <a:p>
-            <a:pPr algn="l">
-              <a:defRPr sz="1600" b="0">
-                <a:solidFill>
-                  <a:srgbClr val="E8E8E8"/>
-                </a:solidFill>
-                <a:latin typeface="Courier New"/>
-              </a:defRPr>
-            </a:pPr>
-            <a:r>
               <a:t>48–66x</a:t>
             </a:r>
           </a:p>
@@ -4501,7 +4630,7 @@
         </p:nvSpPr>
         <p:spPr>
           <a:xfrm>
-            <a:off x="4572000" y="5486400"/>
+            <a:off x="4572000" y="5303520"/>
             <a:ext cx="5486400" cy="914400"/>
           </a:xfrm>
           <a:prstGeom prst="rect">
@@ -4537,7 +4666,7 @@
         </p:nvSpPr>
         <p:spPr>
           <a:xfrm>
-            <a:off x="3657600" y="6400800"/>
+            <a:off x="3657600" y="6217920"/>
             <a:ext cx="7315200" cy="365760"/>
           </a:xfrm>
           <a:prstGeom prst="rect">
@@ -4573,8 +4702,8 @@
         </p:nvSpPr>
         <p:spPr>
           <a:xfrm>
-            <a:off x="1371600" y="7315200"/>
-            <a:ext cx="11887200" cy="365760"/>
+            <a:off x="1371600" y="7132320"/>
+            <a:ext cx="11887200" cy="274320"/>
           </a:xfrm>
           <a:prstGeom prst="rect">
             <a:avLst/>
@@ -4596,7 +4725,7 @@
               </a:defRPr>
             </a:pPr>
             <a:r>
-              <a:t>Devin raised at $2B. Cursor at $400M. You're buying this at $9M with better unit economics than both.</a:t>
+              <a:t>Devin raised at $2B. Cursor at $400M. You're buying at $9M.</a:t>
             </a:r>
           </a:p>
         </p:txBody>
@@ -4635,8 +4764,8 @@
         </p:nvSpPr>
         <p:spPr>
           <a:xfrm>
-            <a:off x="1097280" y="731520"/>
-            <a:ext cx="3657600" cy="365760"/>
+            <a:off x="1097280" y="548640"/>
+            <a:ext cx="3657600" cy="274320"/>
           </a:xfrm>
           <a:prstGeom prst="rect">
             <a:avLst/>
@@ -4671,22 +4800,22 @@
         </p:nvSpPr>
         <p:spPr>
           <a:xfrm>
-            <a:off x="1097280" y="1188720"/>
-            <a:ext cx="11887200" cy="914400"/>
-          </a:xfrm>
-          <a:prstGeom prst="rect">
-            <a:avLst/>
-          </a:prstGeom>
-          <a:noFill/>
-        </p:spPr>
-        <p:txBody>
-          <a:bodyPr wrap="square">
-            <a:spAutoFit/>
-          </a:bodyPr>
-          <a:lstStyle/>
-          <a:p>
-            <a:pPr algn="l">
-              <a:defRPr sz="4000" b="1">
+            <a:off x="1097280" y="914400"/>
+            <a:ext cx="11887200" cy="731520"/>
+          </a:xfrm>
+          <a:prstGeom prst="rect">
+            <a:avLst/>
+          </a:prstGeom>
+          <a:noFill/>
+        </p:spPr>
+        <p:txBody>
+          <a:bodyPr wrap="square">
+            <a:spAutoFit/>
+          </a:bodyPr>
+          <a:lstStyle/>
+          <a:p>
+            <a:pPr algn="l">
+              <a:defRPr sz="3800" b="1">
                 <a:solidFill>
                   <a:srgbClr val="E8E8E8"/>
                 </a:solidFill>
@@ -4707,8 +4836,8 @@
         </p:nvSpPr>
         <p:spPr>
           <a:xfrm>
-            <a:off x="1371600" y="2743200"/>
-            <a:ext cx="6400800" cy="1371600"/>
+            <a:off x="1371600" y="2286000"/>
+            <a:ext cx="10972800" cy="1371600"/>
           </a:xfrm>
           <a:prstGeom prst="rect">
             <a:avLst/>
@@ -4730,35 +4859,82 @@
               </a:defRPr>
             </a:pPr>
             <a:r>
-              <a:t>Solo technical founder. Built the entire framework — 24 agents, autonomous daemon pipeline, marketing site — at $35K/month burn. No team. No outside capital.</a:t>
-            </a:r>
-          </a:p>
-        </p:txBody>
-      </p:sp>
-      <p:sp>
-        <p:nvSpPr>
-          <p:cNvPr id="5" name="TextBox 4"/>
-          <p:cNvSpPr txBox="1"/>
-          <p:nvPr/>
-        </p:nvSpPr>
-        <p:spPr>
-          <a:xfrm>
-            <a:off x="1371600" y="5029200"/>
-            <a:ext cx="3657600" cy="365760"/>
-          </a:xfrm>
-          <a:prstGeom prst="rect">
-            <a:avLst/>
-          </a:prstGeom>
-          <a:noFill/>
-        </p:spPr>
-        <p:txBody>
-          <a:bodyPr wrap="square">
-            <a:spAutoFit/>
-          </a:bodyPr>
-          <a:lstStyle/>
-          <a:p>
-            <a:pPr algn="l">
-              <a:defRPr sz="1400" b="0">
+              <a:t>Solo technical founder. Built the entire framework — 24 agents, autonomous daemon</a:t>
+            </a:r>
+            <a:br/>
+            <a:r>
+              <a:t>pipeline, marketing site — at $35K/month burn. No team. No outside capital.</a:t>
+            </a:r>
+          </a:p>
+        </p:txBody>
+      </p:sp>
+      <p:sp>
+        <p:nvSpPr>
+          <p:cNvPr id="5" name="Rounded Rectangle 4"/>
+          <p:cNvSpPr/>
+          <p:nvPr/>
+        </p:nvSpPr>
+        <p:spPr>
+          <a:xfrm>
+            <a:off x="1371600" y="4572000"/>
+            <a:ext cx="3657600" cy="1371600"/>
+          </a:xfrm>
+          <a:prstGeom prst="roundRect">
+            <a:avLst>
+              <a:gd name="adj" fmla="val 5000"/>
+            </a:avLst>
+          </a:prstGeom>
+          <a:solidFill>
+            <a:srgbClr val="1E2A38"/>
+          </a:solidFill>
+          <a:ln/>
+        </p:spPr>
+        <p:style>
+          <a:lnRef idx="1">
+            <a:schemeClr val="accent1"/>
+          </a:lnRef>
+          <a:fillRef idx="3">
+            <a:schemeClr val="accent1"/>
+          </a:fillRef>
+          <a:effectRef idx="2">
+            <a:schemeClr val="accent1"/>
+          </a:effectRef>
+          <a:fontRef idx="minor">
+            <a:schemeClr val="lt1"/>
+          </a:fontRef>
+        </p:style>
+        <p:txBody>
+          <a:bodyPr rtlCol="0" anchor="ctr"/>
+          <a:lstStyle/>
+          <a:p>
+            <a:pPr algn="ctr"/>
+          </a:p>
+        </p:txBody>
+      </p:sp>
+      <p:sp>
+        <p:nvSpPr>
+          <p:cNvPr id="6" name="TextBox 5"/>
+          <p:cNvSpPr txBox="1"/>
+          <p:nvPr/>
+        </p:nvSpPr>
+        <p:spPr>
+          <a:xfrm>
+            <a:off x="1645920" y="4663440"/>
+            <a:ext cx="3108960" cy="274320"/>
+          </a:xfrm>
+          <a:prstGeom prst="rect">
+            <a:avLst/>
+          </a:prstGeom>
+          <a:noFill/>
+        </p:spPr>
+        <p:txBody>
+          <a:bodyPr wrap="square">
+            <a:spAutoFit/>
+          </a:bodyPr>
+          <a:lstStyle/>
+          <a:p>
+            <a:pPr algn="l">
+              <a:defRPr sz="1300" b="0">
                 <a:solidFill>
                   <a:srgbClr val="2E8B8B"/>
                 </a:solidFill>
@@ -4773,14 +4949,14 @@
       </p:sp>
       <p:sp>
         <p:nvSpPr>
-          <p:cNvPr id="6" name="TextBox 5"/>
-          <p:cNvSpPr txBox="1"/>
-          <p:nvPr/>
-        </p:nvSpPr>
-        <p:spPr>
-          <a:xfrm>
-            <a:off x="1371600" y="5486400"/>
-            <a:ext cx="3657600" cy="365760"/>
+          <p:cNvPr id="7" name="TextBox 6"/>
+          <p:cNvSpPr txBox="1"/>
+          <p:nvPr/>
+        </p:nvSpPr>
+        <p:spPr>
+          <a:xfrm>
+            <a:off x="1645920" y="5029200"/>
+            <a:ext cx="3108960" cy="365760"/>
           </a:xfrm>
           <a:prstGeom prst="rect">
             <a:avLst/>
@@ -4809,28 +4985,71 @@
       </p:sp>
       <p:sp>
         <p:nvSpPr>
-          <p:cNvPr id="7" name="TextBox 6"/>
-          <p:cNvSpPr txBox="1"/>
-          <p:nvPr/>
-        </p:nvSpPr>
-        <p:spPr>
-          <a:xfrm>
-            <a:off x="5486400" y="5029200"/>
-            <a:ext cx="3657600" cy="365760"/>
-          </a:xfrm>
-          <a:prstGeom prst="rect">
-            <a:avLst/>
-          </a:prstGeom>
-          <a:noFill/>
-        </p:spPr>
-        <p:txBody>
-          <a:bodyPr wrap="square">
-            <a:spAutoFit/>
-          </a:bodyPr>
-          <a:lstStyle/>
-          <a:p>
-            <a:pPr algn="l">
-              <a:defRPr sz="1400" b="0">
+          <p:cNvPr id="8" name="Rounded Rectangle 7"/>
+          <p:cNvSpPr/>
+          <p:nvPr/>
+        </p:nvSpPr>
+        <p:spPr>
+          <a:xfrm>
+            <a:off x="5486400" y="4572000"/>
+            <a:ext cx="3657600" cy="1371600"/>
+          </a:xfrm>
+          <a:prstGeom prst="roundRect">
+            <a:avLst>
+              <a:gd name="adj" fmla="val 5000"/>
+            </a:avLst>
+          </a:prstGeom>
+          <a:solidFill>
+            <a:srgbClr val="1E2A38"/>
+          </a:solidFill>
+          <a:ln/>
+        </p:spPr>
+        <p:style>
+          <a:lnRef idx="1">
+            <a:schemeClr val="accent1"/>
+          </a:lnRef>
+          <a:fillRef idx="3">
+            <a:schemeClr val="accent1"/>
+          </a:fillRef>
+          <a:effectRef idx="2">
+            <a:schemeClr val="accent1"/>
+          </a:effectRef>
+          <a:fontRef idx="minor">
+            <a:schemeClr val="lt1"/>
+          </a:fontRef>
+        </p:style>
+        <p:txBody>
+          <a:bodyPr rtlCol="0" anchor="ctr"/>
+          <a:lstStyle/>
+          <a:p>
+            <a:pPr algn="ctr"/>
+          </a:p>
+        </p:txBody>
+      </p:sp>
+      <p:sp>
+        <p:nvSpPr>
+          <p:cNvPr id="9" name="TextBox 8"/>
+          <p:cNvSpPr txBox="1"/>
+          <p:nvPr/>
+        </p:nvSpPr>
+        <p:spPr>
+          <a:xfrm>
+            <a:off x="5760720" y="4663440"/>
+            <a:ext cx="3108960" cy="274320"/>
+          </a:xfrm>
+          <a:prstGeom prst="rect">
+            <a:avLst/>
+          </a:prstGeom>
+          <a:noFill/>
+        </p:spPr>
+        <p:txBody>
+          <a:bodyPr wrap="square">
+            <a:spAutoFit/>
+          </a:bodyPr>
+          <a:lstStyle/>
+          <a:p>
+            <a:pPr algn="l">
+              <a:defRPr sz="1300" b="0">
                 <a:solidFill>
                   <a:srgbClr val="2E8B8B"/>
                 </a:solidFill>
@@ -4845,14 +5064,14 @@
       </p:sp>
       <p:sp>
         <p:nvSpPr>
-          <p:cNvPr id="8" name="TextBox 7"/>
-          <p:cNvSpPr txBox="1"/>
-          <p:nvPr/>
-        </p:nvSpPr>
-        <p:spPr>
-          <a:xfrm>
-            <a:off x="5486400" y="5486400"/>
-            <a:ext cx="3657600" cy="365760"/>
+          <p:cNvPr id="10" name="TextBox 9"/>
+          <p:cNvSpPr txBox="1"/>
+          <p:nvPr/>
+        </p:nvSpPr>
+        <p:spPr>
+          <a:xfrm>
+            <a:off x="5760720" y="5029200"/>
+            <a:ext cx="3108960" cy="365760"/>
           </a:xfrm>
           <a:prstGeom prst="rect">
             <a:avLst/>
@@ -4881,28 +5100,71 @@
       </p:sp>
       <p:sp>
         <p:nvSpPr>
-          <p:cNvPr id="9" name="TextBox 8"/>
-          <p:cNvSpPr txBox="1"/>
-          <p:nvPr/>
-        </p:nvSpPr>
-        <p:spPr>
-          <a:xfrm>
-            <a:off x="9601200" y="5029200"/>
-            <a:ext cx="3657600" cy="365760"/>
-          </a:xfrm>
-          <a:prstGeom prst="rect">
-            <a:avLst/>
-          </a:prstGeom>
-          <a:noFill/>
-        </p:spPr>
-        <p:txBody>
-          <a:bodyPr wrap="square">
-            <a:spAutoFit/>
-          </a:bodyPr>
-          <a:lstStyle/>
-          <a:p>
-            <a:pPr algn="l">
-              <a:defRPr sz="1400" b="0">
+          <p:cNvPr id="11" name="Rounded Rectangle 10"/>
+          <p:cNvSpPr/>
+          <p:nvPr/>
+        </p:nvSpPr>
+        <p:spPr>
+          <a:xfrm>
+            <a:off x="9601200" y="4572000"/>
+            <a:ext cx="3657600" cy="1371600"/>
+          </a:xfrm>
+          <a:prstGeom prst="roundRect">
+            <a:avLst>
+              <a:gd name="adj" fmla="val 5000"/>
+            </a:avLst>
+          </a:prstGeom>
+          <a:solidFill>
+            <a:srgbClr val="1E2A38"/>
+          </a:solidFill>
+          <a:ln/>
+        </p:spPr>
+        <p:style>
+          <a:lnRef idx="1">
+            <a:schemeClr val="accent1"/>
+          </a:lnRef>
+          <a:fillRef idx="3">
+            <a:schemeClr val="accent1"/>
+          </a:fillRef>
+          <a:effectRef idx="2">
+            <a:schemeClr val="accent1"/>
+          </a:effectRef>
+          <a:fontRef idx="minor">
+            <a:schemeClr val="lt1"/>
+          </a:fontRef>
+        </p:style>
+        <p:txBody>
+          <a:bodyPr rtlCol="0" anchor="ctr"/>
+          <a:lstStyle/>
+          <a:p>
+            <a:pPr algn="ctr"/>
+          </a:p>
+        </p:txBody>
+      </p:sp>
+      <p:sp>
+        <p:nvSpPr>
+          <p:cNvPr id="12" name="TextBox 11"/>
+          <p:cNvSpPr txBox="1"/>
+          <p:nvPr/>
+        </p:nvSpPr>
+        <p:spPr>
+          <a:xfrm>
+            <a:off x="9875520" y="4663440"/>
+            <a:ext cx="3108960" cy="274320"/>
+          </a:xfrm>
+          <a:prstGeom prst="rect">
+            <a:avLst/>
+          </a:prstGeom>
+          <a:noFill/>
+        </p:spPr>
+        <p:txBody>
+          <a:bodyPr wrap="square">
+            <a:spAutoFit/>
+          </a:bodyPr>
+          <a:lstStyle/>
+          <a:p>
+            <a:pPr algn="l">
+              <a:defRPr sz="1300" b="0">
                 <a:solidFill>
                   <a:srgbClr val="2E8B8B"/>
                 </a:solidFill>
@@ -4917,14 +5179,14 @@
       </p:sp>
       <p:sp>
         <p:nvSpPr>
-          <p:cNvPr id="10" name="TextBox 9"/>
-          <p:cNvSpPr txBox="1"/>
-          <p:nvPr/>
-        </p:nvSpPr>
-        <p:spPr>
-          <a:xfrm>
-            <a:off x="9601200" y="5486400"/>
-            <a:ext cx="3657600" cy="365760"/>
+          <p:cNvPr id="13" name="TextBox 12"/>
+          <p:cNvSpPr txBox="1"/>
+          <p:nvPr/>
+        </p:nvSpPr>
+        <p:spPr>
+          <a:xfrm>
+            <a:off x="9875520" y="5029200"/>
+            <a:ext cx="3108960" cy="365760"/>
           </a:xfrm>
           <a:prstGeom prst="rect">
             <a:avLst/>
@@ -4953,14 +5215,14 @@
       </p:sp>
       <p:sp>
         <p:nvSpPr>
-          <p:cNvPr id="11" name="TextBox 10"/>
+          <p:cNvPr id="14" name="TextBox 13"/>
           <p:cNvSpPr txBox="1"/>
           <p:nvPr/>
         </p:nvSpPr>
         <p:spPr>
           <a:xfrm>
             <a:off x="1371600" y="6858000"/>
-            <a:ext cx="11887200" cy="457200"/>
+            <a:ext cx="11887200" cy="365760"/>
           </a:xfrm>
           <a:prstGeom prst="rect">
             <a:avLst/>
@@ -5021,8 +5283,8 @@
         </p:nvSpPr>
         <p:spPr>
           <a:xfrm>
-            <a:off x="1097280" y="731520"/>
-            <a:ext cx="3657600" cy="365760"/>
+            <a:off x="1097280" y="548640"/>
+            <a:ext cx="3657600" cy="274320"/>
           </a:xfrm>
           <a:prstGeom prst="rect">
             <a:avLst/>
@@ -5057,7 +5319,7 @@
         </p:nvSpPr>
         <p:spPr>
           <a:xfrm>
-            <a:off x="1097280" y="1188720"/>
+            <a:off x="1097280" y="1371600"/>
             <a:ext cx="11887200" cy="914400"/>
           </a:xfrm>
           <a:prstGeom prst="rect">
@@ -5071,7 +5333,7 @@
           </a:bodyPr>
           <a:lstStyle/>
           <a:p>
-            <a:pPr algn="l">
+            <a:pPr algn="ctr">
               <a:defRPr sz="4800" b="1">
                 <a:solidFill>
                   <a:srgbClr val="E8E8E8"/>
@@ -5094,7 +5356,7 @@
         <p:spPr>
           <a:xfrm>
             <a:off x="1371600" y="2743200"/>
-            <a:ext cx="11887200" cy="731520"/>
+            <a:ext cx="11887200" cy="548640"/>
           </a:xfrm>
           <a:prstGeom prst="rect">
             <a:avLst/>
@@ -5123,28 +5385,71 @@
       </p:sp>
       <p:sp>
         <p:nvSpPr>
-          <p:cNvPr id="5" name="TextBox 4"/>
-          <p:cNvSpPr txBox="1"/>
-          <p:nvPr/>
-        </p:nvSpPr>
-        <p:spPr>
-          <a:xfrm>
-            <a:off x="1371600" y="4114800"/>
-            <a:ext cx="3657600" cy="365760"/>
-          </a:xfrm>
-          <a:prstGeom prst="rect">
-            <a:avLst/>
-          </a:prstGeom>
-          <a:noFill/>
-        </p:spPr>
-        <p:txBody>
-          <a:bodyPr wrap="square">
-            <a:spAutoFit/>
-          </a:bodyPr>
-          <a:lstStyle/>
-          <a:p>
-            <a:pPr algn="l">
-              <a:defRPr sz="1400" b="1">
+          <p:cNvPr id="5" name="Rounded Rectangle 4"/>
+          <p:cNvSpPr/>
+          <p:nvPr/>
+        </p:nvSpPr>
+        <p:spPr>
+          <a:xfrm>
+            <a:off x="1371600" y="3840480"/>
+            <a:ext cx="3840480" cy="1828800"/>
+          </a:xfrm>
+          <a:prstGeom prst="roundRect">
+            <a:avLst>
+              <a:gd name="adj" fmla="val 5000"/>
+            </a:avLst>
+          </a:prstGeom>
+          <a:solidFill>
+            <a:srgbClr val="1E2A38"/>
+          </a:solidFill>
+          <a:ln/>
+        </p:spPr>
+        <p:style>
+          <a:lnRef idx="1">
+            <a:schemeClr val="accent1"/>
+          </a:lnRef>
+          <a:fillRef idx="3">
+            <a:schemeClr val="accent1"/>
+          </a:fillRef>
+          <a:effectRef idx="2">
+            <a:schemeClr val="accent1"/>
+          </a:effectRef>
+          <a:fontRef idx="minor">
+            <a:schemeClr val="lt1"/>
+          </a:fontRef>
+        </p:style>
+        <p:txBody>
+          <a:bodyPr rtlCol="0" anchor="ctr"/>
+          <a:lstStyle/>
+          <a:p>
+            <a:pPr algn="ctr"/>
+          </a:p>
+        </p:txBody>
+      </p:sp>
+      <p:sp>
+        <p:nvSpPr>
+          <p:cNvPr id="6" name="TextBox 5"/>
+          <p:cNvSpPr txBox="1"/>
+          <p:nvPr/>
+        </p:nvSpPr>
+        <p:spPr>
+          <a:xfrm>
+            <a:off x="1645920" y="3931920"/>
+            <a:ext cx="3200400" cy="274320"/>
+          </a:xfrm>
+          <a:prstGeom prst="rect">
+            <a:avLst/>
+          </a:prstGeom>
+          <a:noFill/>
+        </p:spPr>
+        <p:txBody>
+          <a:bodyPr wrap="square">
+            <a:spAutoFit/>
+          </a:bodyPr>
+          <a:lstStyle/>
+          <a:p>
+            <a:pPr algn="l">
+              <a:defRPr sz="1300" b="0">
                 <a:solidFill>
                   <a:srgbClr val="2E8B8B"/>
                 </a:solidFill>
@@ -5159,14 +5464,14 @@
       </p:sp>
       <p:sp>
         <p:nvSpPr>
-          <p:cNvPr id="6" name="TextBox 5"/>
-          <p:cNvSpPr txBox="1"/>
-          <p:nvPr/>
-        </p:nvSpPr>
-        <p:spPr>
-          <a:xfrm>
-            <a:off x="1371600" y="4572000"/>
-            <a:ext cx="3657600" cy="1371600"/>
+          <p:cNvPr id="7" name="TextBox 6"/>
+          <p:cNvSpPr txBox="1"/>
+          <p:nvPr/>
+        </p:nvSpPr>
+        <p:spPr>
+          <a:xfrm>
+            <a:off x="1645920" y="4297680"/>
+            <a:ext cx="3200400" cy="914400"/>
           </a:xfrm>
           <a:prstGeom prst="rect">
             <a:avLst/>
@@ -5194,37 +5499,195 @@
             <a:r>
               <a:t>Pilot → 10 clients</a:t>
             </a:r>
+          </a:p>
+        </p:txBody>
+      </p:sp>
+      <p:sp>
+        <p:nvSpPr>
+          <p:cNvPr id="8" name="Rounded Rectangle 7"/>
+          <p:cNvSpPr/>
+          <p:nvPr/>
+        </p:nvSpPr>
+        <p:spPr>
+          <a:xfrm>
+            <a:off x="5760720" y="3840480"/>
+            <a:ext cx="3840480" cy="1828800"/>
+          </a:xfrm>
+          <a:prstGeom prst="roundRect">
+            <a:avLst>
+              <a:gd name="adj" fmla="val 5000"/>
+            </a:avLst>
+          </a:prstGeom>
+          <a:solidFill>
+            <a:srgbClr val="1E2A38"/>
+          </a:solidFill>
+          <a:ln/>
+        </p:spPr>
+        <p:style>
+          <a:lnRef idx="1">
+            <a:schemeClr val="accent1"/>
+          </a:lnRef>
+          <a:fillRef idx="3">
+            <a:schemeClr val="accent1"/>
+          </a:fillRef>
+          <a:effectRef idx="2">
+            <a:schemeClr val="accent1"/>
+          </a:effectRef>
+          <a:fontRef idx="minor">
+            <a:schemeClr val="lt1"/>
+          </a:fontRef>
+        </p:style>
+        <p:txBody>
+          <a:bodyPr rtlCol="0" anchor="ctr"/>
+          <a:lstStyle/>
+          <a:p>
+            <a:pPr algn="ctr"/>
+          </a:p>
+        </p:txBody>
+      </p:sp>
+      <p:sp>
+        <p:nvSpPr>
+          <p:cNvPr id="9" name="TextBox 8"/>
+          <p:cNvSpPr txBox="1"/>
+          <p:nvPr/>
+        </p:nvSpPr>
+        <p:spPr>
+          <a:xfrm>
+            <a:off x="6035040" y="3931920"/>
+            <a:ext cx="3200400" cy="274320"/>
+          </a:xfrm>
+          <a:prstGeom prst="rect">
+            <a:avLst/>
+          </a:prstGeom>
+          <a:noFill/>
+        </p:spPr>
+        <p:txBody>
+          <a:bodyPr wrap="square">
+            <a:spAutoFit/>
+          </a:bodyPr>
+          <a:lstStyle/>
+          <a:p>
+            <a:pPr algn="l">
+              <a:defRPr sz="1300" b="0">
+                <a:solidFill>
+                  <a:srgbClr val="2E8B8B"/>
+                </a:solidFill>
+                <a:latin typeface="Courier New"/>
+              </a:defRPr>
+            </a:pPr>
+            <a:r>
+              <a:t>Year 2</a:t>
+            </a:r>
+          </a:p>
+        </p:txBody>
+      </p:sp>
+      <p:sp>
+        <p:nvSpPr>
+          <p:cNvPr id="10" name="TextBox 9"/>
+          <p:cNvSpPr txBox="1"/>
+          <p:nvPr/>
+        </p:nvSpPr>
+        <p:spPr>
+          <a:xfrm>
+            <a:off x="6035040" y="4297680"/>
+            <a:ext cx="3200400" cy="914400"/>
+          </a:xfrm>
+          <a:prstGeom prst="rect">
+            <a:avLst/>
+          </a:prstGeom>
+          <a:noFill/>
+        </p:spPr>
+        <p:txBody>
+          <a:bodyPr wrap="square">
+            <a:spAutoFit/>
+          </a:bodyPr>
+          <a:lstStyle/>
+          <a:p>
+            <a:pPr algn="l">
+              <a:defRPr sz="1400" b="0">
+                <a:solidFill>
+                  <a:srgbClr val="8A9BB0"/>
+                </a:solidFill>
+                <a:latin typeface="Calibri"/>
+              </a:defRPr>
+            </a:pPr>
+            <a:r>
+              <a:t>5-person team</a:t>
+            </a:r>
             <a:br/>
             <a:r>
-              <a:t>$420K burn/mo</a:t>
-            </a:r>
-          </a:p>
-        </p:txBody>
-      </p:sp>
-      <p:sp>
-        <p:nvSpPr>
-          <p:cNvPr id="7" name="TextBox 6"/>
-          <p:cNvSpPr txBox="1"/>
-          <p:nvPr/>
-        </p:nvSpPr>
-        <p:spPr>
-          <a:xfrm>
-            <a:off x="5760720" y="4114800"/>
-            <a:ext cx="3657600" cy="365760"/>
-          </a:xfrm>
-          <a:prstGeom prst="rect">
-            <a:avLst/>
-          </a:prstGeom>
-          <a:noFill/>
-        </p:spPr>
-        <p:txBody>
-          <a:bodyPr wrap="square">
-            <a:spAutoFit/>
-          </a:bodyPr>
-          <a:lstStyle/>
-          <a:p>
-            <a:pPr algn="l">
-              <a:defRPr sz="1400" b="1">
+              <a:t>Scale to 50+</a:t>
+            </a:r>
+          </a:p>
+        </p:txBody>
+      </p:sp>
+      <p:sp>
+        <p:nvSpPr>
+          <p:cNvPr id="11" name="Rounded Rectangle 10"/>
+          <p:cNvSpPr/>
+          <p:nvPr/>
+        </p:nvSpPr>
+        <p:spPr>
+          <a:xfrm>
+            <a:off x="10149840" y="3840480"/>
+            <a:ext cx="3840480" cy="1828800"/>
+          </a:xfrm>
+          <a:prstGeom prst="roundRect">
+            <a:avLst>
+              <a:gd name="adj" fmla="val 5000"/>
+            </a:avLst>
+          </a:prstGeom>
+          <a:solidFill>
+            <a:srgbClr val="1E2A38"/>
+          </a:solidFill>
+          <a:ln/>
+        </p:spPr>
+        <p:style>
+          <a:lnRef idx="1">
+            <a:schemeClr val="accent1"/>
+          </a:lnRef>
+          <a:fillRef idx="3">
+            <a:schemeClr val="accent1"/>
+          </a:fillRef>
+          <a:effectRef idx="2">
+            <a:schemeClr val="accent1"/>
+          </a:effectRef>
+          <a:fontRef idx="minor">
+            <a:schemeClr val="lt1"/>
+          </a:fontRef>
+        </p:style>
+        <p:txBody>
+          <a:bodyPr rtlCol="0" anchor="ctr"/>
+          <a:lstStyle/>
+          <a:p>
+            <a:pPr algn="ctr"/>
+          </a:p>
+        </p:txBody>
+      </p:sp>
+      <p:sp>
+        <p:nvSpPr>
+          <p:cNvPr id="12" name="TextBox 11"/>
+          <p:cNvSpPr txBox="1"/>
+          <p:nvPr/>
+        </p:nvSpPr>
+        <p:spPr>
+          <a:xfrm>
+            <a:off x="10424160" y="3931920"/>
+            <a:ext cx="3200400" cy="274320"/>
+          </a:xfrm>
+          <a:prstGeom prst="rect">
+            <a:avLst/>
+          </a:prstGeom>
+          <a:noFill/>
+        </p:spPr>
+        <p:txBody>
+          <a:bodyPr wrap="square">
+            <a:spAutoFit/>
+          </a:bodyPr>
+          <a:lstStyle/>
+          <a:p>
+            <a:pPr algn="l">
+              <a:defRPr sz="1300" b="0">
                 <a:solidFill>
                   <a:srgbClr val="2E8B8B"/>
                 </a:solidFill>
@@ -5232,21 +5695,21 @@
               </a:defRPr>
             </a:pPr>
             <a:r>
-              <a:t>Year 2</a:t>
-            </a:r>
-          </a:p>
-        </p:txBody>
-      </p:sp>
-      <p:sp>
-        <p:nvSpPr>
-          <p:cNvPr id="8" name="TextBox 7"/>
-          <p:cNvSpPr txBox="1"/>
-          <p:nvPr/>
-        </p:nvSpPr>
-        <p:spPr>
-          <a:xfrm>
-            <a:off x="5760720" y="4572000"/>
-            <a:ext cx="3657600" cy="1371600"/>
+              <a:t>Path to A</a:t>
+            </a:r>
+          </a:p>
+        </p:txBody>
+      </p:sp>
+      <p:sp>
+        <p:nvSpPr>
+          <p:cNvPr id="13" name="TextBox 12"/>
+          <p:cNvSpPr txBox="1"/>
+          <p:nvPr/>
+        </p:nvSpPr>
+        <p:spPr>
+          <a:xfrm>
+            <a:off x="10424160" y="4297680"/>
+            <a:ext cx="3200400" cy="914400"/>
           </a:xfrm>
           <a:prstGeom prst="rect">
             <a:avLst/>
@@ -5268,94 +5731,10 @@
               </a:defRPr>
             </a:pPr>
             <a:r>
-              <a:t>5-person team</a:t>
+              <a:t>$3-10M ARR</a:t>
             </a:r>
             <a:br/>
             <a:r>
-              <a:t>Scale to 50+ clients</a:t>
-            </a:r>
-            <a:br/>
-            <a:r>
-              <a:t>$906K burn/mo</a:t>
-            </a:r>
-          </a:p>
-        </p:txBody>
-      </p:sp>
-      <p:sp>
-        <p:nvSpPr>
-          <p:cNvPr id="9" name="TextBox 8"/>
-          <p:cNvSpPr txBox="1"/>
-          <p:nvPr/>
-        </p:nvSpPr>
-        <p:spPr>
-          <a:xfrm>
-            <a:off x="10149840" y="4114800"/>
-            <a:ext cx="3657600" cy="365760"/>
-          </a:xfrm>
-          <a:prstGeom prst="rect">
-            <a:avLst/>
-          </a:prstGeom>
-          <a:noFill/>
-        </p:spPr>
-        <p:txBody>
-          <a:bodyPr wrap="square">
-            <a:spAutoFit/>
-          </a:bodyPr>
-          <a:lstStyle/>
-          <a:p>
-            <a:pPr algn="l">
-              <a:defRPr sz="1400" b="1">
-                <a:solidFill>
-                  <a:srgbClr val="2E8B8B"/>
-                </a:solidFill>
-                <a:latin typeface="Courier New"/>
-              </a:defRPr>
-            </a:pPr>
-            <a:r>
-              <a:t>Path to A</a:t>
-            </a:r>
-          </a:p>
-        </p:txBody>
-      </p:sp>
-      <p:sp>
-        <p:nvSpPr>
-          <p:cNvPr id="10" name="TextBox 9"/>
-          <p:cNvSpPr txBox="1"/>
-          <p:nvPr/>
-        </p:nvSpPr>
-        <p:spPr>
-          <a:xfrm>
-            <a:off x="10149840" y="4572000"/>
-            <a:ext cx="3657600" cy="1371600"/>
-          </a:xfrm>
-          <a:prstGeom prst="rect">
-            <a:avLst/>
-          </a:prstGeom>
-          <a:noFill/>
-        </p:spPr>
-        <p:txBody>
-          <a:bodyPr wrap="square">
-            <a:spAutoFit/>
-          </a:bodyPr>
-          <a:lstStyle/>
-          <a:p>
-            <a:pPr algn="l">
-              <a:defRPr sz="1400" b="0">
-                <a:solidFill>
-                  <a:srgbClr val="8A9BB0"/>
-                </a:solidFill>
-                <a:latin typeface="Calibri"/>
-              </a:defRPr>
-            </a:pPr>
-            <a:r>
-              <a:t>$3-10M ARR</a:t>
-            </a:r>
-            <a:br/>
-            <a:r>
-              <a:t>$30-100M valuation</a:t>
-            </a:r>
-            <a:br/>
-            <a:r>
               <a:t>18 months</a:t>
             </a:r>
           </a:p>
@@ -5363,13 +5742,13 @@
       </p:sp>
       <p:sp>
         <p:nvSpPr>
-          <p:cNvPr id="11" name="TextBox 10"/>
-          <p:cNvSpPr txBox="1"/>
-          <p:nvPr/>
-        </p:nvSpPr>
-        <p:spPr>
-          <a:xfrm>
-            <a:off x="1371600" y="6583680"/>
+          <p:cNvPr id="14" name="TextBox 13"/>
+          <p:cNvSpPr txBox="1"/>
+          <p:nvPr/>
+        </p:nvSpPr>
+        <p:spPr>
+          <a:xfrm>
+            <a:off x="1371600" y="6400800"/>
             <a:ext cx="11887200" cy="457200"/>
           </a:xfrm>
           <a:prstGeom prst="rect">
@@ -5386,7 +5765,7 @@
             <a:pPr algn="ctr">
               <a:defRPr sz="2200" b="1">
                 <a:solidFill>
-                  <a:srgbClr val="D4A84B"/>
+                  <a:srgbClr val="D4FF00"/>
                 </a:solidFill>
                 <a:latin typeface="Calibri"/>
               </a:defRPr>
@@ -5432,7 +5811,7 @@
         <p:spPr>
           <a:xfrm>
             <a:off x="1097280" y="548640"/>
-            <a:ext cx="3657600" cy="365760"/>
+            <a:ext cx="3657600" cy="274320"/>
           </a:xfrm>
           <a:prstGeom prst="rect">
             <a:avLst/>
@@ -5454,7 +5833,7 @@
               </a:defRPr>
             </a:pPr>
             <a:r>
-              <a:t>BENCHMARK METHODOLOGY</a:t>
+              <a:t>APPENDIX: BENCHMARK METHODOLOGY</a:t>
             </a:r>
           </a:p>
         </p:txBody>
@@ -5468,7 +5847,7 @@
         <p:spPr>
           <a:xfrm>
             <a:off x="1097280" y="914400"/>
-            <a:ext cx="11887200" cy="731520"/>
+            <a:ext cx="11887200" cy="548640"/>
           </a:xfrm>
           <a:prstGeom prst="rect">
             <a:avLst/>
@@ -5503,8 +5882,8 @@
         </p:nvSpPr>
         <p:spPr>
           <a:xfrm>
-            <a:off x="1097280" y="2011680"/>
-            <a:ext cx="11887200" cy="548640"/>
+            <a:off x="1097280" y="1828800"/>
+            <a:ext cx="11887200" cy="457200"/>
           </a:xfrm>
           <a:prstGeom prst="rect">
             <a:avLst/>
@@ -5526,7 +5905,7 @@
               </a:defRPr>
             </a:pPr>
             <a:r>
-              <a:t>No industry benchmark exists for multi-agent AI coordination. SWE-bench tests single-agent code gen. HumanEval tests completion. Neither measures organizational intelligence. We defined this benchmark because nobody else is measuring what matters.</a:t>
+              <a:t>No industry benchmark exists for multi-agent AI coordination. We defined this because nobody else is measuring what matters.</a:t>
             </a:r>
           </a:p>
         </p:txBody>
@@ -5539,7 +5918,583 @@
         </p:nvSpPr>
         <p:spPr>
           <a:xfrm>
+            <a:off x="1371600" y="2560320"/>
+            <a:ext cx="2743200" cy="274320"/>
+          </a:xfrm>
+          <a:prstGeom prst="rect">
+            <a:avLst/>
+          </a:prstGeom>
+          <a:noFill/>
+        </p:spPr>
+        <p:txBody>
+          <a:bodyPr wrap="square">
+            <a:spAutoFit/>
+          </a:bodyPr>
+          <a:lstStyle/>
+          <a:p>
+            <a:pPr algn="l">
+              <a:defRPr sz="1000" b="1">
+                <a:solidFill>
+                  <a:srgbClr val="2E8B8B"/>
+                </a:solidFill>
+                <a:latin typeface="Courier New"/>
+              </a:defRPr>
+            </a:pPr>
+            <a:r>
+              <a:t>5 WEIGHTED TASKS</a:t>
+            </a:r>
+          </a:p>
+        </p:txBody>
+      </p:sp>
+      <p:sp>
+        <p:nvSpPr>
+          <p:cNvPr id="6" name="TextBox 5"/>
+          <p:cNvSpPr txBox="1"/>
+          <p:nvPr/>
+        </p:nvSpPr>
+        <p:spPr>
+          <a:xfrm>
             <a:off x="1371600" y="2926080"/>
+            <a:ext cx="731520" cy="274320"/>
+          </a:xfrm>
+          <a:prstGeom prst="rect">
+            <a:avLst/>
+          </a:prstGeom>
+          <a:noFill/>
+        </p:spPr>
+        <p:txBody>
+          <a:bodyPr wrap="square">
+            <a:spAutoFit/>
+          </a:bodyPr>
+          <a:lstStyle/>
+          <a:p>
+            <a:pPr algn="l">
+              <a:defRPr sz="1600" b="1">
+                <a:solidFill>
+                  <a:srgbClr val="D4A84B"/>
+                </a:solidFill>
+                <a:latin typeface="Courier New"/>
+              </a:defRPr>
+            </a:pPr>
+            <a:r>
+              <a:t>0.30</a:t>
+            </a:r>
+          </a:p>
+        </p:txBody>
+      </p:sp>
+      <p:sp>
+        <p:nvSpPr>
+          <p:cNvPr id="7" name="TextBox 6"/>
+          <p:cNvSpPr txBox="1"/>
+          <p:nvPr/>
+        </p:nvSpPr>
+        <p:spPr>
+          <a:xfrm>
+            <a:off x="2286000" y="2926080"/>
+            <a:ext cx="2286000" cy="274320"/>
+          </a:xfrm>
+          <a:prstGeom prst="rect">
+            <a:avLst/>
+          </a:prstGeom>
+          <a:noFill/>
+        </p:spPr>
+        <p:txBody>
+          <a:bodyPr wrap="square">
+            <a:spAutoFit/>
+          </a:bodyPr>
+          <a:lstStyle/>
+          <a:p>
+            <a:pPr algn="l">
+              <a:defRPr sz="1400" b="1">
+                <a:solidFill>
+                  <a:srgbClr val="E8E8E8"/>
+                </a:solidFill>
+                <a:latin typeface="Calibri"/>
+              </a:defRPr>
+            </a:pPr>
+            <a:r>
+              <a:t>Decision Quality</a:t>
+            </a:r>
+          </a:p>
+        </p:txBody>
+      </p:sp>
+      <p:sp>
+        <p:nvSpPr>
+          <p:cNvPr id="8" name="TextBox 7"/>
+          <p:cNvSpPr txBox="1"/>
+          <p:nvPr/>
+        </p:nvSpPr>
+        <p:spPr>
+          <a:xfrm>
+            <a:off x="4754880" y="2926080"/>
+            <a:ext cx="8229600" cy="274320"/>
+          </a:xfrm>
+          <a:prstGeom prst="rect">
+            <a:avLst/>
+          </a:prstGeom>
+          <a:noFill/>
+        </p:spPr>
+        <p:txBody>
+          <a:bodyPr wrap="square">
+            <a:spAutoFit/>
+          </a:bodyPr>
+          <a:lstStyle/>
+          <a:p>
+            <a:pPr algn="l">
+              <a:defRPr sz="1200" b="0">
+                <a:solidFill>
+                  <a:srgbClr val="8A9BB0"/>
+                </a:solidFill>
+                <a:latin typeface="Calibri"/>
+              </a:defRPr>
+            </a:pPr>
+            <a:r>
+              <a:t>Specific, differentiated, actionable agent outputs</a:t>
+            </a:r>
+          </a:p>
+        </p:txBody>
+      </p:sp>
+      <p:sp>
+        <p:nvSpPr>
+          <p:cNvPr id="9" name="TextBox 8"/>
+          <p:cNvSpPr txBox="1"/>
+          <p:nvPr/>
+        </p:nvSpPr>
+        <p:spPr>
+          <a:xfrm>
+            <a:off x="1371600" y="3474720"/>
+            <a:ext cx="731520" cy="274320"/>
+          </a:xfrm>
+          <a:prstGeom prst="rect">
+            <a:avLst/>
+          </a:prstGeom>
+          <a:noFill/>
+        </p:spPr>
+        <p:txBody>
+          <a:bodyPr wrap="square">
+            <a:spAutoFit/>
+          </a:bodyPr>
+          <a:lstStyle/>
+          <a:p>
+            <a:pPr algn="l">
+              <a:defRPr sz="1600" b="1">
+                <a:solidFill>
+                  <a:srgbClr val="D4A84B"/>
+                </a:solidFill>
+                <a:latin typeface="Courier New"/>
+              </a:defRPr>
+            </a:pPr>
+            <a:r>
+              <a:t>0.25</a:t>
+            </a:r>
+          </a:p>
+        </p:txBody>
+      </p:sp>
+      <p:sp>
+        <p:nvSpPr>
+          <p:cNvPr id="10" name="TextBox 9"/>
+          <p:cNvSpPr txBox="1"/>
+          <p:nvPr/>
+        </p:nvSpPr>
+        <p:spPr>
+          <a:xfrm>
+            <a:off x="2286000" y="3474720"/>
+            <a:ext cx="2286000" cy="274320"/>
+          </a:xfrm>
+          <a:prstGeom prst="rect">
+            <a:avLst/>
+          </a:prstGeom>
+          <a:noFill/>
+        </p:spPr>
+        <p:txBody>
+          <a:bodyPr wrap="square">
+            <a:spAutoFit/>
+          </a:bodyPr>
+          <a:lstStyle/>
+          <a:p>
+            <a:pPr algn="l">
+              <a:defRPr sz="1400" b="1">
+                <a:solidFill>
+                  <a:srgbClr val="E8E8E8"/>
+                </a:solidFill>
+                <a:latin typeface="Calibri"/>
+              </a:defRPr>
+            </a:pPr>
+            <a:r>
+              <a:t>Research Depth</a:t>
+            </a:r>
+          </a:p>
+        </p:txBody>
+      </p:sp>
+      <p:sp>
+        <p:nvSpPr>
+          <p:cNvPr id="11" name="TextBox 10"/>
+          <p:cNvSpPr txBox="1"/>
+          <p:nvPr/>
+        </p:nvSpPr>
+        <p:spPr>
+          <a:xfrm>
+            <a:off x="4754880" y="3474720"/>
+            <a:ext cx="8229600" cy="274320"/>
+          </a:xfrm>
+          <a:prstGeom prst="rect">
+            <a:avLst/>
+          </a:prstGeom>
+          <a:noFill/>
+        </p:spPr>
+        <p:txBody>
+          <a:bodyPr wrap="square">
+            <a:spAutoFit/>
+          </a:bodyPr>
+          <a:lstStyle/>
+          <a:p>
+            <a:pPr algn="l">
+              <a:defRPr sz="1200" b="0">
+                <a:solidFill>
+                  <a:srgbClr val="8A9BB0"/>
+                </a:solidFill>
+                <a:latin typeface="Calibri"/>
+              </a:defRPr>
+            </a:pPr>
+            <a:r>
+              <a:t>4 binary gates: mapping, detection, spawning, ceiling</a:t>
+            </a:r>
+          </a:p>
+        </p:txBody>
+      </p:sp>
+      <p:sp>
+        <p:nvSpPr>
+          <p:cNvPr id="12" name="TextBox 11"/>
+          <p:cNvSpPr txBox="1"/>
+          <p:nvPr/>
+        </p:nvSpPr>
+        <p:spPr>
+          <a:xfrm>
+            <a:off x="1371600" y="4023360"/>
+            <a:ext cx="731520" cy="274320"/>
+          </a:xfrm>
+          <a:prstGeom prst="rect">
+            <a:avLst/>
+          </a:prstGeom>
+          <a:noFill/>
+        </p:spPr>
+        <p:txBody>
+          <a:bodyPr wrap="square">
+            <a:spAutoFit/>
+          </a:bodyPr>
+          <a:lstStyle/>
+          <a:p>
+            <a:pPr algn="l">
+              <a:defRPr sz="1600" b="1">
+                <a:solidFill>
+                  <a:srgbClr val="D4A84B"/>
+                </a:solidFill>
+                <a:latin typeface="Courier New"/>
+              </a:defRPr>
+            </a:pPr>
+            <a:r>
+              <a:t>0.20</a:t>
+            </a:r>
+          </a:p>
+        </p:txBody>
+      </p:sp>
+      <p:sp>
+        <p:nvSpPr>
+          <p:cNvPr id="13" name="TextBox 12"/>
+          <p:cNvSpPr txBox="1"/>
+          <p:nvPr/>
+        </p:nvSpPr>
+        <p:spPr>
+          <a:xfrm>
+            <a:off x="2286000" y="4023360"/>
+            <a:ext cx="2286000" cy="274320"/>
+          </a:xfrm>
+          <a:prstGeom prst="rect">
+            <a:avLst/>
+          </a:prstGeom>
+          <a:noFill/>
+        </p:spPr>
+        <p:txBody>
+          <a:bodyPr wrap="square">
+            <a:spAutoFit/>
+          </a:bodyPr>
+          <a:lstStyle/>
+          <a:p>
+            <a:pPr algn="l">
+              <a:defRPr sz="1400" b="1">
+                <a:solidFill>
+                  <a:srgbClr val="E8E8E8"/>
+                </a:solidFill>
+                <a:latin typeface="Calibri"/>
+              </a:defRPr>
+            </a:pPr>
+            <a:r>
+              <a:t>Drift Detection</a:t>
+            </a:r>
+          </a:p>
+        </p:txBody>
+      </p:sp>
+      <p:sp>
+        <p:nvSpPr>
+          <p:cNvPr id="14" name="TextBox 13"/>
+          <p:cNvSpPr txBox="1"/>
+          <p:nvPr/>
+        </p:nvSpPr>
+        <p:spPr>
+          <a:xfrm>
+            <a:off x="4754880" y="4023360"/>
+            <a:ext cx="8229600" cy="274320"/>
+          </a:xfrm>
+          <a:prstGeom prst="rect">
+            <a:avLst/>
+          </a:prstGeom>
+          <a:noFill/>
+        </p:spPr>
+        <p:txBody>
+          <a:bodyPr wrap="square">
+            <a:spAutoFit/>
+          </a:bodyPr>
+          <a:lstStyle/>
+          <a:p>
+            <a:pPr algn="l">
+              <a:defRPr sz="1200" b="0">
+                <a:solidFill>
+                  <a:srgbClr val="8A9BB0"/>
+                </a:solidFill>
+                <a:latin typeface="Calibri"/>
+              </a:defRPr>
+            </a:pPr>
+            <a:r>
+              <a:t>Catches process violations, proposes recovery</a:t>
+            </a:r>
+          </a:p>
+        </p:txBody>
+      </p:sp>
+      <p:sp>
+        <p:nvSpPr>
+          <p:cNvPr id="15" name="TextBox 14"/>
+          <p:cNvSpPr txBox="1"/>
+          <p:nvPr/>
+        </p:nvSpPr>
+        <p:spPr>
+          <a:xfrm>
+            <a:off x="1371600" y="4572000"/>
+            <a:ext cx="731520" cy="274320"/>
+          </a:xfrm>
+          <a:prstGeom prst="rect">
+            <a:avLst/>
+          </a:prstGeom>
+          <a:noFill/>
+        </p:spPr>
+        <p:txBody>
+          <a:bodyPr wrap="square">
+            <a:spAutoFit/>
+          </a:bodyPr>
+          <a:lstStyle/>
+          <a:p>
+            <a:pPr algn="l">
+              <a:defRPr sz="1600" b="1">
+                <a:solidFill>
+                  <a:srgbClr val="D4A84B"/>
+                </a:solidFill>
+                <a:latin typeface="Courier New"/>
+              </a:defRPr>
+            </a:pPr>
+            <a:r>
+              <a:t>0.15</a:t>
+            </a:r>
+          </a:p>
+        </p:txBody>
+      </p:sp>
+      <p:sp>
+        <p:nvSpPr>
+          <p:cNvPr id="16" name="TextBox 15"/>
+          <p:cNvSpPr txBox="1"/>
+          <p:nvPr/>
+        </p:nvSpPr>
+        <p:spPr>
+          <a:xfrm>
+            <a:off x="2286000" y="4572000"/>
+            <a:ext cx="2286000" cy="274320"/>
+          </a:xfrm>
+          <a:prstGeom prst="rect">
+            <a:avLst/>
+          </a:prstGeom>
+          <a:noFill/>
+        </p:spPr>
+        <p:txBody>
+          <a:bodyPr wrap="square">
+            <a:spAutoFit/>
+          </a:bodyPr>
+          <a:lstStyle/>
+          <a:p>
+            <a:pPr algn="l">
+              <a:defRPr sz="1400" b="1">
+                <a:solidFill>
+                  <a:srgbClr val="E8E8E8"/>
+                </a:solidFill>
+                <a:latin typeface="Calibri"/>
+              </a:defRPr>
+            </a:pPr>
+            <a:r>
+              <a:t>Intake Routing</a:t>
+            </a:r>
+          </a:p>
+        </p:txBody>
+      </p:sp>
+      <p:sp>
+        <p:nvSpPr>
+          <p:cNvPr id="17" name="TextBox 16"/>
+          <p:cNvSpPr txBox="1"/>
+          <p:nvPr/>
+        </p:nvSpPr>
+        <p:spPr>
+          <a:xfrm>
+            <a:off x="4754880" y="4572000"/>
+            <a:ext cx="8229600" cy="274320"/>
+          </a:xfrm>
+          <a:prstGeom prst="rect">
+            <a:avLst/>
+          </a:prstGeom>
+          <a:noFill/>
+        </p:spPr>
+        <p:txBody>
+          <a:bodyPr wrap="square">
+            <a:spAutoFit/>
+          </a:bodyPr>
+          <a:lstStyle/>
+          <a:p>
+            <a:pPr algn="l">
+              <a:defRPr sz="1200" b="0">
+                <a:solidFill>
+                  <a:srgbClr val="8A9BB0"/>
+                </a:solidFill>
+                <a:latin typeface="Calibri"/>
+              </a:defRPr>
+            </a:pPr>
+            <a:r>
+              <a:t>3 known-correct routing prompts</a:t>
+            </a:r>
+          </a:p>
+        </p:txBody>
+      </p:sp>
+      <p:sp>
+        <p:nvSpPr>
+          <p:cNvPr id="18" name="TextBox 17"/>
+          <p:cNvSpPr txBox="1"/>
+          <p:nvPr/>
+        </p:nvSpPr>
+        <p:spPr>
+          <a:xfrm>
+            <a:off x="1371600" y="5120640"/>
+            <a:ext cx="731520" cy="274320"/>
+          </a:xfrm>
+          <a:prstGeom prst="rect">
+            <a:avLst/>
+          </a:prstGeom>
+          <a:noFill/>
+        </p:spPr>
+        <p:txBody>
+          <a:bodyPr wrap="square">
+            <a:spAutoFit/>
+          </a:bodyPr>
+          <a:lstStyle/>
+          <a:p>
+            <a:pPr algn="l">
+              <a:defRPr sz="1600" b="1">
+                <a:solidFill>
+                  <a:srgbClr val="D4A84B"/>
+                </a:solidFill>
+                <a:latin typeface="Courier New"/>
+              </a:defRPr>
+            </a:pPr>
+            <a:r>
+              <a:t>0.10</a:t>
+            </a:r>
+          </a:p>
+        </p:txBody>
+      </p:sp>
+      <p:sp>
+        <p:nvSpPr>
+          <p:cNvPr id="19" name="TextBox 18"/>
+          <p:cNvSpPr txBox="1"/>
+          <p:nvPr/>
+        </p:nvSpPr>
+        <p:spPr>
+          <a:xfrm>
+            <a:off x="2286000" y="5120640"/>
+            <a:ext cx="2286000" cy="274320"/>
+          </a:xfrm>
+          <a:prstGeom prst="rect">
+            <a:avLst/>
+          </a:prstGeom>
+          <a:noFill/>
+        </p:spPr>
+        <p:txBody>
+          <a:bodyPr wrap="square">
+            <a:spAutoFit/>
+          </a:bodyPr>
+          <a:lstStyle/>
+          <a:p>
+            <a:pPr algn="l">
+              <a:defRPr sz="1400" b="1">
+                <a:solidFill>
+                  <a:srgbClr val="E8E8E8"/>
+                </a:solidFill>
+                <a:latin typeface="Calibri"/>
+              </a:defRPr>
+            </a:pPr>
+            <a:r>
+              <a:t>Session Mgmt</a:t>
+            </a:r>
+          </a:p>
+        </p:txBody>
+      </p:sp>
+      <p:sp>
+        <p:nvSpPr>
+          <p:cNvPr id="20" name="TextBox 19"/>
+          <p:cNvSpPr txBox="1"/>
+          <p:nvPr/>
+        </p:nvSpPr>
+        <p:spPr>
+          <a:xfrm>
+            <a:off x="4754880" y="5120640"/>
+            <a:ext cx="8229600" cy="274320"/>
+          </a:xfrm>
+          <a:prstGeom prst="rect">
+            <a:avLst/>
+          </a:prstGeom>
+          <a:noFill/>
+        </p:spPr>
+        <p:txBody>
+          <a:bodyPr wrap="square">
+            <a:spAutoFit/>
+          </a:bodyPr>
+          <a:lstStyle/>
+          <a:p>
+            <a:pPr algn="l">
+              <a:defRPr sz="1200" b="0">
+                <a:solidFill>
+                  <a:srgbClr val="8A9BB0"/>
+                </a:solidFill>
+                <a:latin typeface="Calibri"/>
+              </a:defRPr>
+            </a:pPr>
+            <a:r>
+              <a:t>Break points, snapshots, cold-start priming</a:t>
+            </a:r>
+          </a:p>
+        </p:txBody>
+      </p:sp>
+      <p:sp>
+        <p:nvSpPr>
+          <p:cNvPr id="21" name="TextBox 20"/>
+          <p:cNvSpPr txBox="1"/>
+          <p:nvPr/>
+        </p:nvSpPr>
+        <p:spPr>
+          <a:xfrm>
+            <a:off x="1371600" y="5760720"/>
             <a:ext cx="2743200" cy="274320"/>
           </a:xfrm>
           <a:prstGeom prst="rect">
@@ -5562,35 +6517,464 @@
               </a:defRPr>
             </a:pPr>
             <a:r>
-              <a:t>5 WEIGHTED TASKS</a:t>
-            </a:r>
-          </a:p>
-        </p:txBody>
-      </p:sp>
-      <p:sp>
-        <p:nvSpPr>
-          <p:cNvPr id="6" name="TextBox 5"/>
-          <p:cNvSpPr txBox="1"/>
-          <p:nvPr/>
-        </p:nvSpPr>
-        <p:spPr>
-          <a:xfrm>
-            <a:off x="1371600" y="3291840"/>
-            <a:ext cx="731520" cy="365760"/>
-          </a:xfrm>
-          <a:prstGeom prst="rect">
-            <a:avLst/>
-          </a:prstGeom>
-          <a:noFill/>
-        </p:spPr>
-        <p:txBody>
-          <a:bodyPr wrap="square">
-            <a:spAutoFit/>
-          </a:bodyPr>
-          <a:lstStyle/>
-          <a:p>
-            <a:pPr algn="l">
-              <a:defRPr sz="1600" b="1">
+              <a:t>4 CONFIGURATIONS</a:t>
+            </a:r>
+          </a:p>
+        </p:txBody>
+      </p:sp>
+      <p:sp>
+        <p:nvSpPr>
+          <p:cNvPr id="22" name="TextBox 21"/>
+          <p:cNvSpPr txBox="1"/>
+          <p:nvPr/>
+        </p:nvSpPr>
+        <p:spPr>
+          <a:xfrm>
+            <a:off x="1371600" y="6035040"/>
+            <a:ext cx="914400" cy="228600"/>
+          </a:xfrm>
+          <a:prstGeom prst="rect">
+            <a:avLst/>
+          </a:prstGeom>
+          <a:noFill/>
+        </p:spPr>
+        <p:txBody>
+          <a:bodyPr wrap="square">
+            <a:spAutoFit/>
+          </a:bodyPr>
+          <a:lstStyle/>
+          <a:p>
+            <a:pPr algn="l">
+              <a:defRPr sz="1000" b="1">
+                <a:solidFill>
+                  <a:srgbClr val="8A9BB0"/>
+                </a:solidFill>
+                <a:latin typeface="Courier New"/>
+              </a:defRPr>
+            </a:pPr>
+          </a:p>
+        </p:txBody>
+      </p:sp>
+      <p:sp>
+        <p:nvSpPr>
+          <p:cNvPr id="23" name="TextBox 22"/>
+          <p:cNvSpPr txBox="1"/>
+          <p:nvPr/>
+        </p:nvSpPr>
+        <p:spPr>
+          <a:xfrm>
+            <a:off x="2743200" y="6035040"/>
+            <a:ext cx="4114800" cy="228600"/>
+          </a:xfrm>
+          <a:prstGeom prst="rect">
+            <a:avLst/>
+          </a:prstGeom>
+          <a:noFill/>
+        </p:spPr>
+        <p:txBody>
+          <a:bodyPr wrap="square">
+            <a:spAutoFit/>
+          </a:bodyPr>
+          <a:lstStyle/>
+          <a:p>
+            <a:pPr algn="l">
+              <a:defRPr sz="1000" b="1">
+                <a:solidFill>
+                  <a:srgbClr val="8A9BB0"/>
+                </a:solidFill>
+                <a:latin typeface="Courier New"/>
+              </a:defRPr>
+            </a:pPr>
+            <a:r>
+              <a:t>Setup</a:t>
+            </a:r>
+          </a:p>
+        </p:txBody>
+      </p:sp>
+      <p:sp>
+        <p:nvSpPr>
+          <p:cNvPr id="24" name="TextBox 23"/>
+          <p:cNvSpPr txBox="1"/>
+          <p:nvPr/>
+        </p:nvSpPr>
+        <p:spPr>
+          <a:xfrm>
+            <a:off x="7315200" y="6035040"/>
+            <a:ext cx="1828800" cy="228600"/>
+          </a:xfrm>
+          <a:prstGeom prst="rect">
+            <a:avLst/>
+          </a:prstGeom>
+          <a:noFill/>
+        </p:spPr>
+        <p:txBody>
+          <a:bodyPr wrap="square">
+            <a:spAutoFit/>
+          </a:bodyPr>
+          <a:lstStyle/>
+          <a:p>
+            <a:pPr algn="l">
+              <a:defRPr sz="1000" b="1">
+                <a:solidFill>
+                  <a:srgbClr val="8A9BB0"/>
+                </a:solidFill>
+                <a:latin typeface="Courier New"/>
+              </a:defRPr>
+            </a:pPr>
+            <a:r>
+              <a:t>Score</a:t>
+            </a:r>
+          </a:p>
+        </p:txBody>
+      </p:sp>
+      <p:sp>
+        <p:nvSpPr>
+          <p:cNvPr id="25" name="TextBox 24"/>
+          <p:cNvSpPr txBox="1"/>
+          <p:nvPr/>
+        </p:nvSpPr>
+        <p:spPr>
+          <a:xfrm>
+            <a:off x="9601200" y="6035040"/>
+            <a:ext cx="1828800" cy="228600"/>
+          </a:xfrm>
+          <a:prstGeom prst="rect">
+            <a:avLst/>
+          </a:prstGeom>
+          <a:noFill/>
+        </p:spPr>
+        <p:txBody>
+          <a:bodyPr wrap="square">
+            <a:spAutoFit/>
+          </a:bodyPr>
+          <a:lstStyle/>
+          <a:p>
+            <a:pPr algn="l">
+              <a:defRPr sz="1000" b="1">
+                <a:solidFill>
+                  <a:srgbClr val="8A9BB0"/>
+                </a:solidFill>
+                <a:latin typeface="Courier New"/>
+              </a:defRPr>
+            </a:pPr>
+            <a:r>
+              <a:t>Cost</a:t>
+            </a:r>
+          </a:p>
+        </p:txBody>
+      </p:sp>
+      <p:sp>
+        <p:nvSpPr>
+          <p:cNvPr id="26" name="TextBox 25"/>
+          <p:cNvSpPr txBox="1"/>
+          <p:nvPr/>
+        </p:nvSpPr>
+        <p:spPr>
+          <a:xfrm>
+            <a:off x="1371600" y="6309360"/>
+            <a:ext cx="914400" cy="274320"/>
+          </a:xfrm>
+          <a:prstGeom prst="rect">
+            <a:avLst/>
+          </a:prstGeom>
+          <a:noFill/>
+        </p:spPr>
+        <p:txBody>
+          <a:bodyPr wrap="square">
+            <a:spAutoFit/>
+          </a:bodyPr>
+          <a:lstStyle/>
+          <a:p>
+            <a:pPr algn="l">
+              <a:defRPr sz="1300" b="0">
+                <a:solidFill>
+                  <a:srgbClr val="8A9BB0"/>
+                </a:solidFill>
+                <a:latin typeface="Courier New"/>
+              </a:defRPr>
+            </a:pPr>
+            <a:r>
+              <a:t>A</a:t>
+            </a:r>
+          </a:p>
+        </p:txBody>
+      </p:sp>
+      <p:sp>
+        <p:nvSpPr>
+          <p:cNvPr id="27" name="TextBox 26"/>
+          <p:cNvSpPr txBox="1"/>
+          <p:nvPr/>
+        </p:nvSpPr>
+        <p:spPr>
+          <a:xfrm>
+            <a:off x="2743200" y="6309360"/>
+            <a:ext cx="4114800" cy="274320"/>
+          </a:xfrm>
+          <a:prstGeom prst="rect">
+            <a:avLst/>
+          </a:prstGeom>
+          <a:noFill/>
+        </p:spPr>
+        <p:txBody>
+          <a:bodyPr wrap="square">
+            <a:spAutoFit/>
+          </a:bodyPr>
+          <a:lstStyle/>
+          <a:p>
+            <a:pPr algn="l">
+              <a:defRPr sz="1300" b="0">
+                <a:solidFill>
+                  <a:srgbClr val="8A9BB0"/>
+                </a:solidFill>
+                <a:latin typeface="Courier New"/>
+              </a:defRPr>
+            </a:pPr>
+            <a:r>
+              <a:t>Weak + Opus 4</a:t>
+            </a:r>
+          </a:p>
+        </p:txBody>
+      </p:sp>
+      <p:sp>
+        <p:nvSpPr>
+          <p:cNvPr id="28" name="TextBox 27"/>
+          <p:cNvSpPr txBox="1"/>
+          <p:nvPr/>
+        </p:nvSpPr>
+        <p:spPr>
+          <a:xfrm>
+            <a:off x="7315200" y="6309360"/>
+            <a:ext cx="1828800" cy="274320"/>
+          </a:xfrm>
+          <a:prstGeom prst="rect">
+            <a:avLst/>
+          </a:prstGeom>
+          <a:noFill/>
+        </p:spPr>
+        <p:txBody>
+          <a:bodyPr wrap="square">
+            <a:spAutoFit/>
+          </a:bodyPr>
+          <a:lstStyle/>
+          <a:p>
+            <a:pPr algn="l">
+              <a:defRPr sz="1300" b="1">
+                <a:solidFill>
+                  <a:srgbClr val="8A9BB0"/>
+                </a:solidFill>
+                <a:latin typeface="Courier New"/>
+              </a:defRPr>
+            </a:pPr>
+            <a:r>
+              <a:t>0.957</a:t>
+            </a:r>
+          </a:p>
+        </p:txBody>
+      </p:sp>
+      <p:sp>
+        <p:nvSpPr>
+          <p:cNvPr id="29" name="TextBox 28"/>
+          <p:cNvSpPr txBox="1"/>
+          <p:nvPr/>
+        </p:nvSpPr>
+        <p:spPr>
+          <a:xfrm>
+            <a:off x="9601200" y="6309360"/>
+            <a:ext cx="1828800" cy="274320"/>
+          </a:xfrm>
+          <a:prstGeom prst="rect">
+            <a:avLst/>
+          </a:prstGeom>
+          <a:noFill/>
+        </p:spPr>
+        <p:txBody>
+          <a:bodyPr wrap="square">
+            <a:spAutoFit/>
+          </a:bodyPr>
+          <a:lstStyle/>
+          <a:p>
+            <a:pPr algn="l">
+              <a:defRPr sz="1300" b="0">
+                <a:solidFill>
+                  <a:srgbClr val="8A9BB0"/>
+                </a:solidFill>
+                <a:latin typeface="Courier New"/>
+              </a:defRPr>
+            </a:pPr>
+            <a:r>
+              <a:t>~100%</a:t>
+            </a:r>
+          </a:p>
+        </p:txBody>
+      </p:sp>
+      <p:sp>
+        <p:nvSpPr>
+          <p:cNvPr id="30" name="TextBox 29"/>
+          <p:cNvSpPr txBox="1"/>
+          <p:nvPr/>
+        </p:nvSpPr>
+        <p:spPr>
+          <a:xfrm>
+            <a:off x="1371600" y="6675120"/>
+            <a:ext cx="914400" cy="274320"/>
+          </a:xfrm>
+          <a:prstGeom prst="rect">
+            <a:avLst/>
+          </a:prstGeom>
+          <a:noFill/>
+        </p:spPr>
+        <p:txBody>
+          <a:bodyPr wrap="square">
+            <a:spAutoFit/>
+          </a:bodyPr>
+          <a:lstStyle/>
+          <a:p>
+            <a:pPr algn="l">
+              <a:defRPr sz="1300" b="0">
+                <a:solidFill>
+                  <a:srgbClr val="E8E8E8"/>
+                </a:solidFill>
+                <a:latin typeface="Courier New"/>
+              </a:defRPr>
+            </a:pPr>
+            <a:r>
+              <a:t>B</a:t>
+            </a:r>
+          </a:p>
+        </p:txBody>
+      </p:sp>
+      <p:sp>
+        <p:nvSpPr>
+          <p:cNvPr id="31" name="TextBox 30"/>
+          <p:cNvSpPr txBox="1"/>
+          <p:nvPr/>
+        </p:nvSpPr>
+        <p:spPr>
+          <a:xfrm>
+            <a:off x="2743200" y="6675120"/>
+            <a:ext cx="4114800" cy="274320"/>
+          </a:xfrm>
+          <a:prstGeom prst="rect">
+            <a:avLst/>
+          </a:prstGeom>
+          <a:noFill/>
+        </p:spPr>
+        <p:txBody>
+          <a:bodyPr wrap="square">
+            <a:spAutoFit/>
+          </a:bodyPr>
+          <a:lstStyle/>
+          <a:p>
+            <a:pPr algn="l">
+              <a:defRPr sz="1300" b="0">
+                <a:solidFill>
+                  <a:srgbClr val="E8E8E8"/>
+                </a:solidFill>
+                <a:latin typeface="Courier New"/>
+              </a:defRPr>
+            </a:pPr>
+            <a:r>
+              <a:t>Strong + Opus 4</a:t>
+            </a:r>
+          </a:p>
+        </p:txBody>
+      </p:sp>
+      <p:sp>
+        <p:nvSpPr>
+          <p:cNvPr id="32" name="TextBox 31"/>
+          <p:cNvSpPr txBox="1"/>
+          <p:nvPr/>
+        </p:nvSpPr>
+        <p:spPr>
+          <a:xfrm>
+            <a:off x="7315200" y="6675120"/>
+            <a:ext cx="1828800" cy="274320"/>
+          </a:xfrm>
+          <a:prstGeom prst="rect">
+            <a:avLst/>
+          </a:prstGeom>
+          <a:noFill/>
+        </p:spPr>
+        <p:txBody>
+          <a:bodyPr wrap="square">
+            <a:spAutoFit/>
+          </a:bodyPr>
+          <a:lstStyle/>
+          <a:p>
+            <a:pPr algn="l">
+              <a:defRPr sz="1300" b="1">
+                <a:solidFill>
+                  <a:srgbClr val="E8E8E8"/>
+                </a:solidFill>
+                <a:latin typeface="Courier New"/>
+              </a:defRPr>
+            </a:pPr>
+            <a:r>
+              <a:t>1.000</a:t>
+            </a:r>
+          </a:p>
+        </p:txBody>
+      </p:sp>
+      <p:sp>
+        <p:nvSpPr>
+          <p:cNvPr id="33" name="TextBox 32"/>
+          <p:cNvSpPr txBox="1"/>
+          <p:nvPr/>
+        </p:nvSpPr>
+        <p:spPr>
+          <a:xfrm>
+            <a:off x="9601200" y="6675120"/>
+            <a:ext cx="1828800" cy="274320"/>
+          </a:xfrm>
+          <a:prstGeom prst="rect">
+            <a:avLst/>
+          </a:prstGeom>
+          <a:noFill/>
+        </p:spPr>
+        <p:txBody>
+          <a:bodyPr wrap="square">
+            <a:spAutoFit/>
+          </a:bodyPr>
+          <a:lstStyle/>
+          <a:p>
+            <a:pPr algn="l">
+              <a:defRPr sz="1300" b="0">
+                <a:solidFill>
+                  <a:srgbClr val="E8E8E8"/>
+                </a:solidFill>
+                <a:latin typeface="Courier New"/>
+              </a:defRPr>
+            </a:pPr>
+            <a:r>
+              <a:t>100%</a:t>
+            </a:r>
+          </a:p>
+        </p:txBody>
+      </p:sp>
+      <p:sp>
+        <p:nvSpPr>
+          <p:cNvPr id="34" name="TextBox 33"/>
+          <p:cNvSpPr txBox="1"/>
+          <p:nvPr/>
+        </p:nvSpPr>
+        <p:spPr>
+          <a:xfrm>
+            <a:off x="1371600" y="7040880"/>
+            <a:ext cx="914400" cy="274320"/>
+          </a:xfrm>
+          <a:prstGeom prst="rect">
+            <a:avLst/>
+          </a:prstGeom>
+          <a:noFill/>
+        </p:spPr>
+        <p:txBody>
+          <a:bodyPr wrap="square">
+            <a:spAutoFit/>
+          </a:bodyPr>
+          <a:lstStyle/>
+          <a:p>
+            <a:pPr algn="l">
+              <a:defRPr sz="1300" b="1">
                 <a:solidFill>
                   <a:srgbClr val="D4A84B"/>
                 </a:solidFill>
@@ -5598,632 +6982,236 @@
               </a:defRPr>
             </a:pPr>
             <a:r>
-              <a:t>0.30</a:t>
-            </a:r>
-          </a:p>
-        </p:txBody>
-      </p:sp>
-      <p:sp>
-        <p:nvSpPr>
-          <p:cNvPr id="7" name="TextBox 6"/>
-          <p:cNvSpPr txBox="1"/>
-          <p:nvPr/>
-        </p:nvSpPr>
-        <p:spPr>
-          <a:xfrm>
-            <a:off x="2286000" y="3291840"/>
-            <a:ext cx="2286000" cy="365760"/>
-          </a:xfrm>
-          <a:prstGeom prst="rect">
-            <a:avLst/>
-          </a:prstGeom>
-          <a:noFill/>
-        </p:spPr>
-        <p:txBody>
-          <a:bodyPr wrap="square">
-            <a:spAutoFit/>
-          </a:bodyPr>
-          <a:lstStyle/>
-          <a:p>
-            <a:pPr algn="l">
-              <a:defRPr sz="1400" b="1">
-                <a:solidFill>
-                  <a:srgbClr val="E8E8E8"/>
-                </a:solidFill>
-                <a:latin typeface="Calibri"/>
-              </a:defRPr>
-            </a:pPr>
-            <a:r>
-              <a:t>Decision Quality</a:t>
-            </a:r>
-          </a:p>
-        </p:txBody>
-      </p:sp>
-      <p:sp>
-        <p:nvSpPr>
-          <p:cNvPr id="8" name="TextBox 7"/>
-          <p:cNvSpPr txBox="1"/>
-          <p:nvPr/>
-        </p:nvSpPr>
-        <p:spPr>
-          <a:xfrm>
-            <a:off x="4754880" y="3291840"/>
-            <a:ext cx="8686800" cy="365760"/>
-          </a:xfrm>
-          <a:prstGeom prst="rect">
-            <a:avLst/>
-          </a:prstGeom>
-          <a:noFill/>
-        </p:spPr>
-        <p:txBody>
-          <a:bodyPr wrap="square">
-            <a:spAutoFit/>
-          </a:bodyPr>
-          <a:lstStyle/>
-          <a:p>
-            <a:pPr algn="l">
-              <a:defRPr sz="1100" b="0">
+              <a:t>C</a:t>
+            </a:r>
+          </a:p>
+        </p:txBody>
+      </p:sp>
+      <p:sp>
+        <p:nvSpPr>
+          <p:cNvPr id="35" name="TextBox 34"/>
+          <p:cNvSpPr txBox="1"/>
+          <p:nvPr/>
+        </p:nvSpPr>
+        <p:spPr>
+          <a:xfrm>
+            <a:off x="2743200" y="7040880"/>
+            <a:ext cx="4114800" cy="274320"/>
+          </a:xfrm>
+          <a:prstGeom prst="rect">
+            <a:avLst/>
+          </a:prstGeom>
+          <a:noFill/>
+        </p:spPr>
+        <p:txBody>
+          <a:bodyPr wrap="square">
+            <a:spAutoFit/>
+          </a:bodyPr>
+          <a:lstStyle/>
+          <a:p>
+            <a:pPr algn="l">
+              <a:defRPr sz="1300" b="0">
+                <a:solidFill>
+                  <a:srgbClr val="D4A84B"/>
+                </a:solidFill>
+                <a:latin typeface="Courier New"/>
+              </a:defRPr>
+            </a:pPr>
+            <a:r>
+              <a:t>Strong + tiered</a:t>
+            </a:r>
+          </a:p>
+        </p:txBody>
+      </p:sp>
+      <p:sp>
+        <p:nvSpPr>
+          <p:cNvPr id="36" name="TextBox 35"/>
+          <p:cNvSpPr txBox="1"/>
+          <p:nvPr/>
+        </p:nvSpPr>
+        <p:spPr>
+          <a:xfrm>
+            <a:off x="7315200" y="7040880"/>
+            <a:ext cx="1828800" cy="274320"/>
+          </a:xfrm>
+          <a:prstGeom prst="rect">
+            <a:avLst/>
+          </a:prstGeom>
+          <a:noFill/>
+        </p:spPr>
+        <p:txBody>
+          <a:bodyPr wrap="square">
+            <a:spAutoFit/>
+          </a:bodyPr>
+          <a:lstStyle/>
+          <a:p>
+            <a:pPr algn="l">
+              <a:defRPr sz="1300" b="1">
+                <a:solidFill>
+                  <a:srgbClr val="D4A84B"/>
+                </a:solidFill>
+                <a:latin typeface="Courier New"/>
+              </a:defRPr>
+            </a:pPr>
+            <a:r>
+              <a:t>1.000</a:t>
+            </a:r>
+          </a:p>
+        </p:txBody>
+      </p:sp>
+      <p:sp>
+        <p:nvSpPr>
+          <p:cNvPr id="37" name="TextBox 36"/>
+          <p:cNvSpPr txBox="1"/>
+          <p:nvPr/>
+        </p:nvSpPr>
+        <p:spPr>
+          <a:xfrm>
+            <a:off x="9601200" y="7040880"/>
+            <a:ext cx="1828800" cy="274320"/>
+          </a:xfrm>
+          <a:prstGeom prst="rect">
+            <a:avLst/>
+          </a:prstGeom>
+          <a:noFill/>
+        </p:spPr>
+        <p:txBody>
+          <a:bodyPr wrap="square">
+            <a:spAutoFit/>
+          </a:bodyPr>
+          <a:lstStyle/>
+          <a:p>
+            <a:pPr algn="l">
+              <a:defRPr sz="1300" b="0">
+                <a:solidFill>
+                  <a:srgbClr val="D4A84B"/>
+                </a:solidFill>
+                <a:latin typeface="Courier New"/>
+              </a:defRPr>
+            </a:pPr>
+            <a:r>
+              <a:t>~60%</a:t>
+            </a:r>
+          </a:p>
+        </p:txBody>
+      </p:sp>
+      <p:sp>
+        <p:nvSpPr>
+          <p:cNvPr id="38" name="TextBox 37"/>
+          <p:cNvSpPr txBox="1"/>
+          <p:nvPr/>
+        </p:nvSpPr>
+        <p:spPr>
+          <a:xfrm>
+            <a:off x="1371600" y="7406640"/>
+            <a:ext cx="914400" cy="274320"/>
+          </a:xfrm>
+          <a:prstGeom prst="rect">
+            <a:avLst/>
+          </a:prstGeom>
+          <a:noFill/>
+        </p:spPr>
+        <p:txBody>
+          <a:bodyPr wrap="square">
+            <a:spAutoFit/>
+          </a:bodyPr>
+          <a:lstStyle/>
+          <a:p>
+            <a:pPr algn="l">
+              <a:defRPr sz="1300" b="0">
                 <a:solidFill>
                   <a:srgbClr val="8A9BB0"/>
                 </a:solidFill>
-                <a:latin typeface="Calibri"/>
-              </a:defRPr>
-            </a:pPr>
-            <a:r>
-              <a:t>Are agent outputs specific, differentiated, and actionable? Scored 1-5 on 3 dimensions + swap test.</a:t>
-            </a:r>
-          </a:p>
-        </p:txBody>
-      </p:sp>
-      <p:sp>
-        <p:nvSpPr>
-          <p:cNvPr id="9" name="TextBox 8"/>
-          <p:cNvSpPr txBox="1"/>
-          <p:nvPr/>
-        </p:nvSpPr>
-        <p:spPr>
-          <a:xfrm>
-            <a:off x="1371600" y="3931920"/>
-            <a:ext cx="731520" cy="365760"/>
-          </a:xfrm>
-          <a:prstGeom prst="rect">
-            <a:avLst/>
-          </a:prstGeom>
-          <a:noFill/>
-        </p:spPr>
-        <p:txBody>
-          <a:bodyPr wrap="square">
-            <a:spAutoFit/>
-          </a:bodyPr>
-          <a:lstStyle/>
-          <a:p>
-            <a:pPr algn="l">
-              <a:defRPr sz="1600" b="1">
-                <a:solidFill>
-                  <a:srgbClr val="D4A84B"/>
-                </a:solidFill>
-                <a:latin typeface="Courier New"/>
-              </a:defRPr>
-            </a:pPr>
-            <a:r>
-              <a:t>0.25</a:t>
-            </a:r>
-          </a:p>
-        </p:txBody>
-      </p:sp>
-      <p:sp>
-        <p:nvSpPr>
-          <p:cNvPr id="10" name="TextBox 9"/>
-          <p:cNvSpPr txBox="1"/>
-          <p:nvPr/>
-        </p:nvSpPr>
-        <p:spPr>
-          <a:xfrm>
-            <a:off x="2286000" y="3931920"/>
-            <a:ext cx="2286000" cy="365760"/>
-          </a:xfrm>
-          <a:prstGeom prst="rect">
-            <a:avLst/>
-          </a:prstGeom>
-          <a:noFill/>
-        </p:spPr>
-        <p:txBody>
-          <a:bodyPr wrap="square">
-            <a:spAutoFit/>
-          </a:bodyPr>
-          <a:lstStyle/>
-          <a:p>
-            <a:pPr algn="l">
-              <a:defRPr sz="1400" b="1">
-                <a:solidFill>
-                  <a:srgbClr val="E8E8E8"/>
-                </a:solidFill>
-                <a:latin typeface="Calibri"/>
-              </a:defRPr>
-            </a:pPr>
-            <a:r>
-              <a:t>Research Depth</a:t>
-            </a:r>
-          </a:p>
-        </p:txBody>
-      </p:sp>
-      <p:sp>
-        <p:nvSpPr>
-          <p:cNvPr id="11" name="TextBox 10"/>
-          <p:cNvSpPr txBox="1"/>
-          <p:nvPr/>
-        </p:nvSpPr>
-        <p:spPr>
-          <a:xfrm>
-            <a:off x="4754880" y="3931920"/>
-            <a:ext cx="8686800" cy="365760"/>
-          </a:xfrm>
-          <a:prstGeom prst="rect">
-            <a:avLst/>
-          </a:prstGeom>
-          <a:noFill/>
-        </p:spPr>
-        <p:txBody>
-          <a:bodyPr wrap="square">
-            <a:spAutoFit/>
-          </a:bodyPr>
-          <a:lstStyle/>
-          <a:p>
-            <a:pPr algn="l">
-              <a:defRPr sz="1100" b="0">
+                <a:latin typeface="Courier New"/>
+              </a:defRPr>
+            </a:pPr>
+            <a:r>
+              <a:t>D</a:t>
+            </a:r>
+          </a:p>
+        </p:txBody>
+      </p:sp>
+      <p:sp>
+        <p:nvSpPr>
+          <p:cNvPr id="39" name="TextBox 38"/>
+          <p:cNvSpPr txBox="1"/>
+          <p:nvPr/>
+        </p:nvSpPr>
+        <p:spPr>
+          <a:xfrm>
+            <a:off x="2743200" y="7406640"/>
+            <a:ext cx="4114800" cy="274320"/>
+          </a:xfrm>
+          <a:prstGeom prst="rect">
+            <a:avLst/>
+          </a:prstGeom>
+          <a:noFill/>
+        </p:spPr>
+        <p:txBody>
+          <a:bodyPr wrap="square">
+            <a:spAutoFit/>
+          </a:bodyPr>
+          <a:lstStyle/>
+          <a:p>
+            <a:pPr algn="l">
+              <a:defRPr sz="1300" b="0">
                 <a:solidFill>
                   <a:srgbClr val="8A9BB0"/>
                 </a:solidFill>
-                <a:latin typeface="Calibri"/>
-              </a:defRPr>
-            </a:pPr>
-            <a:r>
-              <a:t>4 binary gates: problem mapping, shallow detection, specialist spawning, ceiling recognition.</a:t>
-            </a:r>
-          </a:p>
-        </p:txBody>
-      </p:sp>
-      <p:sp>
-        <p:nvSpPr>
-          <p:cNvPr id="12" name="TextBox 11"/>
-          <p:cNvSpPr txBox="1"/>
-          <p:nvPr/>
-        </p:nvSpPr>
-        <p:spPr>
-          <a:xfrm>
-            <a:off x="1371600" y="4572000"/>
-            <a:ext cx="731520" cy="365760"/>
-          </a:xfrm>
-          <a:prstGeom prst="rect">
-            <a:avLst/>
-          </a:prstGeom>
-          <a:noFill/>
-        </p:spPr>
-        <p:txBody>
-          <a:bodyPr wrap="square">
-            <a:spAutoFit/>
-          </a:bodyPr>
-          <a:lstStyle/>
-          <a:p>
-            <a:pPr algn="l">
-              <a:defRPr sz="1600" b="1">
-                <a:solidFill>
-                  <a:srgbClr val="D4A84B"/>
-                </a:solidFill>
-                <a:latin typeface="Courier New"/>
-              </a:defRPr>
-            </a:pPr>
-            <a:r>
-              <a:t>0.20</a:t>
-            </a:r>
-          </a:p>
-        </p:txBody>
-      </p:sp>
-      <p:sp>
-        <p:nvSpPr>
-          <p:cNvPr id="13" name="TextBox 12"/>
-          <p:cNvSpPr txBox="1"/>
-          <p:nvPr/>
-        </p:nvSpPr>
-        <p:spPr>
-          <a:xfrm>
-            <a:off x="2286000" y="4572000"/>
-            <a:ext cx="2286000" cy="365760"/>
-          </a:xfrm>
-          <a:prstGeom prst="rect">
-            <a:avLst/>
-          </a:prstGeom>
-          <a:noFill/>
-        </p:spPr>
-        <p:txBody>
-          <a:bodyPr wrap="square">
-            <a:spAutoFit/>
-          </a:bodyPr>
-          <a:lstStyle/>
-          <a:p>
-            <a:pPr algn="l">
-              <a:defRPr sz="1400" b="1">
-                <a:solidFill>
-                  <a:srgbClr val="E8E8E8"/>
-                </a:solidFill>
-                <a:latin typeface="Calibri"/>
-              </a:defRPr>
-            </a:pPr>
-            <a:r>
-              <a:t>Drift Detection</a:t>
-            </a:r>
-          </a:p>
-        </p:txBody>
-      </p:sp>
-      <p:sp>
-        <p:nvSpPr>
-          <p:cNvPr id="14" name="TextBox 13"/>
-          <p:cNvSpPr txBox="1"/>
-          <p:nvPr/>
-        </p:nvSpPr>
-        <p:spPr>
-          <a:xfrm>
-            <a:off x="4754880" y="4572000"/>
-            <a:ext cx="8686800" cy="365760"/>
-          </a:xfrm>
-          <a:prstGeom prst="rect">
-            <a:avLst/>
-          </a:prstGeom>
-          <a:noFill/>
-        </p:spPr>
-        <p:txBody>
-          <a:bodyPr wrap="square">
-            <a:spAutoFit/>
-          </a:bodyPr>
-          <a:lstStyle/>
-          <a:p>
-            <a:pPr algn="l">
-              <a:defRPr sz="1100" b="0">
+                <a:latin typeface="Courier New"/>
+              </a:defRPr>
+            </a:pPr>
+            <a:r>
+              <a:t>Strong + Sonnet</a:t>
+            </a:r>
+          </a:p>
+        </p:txBody>
+      </p:sp>
+      <p:sp>
+        <p:nvSpPr>
+          <p:cNvPr id="40" name="TextBox 39"/>
+          <p:cNvSpPr txBox="1"/>
+          <p:nvPr/>
+        </p:nvSpPr>
+        <p:spPr>
+          <a:xfrm>
+            <a:off x="7315200" y="7406640"/>
+            <a:ext cx="1828800" cy="274320"/>
+          </a:xfrm>
+          <a:prstGeom prst="rect">
+            <a:avLst/>
+          </a:prstGeom>
+          <a:noFill/>
+        </p:spPr>
+        <p:txBody>
+          <a:bodyPr wrap="square">
+            <a:spAutoFit/>
+          </a:bodyPr>
+          <a:lstStyle/>
+          <a:p>
+            <a:pPr algn="l">
+              <a:defRPr sz="1300" b="1">
                 <a:solidFill>
                   <a:srgbClr val="8A9BB0"/>
                 </a:solidFill>
-                <a:latin typeface="Calibri"/>
-              </a:defRPr>
-            </a:pPr>
-            <a:r>
-              <a:t>Given a flawed scenario (skipped gate, false approval), does the Sage catch it and propose recovery?</a:t>
-            </a:r>
-          </a:p>
-        </p:txBody>
-      </p:sp>
-      <p:sp>
-        <p:nvSpPr>
-          <p:cNvPr id="15" name="TextBox 14"/>
-          <p:cNvSpPr txBox="1"/>
-          <p:nvPr/>
-        </p:nvSpPr>
-        <p:spPr>
-          <a:xfrm>
-            <a:off x="1371600" y="5212079"/>
-            <a:ext cx="731520" cy="365760"/>
-          </a:xfrm>
-          <a:prstGeom prst="rect">
-            <a:avLst/>
-          </a:prstGeom>
-          <a:noFill/>
-        </p:spPr>
-        <p:txBody>
-          <a:bodyPr wrap="square">
-            <a:spAutoFit/>
-          </a:bodyPr>
-          <a:lstStyle/>
-          <a:p>
-            <a:pPr algn="l">
-              <a:defRPr sz="1600" b="1">
-                <a:solidFill>
-                  <a:srgbClr val="D4A84B"/>
-                </a:solidFill>
-                <a:latin typeface="Courier New"/>
-              </a:defRPr>
-            </a:pPr>
-            <a:r>
-              <a:t>0.15</a:t>
-            </a:r>
-          </a:p>
-        </p:txBody>
-      </p:sp>
-      <p:sp>
-        <p:nvSpPr>
-          <p:cNvPr id="16" name="TextBox 15"/>
-          <p:cNvSpPr txBox="1"/>
-          <p:nvPr/>
-        </p:nvSpPr>
-        <p:spPr>
-          <a:xfrm>
-            <a:off x="2286000" y="5212079"/>
-            <a:ext cx="2286000" cy="365760"/>
-          </a:xfrm>
-          <a:prstGeom prst="rect">
-            <a:avLst/>
-          </a:prstGeom>
-          <a:noFill/>
-        </p:spPr>
-        <p:txBody>
-          <a:bodyPr wrap="square">
-            <a:spAutoFit/>
-          </a:bodyPr>
-          <a:lstStyle/>
-          <a:p>
-            <a:pPr algn="l">
-              <a:defRPr sz="1400" b="1">
-                <a:solidFill>
-                  <a:srgbClr val="E8E8E8"/>
-                </a:solidFill>
-                <a:latin typeface="Calibri"/>
-              </a:defRPr>
-            </a:pPr>
-            <a:r>
-              <a:t>Intake Routing</a:t>
-            </a:r>
-          </a:p>
-        </p:txBody>
-      </p:sp>
-      <p:sp>
-        <p:nvSpPr>
-          <p:cNvPr id="17" name="TextBox 16"/>
-          <p:cNvSpPr txBox="1"/>
-          <p:nvPr/>
-        </p:nvSpPr>
-        <p:spPr>
-          <a:xfrm>
-            <a:off x="4754880" y="5212079"/>
-            <a:ext cx="8686800" cy="365760"/>
-          </a:xfrm>
-          <a:prstGeom prst="rect">
-            <a:avLst/>
-          </a:prstGeom>
-          <a:noFill/>
-        </p:spPr>
-        <p:txBody>
-          <a:bodyPr wrap="square">
-            <a:spAutoFit/>
-          </a:bodyPr>
-          <a:lstStyle/>
-          <a:p>
-            <a:pPr algn="l">
-              <a:defRPr sz="1100" b="0">
-                <a:solidFill>
-                  <a:srgbClr val="8A9BB0"/>
-                </a:solidFill>
-                <a:latin typeface="Calibri"/>
-              </a:defRPr>
-            </a:pPr>
-            <a:r>
-              <a:t>3 prompts with known-correct routing. Binary correct/incorrect per prompt.</a:t>
-            </a:r>
-          </a:p>
-        </p:txBody>
-      </p:sp>
-      <p:sp>
-        <p:nvSpPr>
-          <p:cNvPr id="18" name="TextBox 17"/>
-          <p:cNvSpPr txBox="1"/>
-          <p:nvPr/>
-        </p:nvSpPr>
-        <p:spPr>
-          <a:xfrm>
-            <a:off x="1371600" y="5852160"/>
-            <a:ext cx="731520" cy="365760"/>
-          </a:xfrm>
-          <a:prstGeom prst="rect">
-            <a:avLst/>
-          </a:prstGeom>
-          <a:noFill/>
-        </p:spPr>
-        <p:txBody>
-          <a:bodyPr wrap="square">
-            <a:spAutoFit/>
-          </a:bodyPr>
-          <a:lstStyle/>
-          <a:p>
-            <a:pPr algn="l">
-              <a:defRPr sz="1600" b="1">
-                <a:solidFill>
-                  <a:srgbClr val="D4A84B"/>
-                </a:solidFill>
-                <a:latin typeface="Courier New"/>
-              </a:defRPr>
-            </a:pPr>
-            <a:r>
-              <a:t>0.10</a:t>
-            </a:r>
-          </a:p>
-        </p:txBody>
-      </p:sp>
-      <p:sp>
-        <p:nvSpPr>
-          <p:cNvPr id="19" name="TextBox 18"/>
-          <p:cNvSpPr txBox="1"/>
-          <p:nvPr/>
-        </p:nvSpPr>
-        <p:spPr>
-          <a:xfrm>
-            <a:off x="2286000" y="5852160"/>
-            <a:ext cx="2286000" cy="365760"/>
-          </a:xfrm>
-          <a:prstGeom prst="rect">
-            <a:avLst/>
-          </a:prstGeom>
-          <a:noFill/>
-        </p:spPr>
-        <p:txBody>
-          <a:bodyPr wrap="square">
-            <a:spAutoFit/>
-          </a:bodyPr>
-          <a:lstStyle/>
-          <a:p>
-            <a:pPr algn="l">
-              <a:defRPr sz="1400" b="1">
-                <a:solidFill>
-                  <a:srgbClr val="E8E8E8"/>
-                </a:solidFill>
-                <a:latin typeface="Calibri"/>
-              </a:defRPr>
-            </a:pPr>
-            <a:r>
-              <a:t>Session Management</a:t>
-            </a:r>
-          </a:p>
-        </p:txBody>
-      </p:sp>
-      <p:sp>
-        <p:nvSpPr>
-          <p:cNvPr id="20" name="TextBox 19"/>
-          <p:cNvSpPr txBox="1"/>
-          <p:nvPr/>
-        </p:nvSpPr>
-        <p:spPr>
-          <a:xfrm>
-            <a:off x="4754880" y="5852160"/>
-            <a:ext cx="8686800" cy="365760"/>
-          </a:xfrm>
-          <a:prstGeom prst="rect">
-            <a:avLst/>
-          </a:prstGeom>
-          <a:noFill/>
-        </p:spPr>
-        <p:txBody>
-          <a:bodyPr wrap="square">
-            <a:spAutoFit/>
-          </a:bodyPr>
-          <a:lstStyle/>
-          <a:p>
-            <a:pPr algn="l">
-              <a:defRPr sz="1100" b="0">
-                <a:solidFill>
-                  <a:srgbClr val="8A9BB0"/>
-                </a:solidFill>
-                <a:latin typeface="Calibri"/>
-              </a:defRPr>
-            </a:pPr>
-            <a:r>
-              <a:t>Break points at dependency boundaries, snapshot quality, cold-start priming.</a:t>
-            </a:r>
-          </a:p>
-        </p:txBody>
-      </p:sp>
-      <p:sp>
-        <p:nvSpPr>
-          <p:cNvPr id="21" name="TextBox 20"/>
-          <p:cNvSpPr txBox="1"/>
-          <p:nvPr/>
-        </p:nvSpPr>
-        <p:spPr>
-          <a:xfrm>
-            <a:off x="1371600" y="6583680"/>
-            <a:ext cx="2743200" cy="274320"/>
-          </a:xfrm>
-          <a:prstGeom prst="rect">
-            <a:avLst/>
-          </a:prstGeom>
-          <a:noFill/>
-        </p:spPr>
-        <p:txBody>
-          <a:bodyPr wrap="square">
-            <a:spAutoFit/>
-          </a:bodyPr>
-          <a:lstStyle/>
-          <a:p>
-            <a:pPr algn="l">
-              <a:defRPr sz="1000" b="1">
-                <a:solidFill>
-                  <a:srgbClr val="2E8B8B"/>
-                </a:solidFill>
-                <a:latin typeface="Courier New"/>
-              </a:defRPr>
-            </a:pPr>
-            <a:r>
-              <a:t>4 CONFIGURATIONS TESTED</a:t>
-            </a:r>
-          </a:p>
-        </p:txBody>
-      </p:sp>
-      <p:sp>
-        <p:nvSpPr>
-          <p:cNvPr id="22" name="TextBox 21"/>
-          <p:cNvSpPr txBox="1"/>
-          <p:nvPr/>
-        </p:nvSpPr>
-        <p:spPr>
-          <a:xfrm>
-            <a:off x="1371600" y="6858000"/>
-            <a:ext cx="914400" cy="274320"/>
-          </a:xfrm>
-          <a:prstGeom prst="rect">
-            <a:avLst/>
-          </a:prstGeom>
-          <a:noFill/>
-        </p:spPr>
-        <p:txBody>
-          <a:bodyPr wrap="square">
-            <a:spAutoFit/>
-          </a:bodyPr>
-          <a:lstStyle/>
-          <a:p>
-            <a:pPr algn="l">
-              <a:defRPr sz="900" b="1">
-                <a:solidFill>
-                  <a:srgbClr val="8A9BB0"/>
-                </a:solidFill>
-                <a:latin typeface="Courier New"/>
-              </a:defRPr>
-            </a:pPr>
-            <a:r>
-              <a:t>Config</a:t>
-            </a:r>
-          </a:p>
-        </p:txBody>
-      </p:sp>
-      <p:sp>
-        <p:nvSpPr>
-          <p:cNvPr id="23" name="TextBox 22"/>
-          <p:cNvSpPr txBox="1"/>
-          <p:nvPr/>
-        </p:nvSpPr>
-        <p:spPr>
-          <a:xfrm>
-            <a:off x="2743200" y="6858000"/>
-            <a:ext cx="5943600" cy="274320"/>
-          </a:xfrm>
-          <a:prstGeom prst="rect">
-            <a:avLst/>
-          </a:prstGeom>
-          <a:noFill/>
-        </p:spPr>
-        <p:txBody>
-          <a:bodyPr wrap="square">
-            <a:spAutoFit/>
-          </a:bodyPr>
-          <a:lstStyle/>
-          <a:p>
-            <a:pPr algn="l">
-              <a:defRPr sz="900" b="1">
-                <a:solidFill>
-                  <a:srgbClr val="8A9BB0"/>
-                </a:solidFill>
-                <a:latin typeface="Courier New"/>
-              </a:defRPr>
-            </a:pPr>
-            <a:r>
-              <a:t>Setup</a:t>
-            </a:r>
-          </a:p>
-        </p:txBody>
-      </p:sp>
-      <p:sp>
-        <p:nvSpPr>
-          <p:cNvPr id="24" name="TextBox 23"/>
-          <p:cNvSpPr txBox="1"/>
-          <p:nvPr/>
-        </p:nvSpPr>
-        <p:spPr>
-          <a:xfrm>
-            <a:off x="9144000" y="6858000"/>
+                <a:latin typeface="Courier New"/>
+              </a:defRPr>
+            </a:pPr>
+            <a:r>
+              <a:t>0.957</a:t>
+            </a:r>
+          </a:p>
+        </p:txBody>
+      </p:sp>
+      <p:sp>
+        <p:nvSpPr>
+          <p:cNvPr id="41" name="TextBox 40"/>
+          <p:cNvSpPr txBox="1"/>
+          <p:nvPr/>
+        </p:nvSpPr>
+        <p:spPr>
+          <a:xfrm>
+            <a:off x="9601200" y="7406640"/>
             <a:ext cx="1828800" cy="274320"/>
           </a:xfrm>
           <a:prstGeom prst="rect">
@@ -6238,619 +7226,7 @@
           <a:lstStyle/>
           <a:p>
             <a:pPr algn="l">
-              <a:defRPr sz="900" b="1">
-                <a:solidFill>
-                  <a:srgbClr val="8A9BB0"/>
-                </a:solidFill>
-                <a:latin typeface="Courier New"/>
-              </a:defRPr>
-            </a:pPr>
-            <a:r>
-              <a:t>Score</a:t>
-            </a:r>
-          </a:p>
-        </p:txBody>
-      </p:sp>
-      <p:sp>
-        <p:nvSpPr>
-          <p:cNvPr id="25" name="TextBox 24"/>
-          <p:cNvSpPr txBox="1"/>
-          <p:nvPr/>
-        </p:nvSpPr>
-        <p:spPr>
-          <a:xfrm>
-            <a:off x="11430000" y="6858000"/>
-            <a:ext cx="1828800" cy="274320"/>
-          </a:xfrm>
-          <a:prstGeom prst="rect">
-            <a:avLst/>
-          </a:prstGeom>
-          <a:noFill/>
-        </p:spPr>
-        <p:txBody>
-          <a:bodyPr wrap="square">
-            <a:spAutoFit/>
-          </a:bodyPr>
-          <a:lstStyle/>
-          <a:p>
-            <a:pPr algn="l">
-              <a:defRPr sz="900" b="1">
-                <a:solidFill>
-                  <a:srgbClr val="8A9BB0"/>
-                </a:solidFill>
-                <a:latin typeface="Courier New"/>
-              </a:defRPr>
-            </a:pPr>
-            <a:r>
-              <a:t>Cost</a:t>
-            </a:r>
-          </a:p>
-        </p:txBody>
-      </p:sp>
-      <p:sp>
-        <p:nvSpPr>
-          <p:cNvPr id="26" name="TextBox 25"/>
-          <p:cNvSpPr txBox="1"/>
-          <p:nvPr/>
-        </p:nvSpPr>
-        <p:spPr>
-          <a:xfrm>
-            <a:off x="1371600" y="7178040"/>
-            <a:ext cx="914400" cy="228600"/>
-          </a:xfrm>
-          <a:prstGeom prst="rect">
-            <a:avLst/>
-          </a:prstGeom>
-          <a:noFill/>
-        </p:spPr>
-        <p:txBody>
-          <a:bodyPr wrap="square">
-            <a:spAutoFit/>
-          </a:bodyPr>
-          <a:lstStyle/>
-          <a:p>
-            <a:pPr algn="l">
-              <a:defRPr sz="1100" b="0">
-                <a:solidFill>
-                  <a:srgbClr val="8A9BB0"/>
-                </a:solidFill>
-                <a:latin typeface="Courier New"/>
-              </a:defRPr>
-            </a:pPr>
-            <a:r>
-              <a:t>A</a:t>
-            </a:r>
-          </a:p>
-        </p:txBody>
-      </p:sp>
-      <p:sp>
-        <p:nvSpPr>
-          <p:cNvPr id="27" name="TextBox 26"/>
-          <p:cNvSpPr txBox="1"/>
-          <p:nvPr/>
-        </p:nvSpPr>
-        <p:spPr>
-          <a:xfrm>
-            <a:off x="2743200" y="7178040"/>
-            <a:ext cx="5943600" cy="228600"/>
-          </a:xfrm>
-          <a:prstGeom prst="rect">
-            <a:avLst/>
-          </a:prstGeom>
-          <a:noFill/>
-        </p:spPr>
-        <p:txBody>
-          <a:bodyPr wrap="square">
-            <a:spAutoFit/>
-          </a:bodyPr>
-          <a:lstStyle/>
-          <a:p>
-            <a:pPr algn="l">
-              <a:defRPr sz="1100" b="0">
-                <a:solidFill>
-                  <a:srgbClr val="8A9BB0"/>
-                </a:solidFill>
-                <a:latin typeface="Courier New"/>
-              </a:defRPr>
-            </a:pPr>
-            <a:r>
-              <a:t>Weak constitutions + Opus 4</a:t>
-            </a:r>
-          </a:p>
-        </p:txBody>
-      </p:sp>
-      <p:sp>
-        <p:nvSpPr>
-          <p:cNvPr id="28" name="TextBox 27"/>
-          <p:cNvSpPr txBox="1"/>
-          <p:nvPr/>
-        </p:nvSpPr>
-        <p:spPr>
-          <a:xfrm>
-            <a:off x="9144000" y="7178040"/>
-            <a:ext cx="1828800" cy="228600"/>
-          </a:xfrm>
-          <a:prstGeom prst="rect">
-            <a:avLst/>
-          </a:prstGeom>
-          <a:noFill/>
-        </p:spPr>
-        <p:txBody>
-          <a:bodyPr wrap="square">
-            <a:spAutoFit/>
-          </a:bodyPr>
-          <a:lstStyle/>
-          <a:p>
-            <a:pPr algn="l">
-              <a:defRPr sz="1100" b="1">
-                <a:solidFill>
-                  <a:srgbClr val="8A9BB0"/>
-                </a:solidFill>
-                <a:latin typeface="Courier New"/>
-              </a:defRPr>
-            </a:pPr>
-            <a:r>
-              <a:t>0.957</a:t>
-            </a:r>
-          </a:p>
-        </p:txBody>
-      </p:sp>
-      <p:sp>
-        <p:nvSpPr>
-          <p:cNvPr id="29" name="TextBox 28"/>
-          <p:cNvSpPr txBox="1"/>
-          <p:nvPr/>
-        </p:nvSpPr>
-        <p:spPr>
-          <a:xfrm>
-            <a:off x="11430000" y="7178040"/>
-            <a:ext cx="1828800" cy="228600"/>
-          </a:xfrm>
-          <a:prstGeom prst="rect">
-            <a:avLst/>
-          </a:prstGeom>
-          <a:noFill/>
-        </p:spPr>
-        <p:txBody>
-          <a:bodyPr wrap="square">
-            <a:spAutoFit/>
-          </a:bodyPr>
-          <a:lstStyle/>
-          <a:p>
-            <a:pPr algn="l">
-              <a:defRPr sz="1100" b="0">
-                <a:solidFill>
-                  <a:srgbClr val="8A9BB0"/>
-                </a:solidFill>
-                <a:latin typeface="Courier New"/>
-              </a:defRPr>
-            </a:pPr>
-            <a:r>
-              <a:t>~100%</a:t>
-            </a:r>
-          </a:p>
-        </p:txBody>
-      </p:sp>
-      <p:sp>
-        <p:nvSpPr>
-          <p:cNvPr id="30" name="TextBox 29"/>
-          <p:cNvSpPr txBox="1"/>
-          <p:nvPr/>
-        </p:nvSpPr>
-        <p:spPr>
-          <a:xfrm>
-            <a:off x="1371600" y="7434071"/>
-            <a:ext cx="914400" cy="228600"/>
-          </a:xfrm>
-          <a:prstGeom prst="rect">
-            <a:avLst/>
-          </a:prstGeom>
-          <a:noFill/>
-        </p:spPr>
-        <p:txBody>
-          <a:bodyPr wrap="square">
-            <a:spAutoFit/>
-          </a:bodyPr>
-          <a:lstStyle/>
-          <a:p>
-            <a:pPr algn="l">
-              <a:defRPr sz="1100" b="0">
-                <a:solidFill>
-                  <a:srgbClr val="E8E8E8"/>
-                </a:solidFill>
-                <a:latin typeface="Courier New"/>
-              </a:defRPr>
-            </a:pPr>
-            <a:r>
-              <a:t>B</a:t>
-            </a:r>
-          </a:p>
-        </p:txBody>
-      </p:sp>
-      <p:sp>
-        <p:nvSpPr>
-          <p:cNvPr id="31" name="TextBox 30"/>
-          <p:cNvSpPr txBox="1"/>
-          <p:nvPr/>
-        </p:nvSpPr>
-        <p:spPr>
-          <a:xfrm>
-            <a:off x="2743200" y="7434071"/>
-            <a:ext cx="5943600" cy="228600"/>
-          </a:xfrm>
-          <a:prstGeom prst="rect">
-            <a:avLst/>
-          </a:prstGeom>
-          <a:noFill/>
-        </p:spPr>
-        <p:txBody>
-          <a:bodyPr wrap="square">
-            <a:spAutoFit/>
-          </a:bodyPr>
-          <a:lstStyle/>
-          <a:p>
-            <a:pPr algn="l">
-              <a:defRPr sz="1100" b="0">
-                <a:solidFill>
-                  <a:srgbClr val="8A9BB0"/>
-                </a:solidFill>
-                <a:latin typeface="Courier New"/>
-              </a:defRPr>
-            </a:pPr>
-            <a:r>
-              <a:t>Strong constitutions + Opus 4</a:t>
-            </a:r>
-          </a:p>
-        </p:txBody>
-      </p:sp>
-      <p:sp>
-        <p:nvSpPr>
-          <p:cNvPr id="32" name="TextBox 31"/>
-          <p:cNvSpPr txBox="1"/>
-          <p:nvPr/>
-        </p:nvSpPr>
-        <p:spPr>
-          <a:xfrm>
-            <a:off x="9144000" y="7434071"/>
-            <a:ext cx="1828800" cy="228600"/>
-          </a:xfrm>
-          <a:prstGeom prst="rect">
-            <a:avLst/>
-          </a:prstGeom>
-          <a:noFill/>
-        </p:spPr>
-        <p:txBody>
-          <a:bodyPr wrap="square">
-            <a:spAutoFit/>
-          </a:bodyPr>
-          <a:lstStyle/>
-          <a:p>
-            <a:pPr algn="l">
-              <a:defRPr sz="1100" b="1">
-                <a:solidFill>
-                  <a:srgbClr val="E8E8E8"/>
-                </a:solidFill>
-                <a:latin typeface="Courier New"/>
-              </a:defRPr>
-            </a:pPr>
-            <a:r>
-              <a:t>1.000</a:t>
-            </a:r>
-          </a:p>
-        </p:txBody>
-      </p:sp>
-      <p:sp>
-        <p:nvSpPr>
-          <p:cNvPr id="33" name="TextBox 32"/>
-          <p:cNvSpPr txBox="1"/>
-          <p:nvPr/>
-        </p:nvSpPr>
-        <p:spPr>
-          <a:xfrm>
-            <a:off x="11430000" y="7434071"/>
-            <a:ext cx="1828800" cy="228600"/>
-          </a:xfrm>
-          <a:prstGeom prst="rect">
-            <a:avLst/>
-          </a:prstGeom>
-          <a:noFill/>
-        </p:spPr>
-        <p:txBody>
-          <a:bodyPr wrap="square">
-            <a:spAutoFit/>
-          </a:bodyPr>
-          <a:lstStyle/>
-          <a:p>
-            <a:pPr algn="l">
-              <a:defRPr sz="1100" b="0">
-                <a:solidFill>
-                  <a:srgbClr val="8A9BB0"/>
-                </a:solidFill>
-                <a:latin typeface="Courier New"/>
-              </a:defRPr>
-            </a:pPr>
-            <a:r>
-              <a:t>100%</a:t>
-            </a:r>
-          </a:p>
-        </p:txBody>
-      </p:sp>
-      <p:sp>
-        <p:nvSpPr>
-          <p:cNvPr id="34" name="TextBox 33"/>
-          <p:cNvSpPr txBox="1"/>
-          <p:nvPr/>
-        </p:nvSpPr>
-        <p:spPr>
-          <a:xfrm>
-            <a:off x="1371600" y="7690104"/>
-            <a:ext cx="914400" cy="228600"/>
-          </a:xfrm>
-          <a:prstGeom prst="rect">
-            <a:avLst/>
-          </a:prstGeom>
-          <a:noFill/>
-        </p:spPr>
-        <p:txBody>
-          <a:bodyPr wrap="square">
-            <a:spAutoFit/>
-          </a:bodyPr>
-          <a:lstStyle/>
-          <a:p>
-            <a:pPr algn="l">
-              <a:defRPr sz="1100" b="1">
-                <a:solidFill>
-                  <a:srgbClr val="D4A84B"/>
-                </a:solidFill>
-                <a:latin typeface="Courier New"/>
-              </a:defRPr>
-            </a:pPr>
-            <a:r>
-              <a:t>C</a:t>
-            </a:r>
-          </a:p>
-        </p:txBody>
-      </p:sp>
-      <p:sp>
-        <p:nvSpPr>
-          <p:cNvPr id="35" name="TextBox 34"/>
-          <p:cNvSpPr txBox="1"/>
-          <p:nvPr/>
-        </p:nvSpPr>
-        <p:spPr>
-          <a:xfrm>
-            <a:off x="2743200" y="7690104"/>
-            <a:ext cx="5943600" cy="228600"/>
-          </a:xfrm>
-          <a:prstGeom prst="rect">
-            <a:avLst/>
-          </a:prstGeom>
-          <a:noFill/>
-        </p:spPr>
-        <p:txBody>
-          <a:bodyPr wrap="square">
-            <a:spAutoFit/>
-          </a:bodyPr>
-          <a:lstStyle/>
-          <a:p>
-            <a:pPr algn="l">
-              <a:defRPr sz="1100" b="0">
-                <a:solidFill>
-                  <a:srgbClr val="D4A84B"/>
-                </a:solidFill>
-                <a:latin typeface="Courier New"/>
-              </a:defRPr>
-            </a:pPr>
-            <a:r>
-              <a:t>Strong constitutions + tiered (Opus/Sonnet)</a:t>
-            </a:r>
-          </a:p>
-        </p:txBody>
-      </p:sp>
-      <p:sp>
-        <p:nvSpPr>
-          <p:cNvPr id="36" name="TextBox 35"/>
-          <p:cNvSpPr txBox="1"/>
-          <p:nvPr/>
-        </p:nvSpPr>
-        <p:spPr>
-          <a:xfrm>
-            <a:off x="9144000" y="7690104"/>
-            <a:ext cx="1828800" cy="228600"/>
-          </a:xfrm>
-          <a:prstGeom prst="rect">
-            <a:avLst/>
-          </a:prstGeom>
-          <a:noFill/>
-        </p:spPr>
-        <p:txBody>
-          <a:bodyPr wrap="square">
-            <a:spAutoFit/>
-          </a:bodyPr>
-          <a:lstStyle/>
-          <a:p>
-            <a:pPr algn="l">
-              <a:defRPr sz="1100" b="1">
-                <a:solidFill>
-                  <a:srgbClr val="D4A84B"/>
-                </a:solidFill>
-                <a:latin typeface="Courier New"/>
-              </a:defRPr>
-            </a:pPr>
-            <a:r>
-              <a:t>1.000</a:t>
-            </a:r>
-          </a:p>
-        </p:txBody>
-      </p:sp>
-      <p:sp>
-        <p:nvSpPr>
-          <p:cNvPr id="37" name="TextBox 36"/>
-          <p:cNvSpPr txBox="1"/>
-          <p:nvPr/>
-        </p:nvSpPr>
-        <p:spPr>
-          <a:xfrm>
-            <a:off x="11430000" y="7690104"/>
-            <a:ext cx="1828800" cy="228600"/>
-          </a:xfrm>
-          <a:prstGeom prst="rect">
-            <a:avLst/>
-          </a:prstGeom>
-          <a:noFill/>
-        </p:spPr>
-        <p:txBody>
-          <a:bodyPr wrap="square">
-            <a:spAutoFit/>
-          </a:bodyPr>
-          <a:lstStyle/>
-          <a:p>
-            <a:pPr algn="l">
-              <a:defRPr sz="1100" b="0">
-                <a:solidFill>
-                  <a:srgbClr val="D4A84B"/>
-                </a:solidFill>
-                <a:latin typeface="Courier New"/>
-              </a:defRPr>
-            </a:pPr>
-            <a:r>
-              <a:t>~60%</a:t>
-            </a:r>
-          </a:p>
-        </p:txBody>
-      </p:sp>
-      <p:sp>
-        <p:nvSpPr>
-          <p:cNvPr id="38" name="TextBox 37"/>
-          <p:cNvSpPr txBox="1"/>
-          <p:nvPr/>
-        </p:nvSpPr>
-        <p:spPr>
-          <a:xfrm>
-            <a:off x="1371600" y="7946136"/>
-            <a:ext cx="914400" cy="228600"/>
-          </a:xfrm>
-          <a:prstGeom prst="rect">
-            <a:avLst/>
-          </a:prstGeom>
-          <a:noFill/>
-        </p:spPr>
-        <p:txBody>
-          <a:bodyPr wrap="square">
-            <a:spAutoFit/>
-          </a:bodyPr>
-          <a:lstStyle/>
-          <a:p>
-            <a:pPr algn="l">
-              <a:defRPr sz="1100" b="0">
-                <a:solidFill>
-                  <a:srgbClr val="8A9BB0"/>
-                </a:solidFill>
-                <a:latin typeface="Courier New"/>
-              </a:defRPr>
-            </a:pPr>
-            <a:r>
-              <a:t>D</a:t>
-            </a:r>
-          </a:p>
-        </p:txBody>
-      </p:sp>
-      <p:sp>
-        <p:nvSpPr>
-          <p:cNvPr id="39" name="TextBox 38"/>
-          <p:cNvSpPr txBox="1"/>
-          <p:nvPr/>
-        </p:nvSpPr>
-        <p:spPr>
-          <a:xfrm>
-            <a:off x="2743200" y="7946136"/>
-            <a:ext cx="5943600" cy="228600"/>
-          </a:xfrm>
-          <a:prstGeom prst="rect">
-            <a:avLst/>
-          </a:prstGeom>
-          <a:noFill/>
-        </p:spPr>
-        <p:txBody>
-          <a:bodyPr wrap="square">
-            <a:spAutoFit/>
-          </a:bodyPr>
-          <a:lstStyle/>
-          <a:p>
-            <a:pPr algn="l">
-              <a:defRPr sz="1100" b="0">
-                <a:solidFill>
-                  <a:srgbClr val="8A9BB0"/>
-                </a:solidFill>
-                <a:latin typeface="Courier New"/>
-              </a:defRPr>
-            </a:pPr>
-            <a:r>
-              <a:t>Strong constitutions + Sonnet only</a:t>
-            </a:r>
-          </a:p>
-        </p:txBody>
-      </p:sp>
-      <p:sp>
-        <p:nvSpPr>
-          <p:cNvPr id="40" name="TextBox 39"/>
-          <p:cNvSpPr txBox="1"/>
-          <p:nvPr/>
-        </p:nvSpPr>
-        <p:spPr>
-          <a:xfrm>
-            <a:off x="9144000" y="7946136"/>
-            <a:ext cx="1828800" cy="228600"/>
-          </a:xfrm>
-          <a:prstGeom prst="rect">
-            <a:avLst/>
-          </a:prstGeom>
-          <a:noFill/>
-        </p:spPr>
-        <p:txBody>
-          <a:bodyPr wrap="square">
-            <a:spAutoFit/>
-          </a:bodyPr>
-          <a:lstStyle/>
-          <a:p>
-            <a:pPr algn="l">
-              <a:defRPr sz="1100" b="1">
-                <a:solidFill>
-                  <a:srgbClr val="8A9BB0"/>
-                </a:solidFill>
-                <a:latin typeface="Courier New"/>
-              </a:defRPr>
-            </a:pPr>
-            <a:r>
-              <a:t>0.957</a:t>
-            </a:r>
-          </a:p>
-        </p:txBody>
-      </p:sp>
-      <p:sp>
-        <p:nvSpPr>
-          <p:cNvPr id="41" name="TextBox 40"/>
-          <p:cNvSpPr txBox="1"/>
-          <p:nvPr/>
-        </p:nvSpPr>
-        <p:spPr>
-          <a:xfrm>
-            <a:off x="11430000" y="7946136"/>
-            <a:ext cx="1828800" cy="228600"/>
-          </a:xfrm>
-          <a:prstGeom prst="rect">
-            <a:avLst/>
-          </a:prstGeom>
-          <a:noFill/>
-        </p:spPr>
-        <p:txBody>
-          <a:bodyPr wrap="square">
-            <a:spAutoFit/>
-          </a:bodyPr>
-          <a:lstStyle/>
-          <a:p>
-            <a:pPr algn="l">
-              <a:defRPr sz="1100" b="0">
+              <a:defRPr sz="1300" b="0">
                 <a:solidFill>
                   <a:srgbClr val="8A9BB0"/>
                 </a:solidFill>
@@ -6898,7 +7274,7 @@
         <p:spPr>
           <a:xfrm>
             <a:off x="1097280" y="548640"/>
-            <a:ext cx="3657600" cy="365760"/>
+            <a:ext cx="3657600" cy="274320"/>
           </a:xfrm>
           <a:prstGeom prst="rect">
             <a:avLst/>
@@ -6934,7 +7310,7 @@
         <p:spPr>
           <a:xfrm>
             <a:off x="1097280" y="914400"/>
-            <a:ext cx="6400800" cy="1097280"/>
+            <a:ext cx="6400800" cy="1371600"/>
           </a:xfrm>
           <a:prstGeom prst="rect">
             <a:avLst/>
@@ -7004,11 +7380,11 @@
             </a:r>
             <a:br/>
             <a:r>
-              <a:t>maintenance work, refactoring, updates. I used to be</a:t>
+              <a:t>maintenance work, refactoring, updates.</a:t>
             </a:r>
             <a:br/>
             <a:r>
-              <a:t>a craftsman — now I feel like a factory manager."</a:t>
+              <a:t>I used to be a craftsman — now I feel like a factory manager."</a:t>
             </a:r>
           </a:p>
         </p:txBody>
@@ -7022,7 +7398,7 @@
         <p:spPr>
           <a:xfrm>
             <a:off x="1097280" y="4572000"/>
-            <a:ext cx="5943600" cy="365760"/>
+            <a:ext cx="5943600" cy="274320"/>
           </a:xfrm>
           <a:prstGeom prst="rect">
             <a:avLst/>
@@ -7051,14 +7427,57 @@
       </p:sp>
       <p:sp>
         <p:nvSpPr>
-          <p:cNvPr id="6" name="TextBox 5"/>
-          <p:cNvSpPr txBox="1"/>
-          <p:nvPr/>
-        </p:nvSpPr>
-        <p:spPr>
-          <a:xfrm>
-            <a:off x="8229600" y="1097280"/>
-            <a:ext cx="1828800" cy="640080"/>
+          <p:cNvPr id="6" name="Rounded Rectangle 5"/>
+          <p:cNvSpPr/>
+          <p:nvPr/>
+        </p:nvSpPr>
+        <p:spPr>
+          <a:xfrm>
+            <a:off x="8046720" y="1097280"/>
+            <a:ext cx="5486400" cy="1280160"/>
+          </a:xfrm>
+          <a:prstGeom prst="roundRect">
+            <a:avLst>
+              <a:gd name="adj" fmla="val 5000"/>
+            </a:avLst>
+          </a:prstGeom>
+          <a:solidFill>
+            <a:srgbClr val="1E2A38"/>
+          </a:solidFill>
+          <a:ln/>
+        </p:spPr>
+        <p:style>
+          <a:lnRef idx="1">
+            <a:schemeClr val="accent1"/>
+          </a:lnRef>
+          <a:fillRef idx="3">
+            <a:schemeClr val="accent1"/>
+          </a:fillRef>
+          <a:effectRef idx="2">
+            <a:schemeClr val="accent1"/>
+          </a:effectRef>
+          <a:fontRef idx="minor">
+            <a:schemeClr val="lt1"/>
+          </a:fontRef>
+        </p:style>
+        <p:txBody>
+          <a:bodyPr rtlCol="0" anchor="ctr"/>
+          <a:lstStyle/>
+          <a:p>
+            <a:pPr algn="ctr"/>
+          </a:p>
+        </p:txBody>
+      </p:sp>
+      <p:sp>
+        <p:nvSpPr>
+          <p:cNvPr id="7" name="TextBox 6"/>
+          <p:cNvSpPr txBox="1"/>
+          <p:nvPr/>
+        </p:nvSpPr>
+        <p:spPr>
+          <a:xfrm>
+            <a:off x="8229600" y="1234439"/>
+            <a:ext cx="1828800" cy="548640"/>
           </a:xfrm>
           <a:prstGeom prst="rect">
             <a:avLst/>
@@ -7087,14 +7506,14 @@
       </p:sp>
       <p:sp>
         <p:nvSpPr>
-          <p:cNvPr id="7" name="TextBox 6"/>
-          <p:cNvSpPr txBox="1"/>
-          <p:nvPr/>
-        </p:nvSpPr>
-        <p:spPr>
-          <a:xfrm>
-            <a:off x="10241280" y="1143000"/>
-            <a:ext cx="3657600" cy="365760"/>
+          <p:cNvPr id="8" name="TextBox 7"/>
+          <p:cNvSpPr txBox="1"/>
+          <p:nvPr/>
+        </p:nvSpPr>
+        <p:spPr>
+          <a:xfrm>
+            <a:off x="10241280" y="1234439"/>
+            <a:ext cx="3200400" cy="365760"/>
           </a:xfrm>
           <a:prstGeom prst="rect">
             <a:avLst/>
@@ -7123,14 +7542,14 @@
       </p:sp>
       <p:sp>
         <p:nvSpPr>
-          <p:cNvPr id="8" name="TextBox 7"/>
-          <p:cNvSpPr txBox="1"/>
-          <p:nvPr/>
-        </p:nvSpPr>
-        <p:spPr>
-          <a:xfrm>
-            <a:off x="10241280" y="1554480"/>
-            <a:ext cx="3657600" cy="274320"/>
+          <p:cNvPr id="9" name="TextBox 8"/>
+          <p:cNvSpPr txBox="1"/>
+          <p:nvPr/>
+        </p:nvSpPr>
+        <p:spPr>
+          <a:xfrm>
+            <a:off x="10241280" y="1645919"/>
+            <a:ext cx="3200400" cy="274320"/>
           </a:xfrm>
           <a:prstGeom prst="rect">
             <a:avLst/>
@@ -7159,14 +7578,57 @@
       </p:sp>
       <p:sp>
         <p:nvSpPr>
-          <p:cNvPr id="9" name="TextBox 8"/>
-          <p:cNvSpPr txBox="1"/>
-          <p:nvPr/>
-        </p:nvSpPr>
-        <p:spPr>
-          <a:xfrm>
-            <a:off x="8229600" y="2743200"/>
-            <a:ext cx="1828800" cy="640080"/>
+          <p:cNvPr id="10" name="Rounded Rectangle 9"/>
+          <p:cNvSpPr/>
+          <p:nvPr/>
+        </p:nvSpPr>
+        <p:spPr>
+          <a:xfrm>
+            <a:off x="8046720" y="2743200"/>
+            <a:ext cx="5486400" cy="1280160"/>
+          </a:xfrm>
+          <a:prstGeom prst="roundRect">
+            <a:avLst>
+              <a:gd name="adj" fmla="val 5000"/>
+            </a:avLst>
+          </a:prstGeom>
+          <a:solidFill>
+            <a:srgbClr val="1E2A38"/>
+          </a:solidFill>
+          <a:ln/>
+        </p:spPr>
+        <p:style>
+          <a:lnRef idx="1">
+            <a:schemeClr val="accent1"/>
+          </a:lnRef>
+          <a:fillRef idx="3">
+            <a:schemeClr val="accent1"/>
+          </a:fillRef>
+          <a:effectRef idx="2">
+            <a:schemeClr val="accent1"/>
+          </a:effectRef>
+          <a:fontRef idx="minor">
+            <a:schemeClr val="lt1"/>
+          </a:fontRef>
+        </p:style>
+        <p:txBody>
+          <a:bodyPr rtlCol="0" anchor="ctr"/>
+          <a:lstStyle/>
+          <a:p>
+            <a:pPr algn="ctr"/>
+          </a:p>
+        </p:txBody>
+      </p:sp>
+      <p:sp>
+        <p:nvSpPr>
+          <p:cNvPr id="11" name="TextBox 10"/>
+          <p:cNvSpPr txBox="1"/>
+          <p:nvPr/>
+        </p:nvSpPr>
+        <p:spPr>
+          <a:xfrm>
+            <a:off x="8229600" y="2880360"/>
+            <a:ext cx="1828800" cy="548640"/>
           </a:xfrm>
           <a:prstGeom prst="rect">
             <a:avLst/>
@@ -7195,14 +7657,14 @@
       </p:sp>
       <p:sp>
         <p:nvSpPr>
-          <p:cNvPr id="10" name="TextBox 9"/>
-          <p:cNvSpPr txBox="1"/>
-          <p:nvPr/>
-        </p:nvSpPr>
-        <p:spPr>
-          <a:xfrm>
-            <a:off x="10241280" y="2788920"/>
-            <a:ext cx="3657600" cy="365760"/>
+          <p:cNvPr id="12" name="TextBox 11"/>
+          <p:cNvSpPr txBox="1"/>
+          <p:nvPr/>
+        </p:nvSpPr>
+        <p:spPr>
+          <a:xfrm>
+            <a:off x="10241280" y="2880360"/>
+            <a:ext cx="3200400" cy="365760"/>
           </a:xfrm>
           <a:prstGeom prst="rect">
             <a:avLst/>
@@ -7231,14 +7693,14 @@
       </p:sp>
       <p:sp>
         <p:nvSpPr>
-          <p:cNvPr id="11" name="TextBox 10"/>
-          <p:cNvSpPr txBox="1"/>
-          <p:nvPr/>
-        </p:nvSpPr>
-        <p:spPr>
-          <a:xfrm>
-            <a:off x="10241280" y="3200400"/>
-            <a:ext cx="3657600" cy="274320"/>
+          <p:cNvPr id="13" name="TextBox 12"/>
+          <p:cNvSpPr txBox="1"/>
+          <p:nvPr/>
+        </p:nvSpPr>
+        <p:spPr>
+          <a:xfrm>
+            <a:off x="10241280" y="3291840"/>
+            <a:ext cx="3200400" cy="274320"/>
           </a:xfrm>
           <a:prstGeom prst="rect">
             <a:avLst/>
@@ -7267,14 +7729,57 @@
       </p:sp>
       <p:sp>
         <p:nvSpPr>
-          <p:cNvPr id="12" name="TextBox 11"/>
-          <p:cNvSpPr txBox="1"/>
-          <p:nvPr/>
-        </p:nvSpPr>
-        <p:spPr>
-          <a:xfrm>
-            <a:off x="8229600" y="4389120"/>
-            <a:ext cx="1828800" cy="640080"/>
+          <p:cNvPr id="14" name="Rounded Rectangle 13"/>
+          <p:cNvSpPr/>
+          <p:nvPr/>
+        </p:nvSpPr>
+        <p:spPr>
+          <a:xfrm>
+            <a:off x="8046720" y="4389120"/>
+            <a:ext cx="5486400" cy="1280160"/>
+          </a:xfrm>
+          <a:prstGeom prst="roundRect">
+            <a:avLst>
+              <a:gd name="adj" fmla="val 5000"/>
+            </a:avLst>
+          </a:prstGeom>
+          <a:solidFill>
+            <a:srgbClr val="1E2A38"/>
+          </a:solidFill>
+          <a:ln/>
+        </p:spPr>
+        <p:style>
+          <a:lnRef idx="1">
+            <a:schemeClr val="accent1"/>
+          </a:lnRef>
+          <a:fillRef idx="3">
+            <a:schemeClr val="accent1"/>
+          </a:fillRef>
+          <a:effectRef idx="2">
+            <a:schemeClr val="accent1"/>
+          </a:effectRef>
+          <a:fontRef idx="minor">
+            <a:schemeClr val="lt1"/>
+          </a:fontRef>
+        </p:style>
+        <p:txBody>
+          <a:bodyPr rtlCol="0" anchor="ctr"/>
+          <a:lstStyle/>
+          <a:p>
+            <a:pPr algn="ctr"/>
+          </a:p>
+        </p:txBody>
+      </p:sp>
+      <p:sp>
+        <p:nvSpPr>
+          <p:cNvPr id="15" name="TextBox 14"/>
+          <p:cNvSpPr txBox="1"/>
+          <p:nvPr/>
+        </p:nvSpPr>
+        <p:spPr>
+          <a:xfrm>
+            <a:off x="8229600" y="4526280"/>
+            <a:ext cx="1828800" cy="548640"/>
           </a:xfrm>
           <a:prstGeom prst="rect">
             <a:avLst/>
@@ -7303,14 +7808,14 @@
       </p:sp>
       <p:sp>
         <p:nvSpPr>
-          <p:cNvPr id="13" name="TextBox 12"/>
-          <p:cNvSpPr txBox="1"/>
-          <p:nvPr/>
-        </p:nvSpPr>
-        <p:spPr>
-          <a:xfrm>
-            <a:off x="10241280" y="4434840"/>
-            <a:ext cx="3657600" cy="365760"/>
+          <p:cNvPr id="16" name="TextBox 15"/>
+          <p:cNvSpPr txBox="1"/>
+          <p:nvPr/>
+        </p:nvSpPr>
+        <p:spPr>
+          <a:xfrm>
+            <a:off x="10241280" y="4526280"/>
+            <a:ext cx="3200400" cy="365760"/>
           </a:xfrm>
           <a:prstGeom prst="rect">
             <a:avLst/>
@@ -7339,14 +7844,14 @@
       </p:sp>
       <p:sp>
         <p:nvSpPr>
-          <p:cNvPr id="14" name="TextBox 13"/>
-          <p:cNvSpPr txBox="1"/>
-          <p:nvPr/>
-        </p:nvSpPr>
-        <p:spPr>
-          <a:xfrm>
-            <a:off x="10241280" y="4846320"/>
-            <a:ext cx="3657600" cy="274320"/>
+          <p:cNvPr id="17" name="TextBox 16"/>
+          <p:cNvSpPr txBox="1"/>
+          <p:nvPr/>
+        </p:nvSpPr>
+        <p:spPr>
+          <a:xfrm>
+            <a:off x="10241280" y="4937759"/>
+            <a:ext cx="3200400" cy="274320"/>
           </a:xfrm>
           <a:prstGeom prst="rect">
             <a:avLst/>
@@ -7375,14 +7880,57 @@
       </p:sp>
       <p:sp>
         <p:nvSpPr>
-          <p:cNvPr id="15" name="TextBox 14"/>
-          <p:cNvSpPr txBox="1"/>
-          <p:nvPr/>
-        </p:nvSpPr>
-        <p:spPr>
-          <a:xfrm>
-            <a:off x="8229600" y="6035040"/>
-            <a:ext cx="1828800" cy="640080"/>
+          <p:cNvPr id="18" name="Rounded Rectangle 17"/>
+          <p:cNvSpPr/>
+          <p:nvPr/>
+        </p:nvSpPr>
+        <p:spPr>
+          <a:xfrm>
+            <a:off x="8046720" y="6035040"/>
+            <a:ext cx="5486400" cy="1280160"/>
+          </a:xfrm>
+          <a:prstGeom prst="roundRect">
+            <a:avLst>
+              <a:gd name="adj" fmla="val 5000"/>
+            </a:avLst>
+          </a:prstGeom>
+          <a:solidFill>
+            <a:srgbClr val="1E2A38"/>
+          </a:solidFill>
+          <a:ln/>
+        </p:spPr>
+        <p:style>
+          <a:lnRef idx="1">
+            <a:schemeClr val="accent1"/>
+          </a:lnRef>
+          <a:fillRef idx="3">
+            <a:schemeClr val="accent1"/>
+          </a:fillRef>
+          <a:effectRef idx="2">
+            <a:schemeClr val="accent1"/>
+          </a:effectRef>
+          <a:fontRef idx="minor">
+            <a:schemeClr val="lt1"/>
+          </a:fontRef>
+        </p:style>
+        <p:txBody>
+          <a:bodyPr rtlCol="0" anchor="ctr"/>
+          <a:lstStyle/>
+          <a:p>
+            <a:pPr algn="ctr"/>
+          </a:p>
+        </p:txBody>
+      </p:sp>
+      <p:sp>
+        <p:nvSpPr>
+          <p:cNvPr id="19" name="TextBox 18"/>
+          <p:cNvSpPr txBox="1"/>
+          <p:nvPr/>
+        </p:nvSpPr>
+        <p:spPr>
+          <a:xfrm>
+            <a:off x="8229600" y="6172200"/>
+            <a:ext cx="1828800" cy="548640"/>
           </a:xfrm>
           <a:prstGeom prst="rect">
             <a:avLst/>
@@ -7411,14 +7959,14 @@
       </p:sp>
       <p:sp>
         <p:nvSpPr>
-          <p:cNvPr id="16" name="TextBox 15"/>
-          <p:cNvSpPr txBox="1"/>
-          <p:nvPr/>
-        </p:nvSpPr>
-        <p:spPr>
-          <a:xfrm>
-            <a:off x="10241280" y="6080760"/>
-            <a:ext cx="3657600" cy="365760"/>
+          <p:cNvPr id="20" name="TextBox 19"/>
+          <p:cNvSpPr txBox="1"/>
+          <p:nvPr/>
+        </p:nvSpPr>
+        <p:spPr>
+          <a:xfrm>
+            <a:off x="10241280" y="6172200"/>
+            <a:ext cx="3200400" cy="365760"/>
           </a:xfrm>
           <a:prstGeom prst="rect">
             <a:avLst/>
@@ -7447,14 +7995,14 @@
       </p:sp>
       <p:sp>
         <p:nvSpPr>
-          <p:cNvPr id="17" name="TextBox 16"/>
-          <p:cNvSpPr txBox="1"/>
-          <p:nvPr/>
-        </p:nvSpPr>
-        <p:spPr>
-          <a:xfrm>
-            <a:off x="10241280" y="6492240"/>
-            <a:ext cx="3657600" cy="274320"/>
+          <p:cNvPr id="21" name="TextBox 20"/>
+          <p:cNvSpPr txBox="1"/>
+          <p:nvPr/>
+        </p:nvSpPr>
+        <p:spPr>
+          <a:xfrm>
+            <a:off x="10241280" y="6583680"/>
+            <a:ext cx="3200400" cy="274320"/>
           </a:xfrm>
           <a:prstGeom prst="rect">
             <a:avLst/>
@@ -7515,8 +8063,8 @@
         </p:nvSpPr>
         <p:spPr>
           <a:xfrm>
-            <a:off x="1097280" y="731520"/>
-            <a:ext cx="3657600" cy="365760"/>
+            <a:off x="1097280" y="548640"/>
+            <a:ext cx="3657600" cy="274320"/>
           </a:xfrm>
           <a:prstGeom prst="rect">
             <a:avLst/>
@@ -7551,22 +8099,22 @@
         </p:nvSpPr>
         <p:spPr>
           <a:xfrm>
-            <a:off x="1097280" y="1188720"/>
-            <a:ext cx="11887200" cy="914400"/>
-          </a:xfrm>
-          <a:prstGeom prst="rect">
-            <a:avLst/>
-          </a:prstGeom>
-          <a:noFill/>
-        </p:spPr>
-        <p:txBody>
-          <a:bodyPr wrap="square">
-            <a:spAutoFit/>
-          </a:bodyPr>
-          <a:lstStyle/>
-          <a:p>
-            <a:pPr algn="l">
-              <a:defRPr sz="4000" b="1">
+            <a:off x="1097280" y="914400"/>
+            <a:ext cx="11887200" cy="731520"/>
+          </a:xfrm>
+          <a:prstGeom prst="rect">
+            <a:avLst/>
+          </a:prstGeom>
+          <a:noFill/>
+        </p:spPr>
+        <p:txBody>
+          <a:bodyPr wrap="square">
+            <a:spAutoFit/>
+          </a:bodyPr>
+          <a:lstStyle/>
+          <a:p>
+            <a:pPr algn="l">
+              <a:defRPr sz="3800" b="1">
                 <a:solidFill>
                   <a:srgbClr val="E8E8E8"/>
                 </a:solidFill>
@@ -7581,14 +8129,57 @@
       </p:sp>
       <p:sp>
         <p:nvSpPr>
-          <p:cNvPr id="4" name="TextBox 3"/>
-          <p:cNvSpPr txBox="1"/>
-          <p:nvPr/>
-        </p:nvSpPr>
-        <p:spPr>
-          <a:xfrm>
-            <a:off x="1371600" y="3200400"/>
-            <a:ext cx="3200400" cy="914400"/>
+          <p:cNvPr id="4" name="Rounded Rectangle 3"/>
+          <p:cNvSpPr/>
+          <p:nvPr/>
+        </p:nvSpPr>
+        <p:spPr>
+          <a:xfrm>
+            <a:off x="1371600" y="2743200"/>
+            <a:ext cx="3474720" cy="2743200"/>
+          </a:xfrm>
+          <a:prstGeom prst="roundRect">
+            <a:avLst>
+              <a:gd name="adj" fmla="val 5000"/>
+            </a:avLst>
+          </a:prstGeom>
+          <a:solidFill>
+            <a:srgbClr val="1E2A38"/>
+          </a:solidFill>
+          <a:ln/>
+        </p:spPr>
+        <p:style>
+          <a:lnRef idx="1">
+            <a:schemeClr val="accent1"/>
+          </a:lnRef>
+          <a:fillRef idx="3">
+            <a:schemeClr val="accent1"/>
+          </a:fillRef>
+          <a:effectRef idx="2">
+            <a:schemeClr val="accent1"/>
+          </a:effectRef>
+          <a:fontRef idx="minor">
+            <a:schemeClr val="lt1"/>
+          </a:fontRef>
+        </p:style>
+        <p:txBody>
+          <a:bodyPr rtlCol="0" anchor="ctr"/>
+          <a:lstStyle/>
+          <a:p>
+            <a:pPr algn="ctr"/>
+          </a:p>
+        </p:txBody>
+      </p:sp>
+      <p:sp>
+        <p:nvSpPr>
+          <p:cNvPr id="5" name="TextBox 4"/>
+          <p:cNvSpPr txBox="1"/>
+          <p:nvPr/>
+        </p:nvSpPr>
+        <p:spPr>
+          <a:xfrm>
+            <a:off x="1645920" y="3017520"/>
+            <a:ext cx="2926080" cy="914400"/>
           </a:xfrm>
           <a:prstGeom prst="rect">
             <a:avLst/>
@@ -7617,14 +8208,14 @@
       </p:sp>
       <p:sp>
         <p:nvSpPr>
-          <p:cNvPr id="5" name="TextBox 4"/>
-          <p:cNvSpPr txBox="1"/>
-          <p:nvPr/>
-        </p:nvSpPr>
-        <p:spPr>
-          <a:xfrm>
-            <a:off x="1371600" y="4572000"/>
-            <a:ext cx="3200400" cy="914400"/>
+          <p:cNvPr id="6" name="TextBox 5"/>
+          <p:cNvSpPr txBox="1"/>
+          <p:nvPr/>
+        </p:nvSpPr>
+        <p:spPr>
+          <a:xfrm>
+            <a:off x="1645920" y="4114800"/>
+            <a:ext cx="2926080" cy="914400"/>
           </a:xfrm>
           <a:prstGeom prst="rect">
             <a:avLst/>
@@ -7657,14 +8248,57 @@
       </p:sp>
       <p:sp>
         <p:nvSpPr>
-          <p:cNvPr id="6" name="TextBox 5"/>
-          <p:cNvSpPr txBox="1"/>
-          <p:nvPr/>
-        </p:nvSpPr>
-        <p:spPr>
-          <a:xfrm>
-            <a:off x="5486400" y="3200400"/>
-            <a:ext cx="3200400" cy="914400"/>
+          <p:cNvPr id="7" name="Rounded Rectangle 6"/>
+          <p:cNvSpPr/>
+          <p:nvPr/>
+        </p:nvSpPr>
+        <p:spPr>
+          <a:xfrm>
+            <a:off x="5486400" y="2743200"/>
+            <a:ext cx="3474720" cy="2743200"/>
+          </a:xfrm>
+          <a:prstGeom prst="roundRect">
+            <a:avLst>
+              <a:gd name="adj" fmla="val 5000"/>
+            </a:avLst>
+          </a:prstGeom>
+          <a:solidFill>
+            <a:srgbClr val="1E2A38"/>
+          </a:solidFill>
+          <a:ln/>
+        </p:spPr>
+        <p:style>
+          <a:lnRef idx="1">
+            <a:schemeClr val="accent1"/>
+          </a:lnRef>
+          <a:fillRef idx="3">
+            <a:schemeClr val="accent1"/>
+          </a:fillRef>
+          <a:effectRef idx="2">
+            <a:schemeClr val="accent1"/>
+          </a:effectRef>
+          <a:fontRef idx="minor">
+            <a:schemeClr val="lt1"/>
+          </a:fontRef>
+        </p:style>
+        <p:txBody>
+          <a:bodyPr rtlCol="0" anchor="ctr"/>
+          <a:lstStyle/>
+          <a:p>
+            <a:pPr algn="ctr"/>
+          </a:p>
+        </p:txBody>
+      </p:sp>
+      <p:sp>
+        <p:nvSpPr>
+          <p:cNvPr id="8" name="TextBox 7"/>
+          <p:cNvSpPr txBox="1"/>
+          <p:nvPr/>
+        </p:nvSpPr>
+        <p:spPr>
+          <a:xfrm>
+            <a:off x="5760720" y="3017520"/>
+            <a:ext cx="2926080" cy="914400"/>
           </a:xfrm>
           <a:prstGeom prst="rect">
             <a:avLst/>
@@ -7693,14 +8327,14 @@
       </p:sp>
       <p:sp>
         <p:nvSpPr>
-          <p:cNvPr id="7" name="TextBox 6"/>
-          <p:cNvSpPr txBox="1"/>
-          <p:nvPr/>
-        </p:nvSpPr>
-        <p:spPr>
-          <a:xfrm>
-            <a:off x="5486400" y="4572000"/>
-            <a:ext cx="3200400" cy="914400"/>
+          <p:cNvPr id="9" name="TextBox 8"/>
+          <p:cNvSpPr txBox="1"/>
+          <p:nvPr/>
+        </p:nvSpPr>
+        <p:spPr>
+          <a:xfrm>
+            <a:off x="5760720" y="4114800"/>
+            <a:ext cx="2926080" cy="914400"/>
           </a:xfrm>
           <a:prstGeom prst="rect">
             <a:avLst/>
@@ -7722,7 +8356,7 @@
               </a:defRPr>
             </a:pPr>
             <a:r>
-              <a:t>average cost of</a:t>
+              <a:t>avg cost of</a:t>
             </a:r>
             <a:br/>
             <a:r>
@@ -7733,14 +8367,57 @@
       </p:sp>
       <p:sp>
         <p:nvSpPr>
-          <p:cNvPr id="8" name="TextBox 7"/>
-          <p:cNvSpPr txBox="1"/>
-          <p:nvPr/>
-        </p:nvSpPr>
-        <p:spPr>
-          <a:xfrm>
-            <a:off x="9601200" y="3200400"/>
-            <a:ext cx="3200400" cy="914400"/>
+          <p:cNvPr id="10" name="Rounded Rectangle 9"/>
+          <p:cNvSpPr/>
+          <p:nvPr/>
+        </p:nvSpPr>
+        <p:spPr>
+          <a:xfrm>
+            <a:off x="9601200" y="2743200"/>
+            <a:ext cx="3474720" cy="2743200"/>
+          </a:xfrm>
+          <a:prstGeom prst="roundRect">
+            <a:avLst>
+              <a:gd name="adj" fmla="val 5000"/>
+            </a:avLst>
+          </a:prstGeom>
+          <a:solidFill>
+            <a:srgbClr val="1E2A38"/>
+          </a:solidFill>
+          <a:ln/>
+        </p:spPr>
+        <p:style>
+          <a:lnRef idx="1">
+            <a:schemeClr val="accent1"/>
+          </a:lnRef>
+          <a:fillRef idx="3">
+            <a:schemeClr val="accent1"/>
+          </a:fillRef>
+          <a:effectRef idx="2">
+            <a:schemeClr val="accent1"/>
+          </a:effectRef>
+          <a:fontRef idx="minor">
+            <a:schemeClr val="lt1"/>
+          </a:fontRef>
+        </p:style>
+        <p:txBody>
+          <a:bodyPr rtlCol="0" anchor="ctr"/>
+          <a:lstStyle/>
+          <a:p>
+            <a:pPr algn="ctr"/>
+          </a:p>
+        </p:txBody>
+      </p:sp>
+      <p:sp>
+        <p:nvSpPr>
+          <p:cNvPr id="11" name="TextBox 10"/>
+          <p:cNvSpPr txBox="1"/>
+          <p:nvPr/>
+        </p:nvSpPr>
+        <p:spPr>
+          <a:xfrm>
+            <a:off x="9875520" y="3017520"/>
+            <a:ext cx="2926080" cy="914400"/>
           </a:xfrm>
           <a:prstGeom prst="rect">
             <a:avLst/>
@@ -7769,14 +8446,14 @@
       </p:sp>
       <p:sp>
         <p:nvSpPr>
-          <p:cNvPr id="9" name="TextBox 8"/>
-          <p:cNvSpPr txBox="1"/>
-          <p:nvPr/>
-        </p:nvSpPr>
-        <p:spPr>
-          <a:xfrm>
-            <a:off x="9601200" y="4572000"/>
-            <a:ext cx="3200400" cy="914400"/>
+          <p:cNvPr id="12" name="TextBox 11"/>
+          <p:cNvSpPr txBox="1"/>
+          <p:nvPr/>
+        </p:nvSpPr>
+        <p:spPr>
+          <a:xfrm>
+            <a:off x="9875520" y="4114800"/>
+            <a:ext cx="2926080" cy="914400"/>
           </a:xfrm>
           <a:prstGeom prst="rect">
             <a:avLst/>
@@ -7809,7 +8486,7 @@
       </p:sp>
       <p:sp>
         <p:nvSpPr>
-          <p:cNvPr id="10" name="TextBox 9"/>
+          <p:cNvPr id="13" name="TextBox 12"/>
           <p:cNvSpPr txBox="1"/>
           <p:nvPr/>
         </p:nvSpPr>
@@ -7877,7 +8554,198 @@
         </p:nvSpPr>
         <p:spPr>
           <a:xfrm>
-            <a:off x="1097280" y="731520"/>
+            <a:off x="1097280" y="548640"/>
+            <a:ext cx="3657600" cy="274320"/>
+          </a:xfrm>
+          <a:prstGeom prst="rect">
+            <a:avLst/>
+          </a:prstGeom>
+          <a:noFill/>
+        </p:spPr>
+        <p:txBody>
+          <a:bodyPr wrap="square">
+            <a:spAutoFit/>
+          </a:bodyPr>
+          <a:lstStyle/>
+          <a:p>
+            <a:pPr algn="l">
+              <a:defRPr sz="1100" b="0">
+                <a:solidFill>
+                  <a:srgbClr val="2E8B8B"/>
+                </a:solidFill>
+                <a:latin typeface="Courier New"/>
+              </a:defRPr>
+            </a:pPr>
+            <a:r>
+              <a:t>THE INSIGHT</a:t>
+            </a:r>
+          </a:p>
+        </p:txBody>
+      </p:sp>
+      <p:sp>
+        <p:nvSpPr>
+          <p:cNvPr id="3" name="TextBox 2"/>
+          <p:cNvSpPr txBox="1"/>
+          <p:nvPr/>
+        </p:nvSpPr>
+        <p:spPr>
+          <a:xfrm>
+            <a:off x="1097280" y="914400"/>
+            <a:ext cx="11887200" cy="914400"/>
+          </a:xfrm>
+          <a:prstGeom prst="rect">
+            <a:avLst/>
+          </a:prstGeom>
+          <a:noFill/>
+        </p:spPr>
+        <p:txBody>
+          <a:bodyPr wrap="square">
+            <a:spAutoFit/>
+          </a:bodyPr>
+          <a:lstStyle/>
+          <a:p>
+            <a:pPr algn="l">
+              <a:defRPr sz="3600" b="1">
+                <a:solidFill>
+                  <a:srgbClr val="E8E8E8"/>
+                </a:solidFill>
+                <a:latin typeface="Calibri"/>
+              </a:defRPr>
+            </a:pPr>
+            <a:r>
+              <a:t>AI copilots help developers write code.</a:t>
+            </a:r>
+            <a:br/>
+            <a:r>
+              <a:t>We replaced the org chart.</a:t>
+            </a:r>
+          </a:p>
+        </p:txBody>
+      </p:sp>
+      <p:sp>
+        <p:nvSpPr>
+          <p:cNvPr id="4" name="TextBox 3"/>
+          <p:cNvSpPr txBox="1"/>
+          <p:nvPr/>
+        </p:nvSpPr>
+        <p:spPr>
+          <a:xfrm>
+            <a:off x="1371600" y="2560320"/>
+            <a:ext cx="11887200" cy="365760"/>
+          </a:xfrm>
+          <a:prstGeom prst="rect">
+            <a:avLst/>
+          </a:prstGeom>
+          <a:noFill/>
+        </p:spPr>
+        <p:txBody>
+          <a:bodyPr wrap="square">
+            <a:spAutoFit/>
+          </a:bodyPr>
+          <a:lstStyle/>
+          <a:p>
+            <a:pPr algn="l">
+              <a:defRPr sz="1800" b="0">
+                <a:solidFill>
+                  <a:srgbClr val="8A9BB0"/>
+                </a:solidFill>
+                <a:latin typeface="Calibri"/>
+              </a:defRPr>
+            </a:pPr>
+            <a:r>
+              <a:t>This is not a better AI tool. It's a new category.</a:t>
+            </a:r>
+          </a:p>
+        </p:txBody>
+      </p:sp>
+      <p:sp>
+        <p:nvSpPr>
+          <p:cNvPr id="5" name="Rounded Rectangle 4"/>
+          <p:cNvSpPr/>
+          <p:nvPr/>
+        </p:nvSpPr>
+        <p:spPr>
+          <a:xfrm>
+            <a:off x="1371600" y="3474720"/>
+            <a:ext cx="11887200" cy="731520"/>
+          </a:xfrm>
+          <a:prstGeom prst="roundRect">
+            <a:avLst>
+              <a:gd name="adj" fmla="val 5000"/>
+            </a:avLst>
+          </a:prstGeom>
+          <a:solidFill>
+            <a:srgbClr val="1E2A38"/>
+          </a:solidFill>
+          <a:ln/>
+        </p:spPr>
+        <p:style>
+          <a:lnRef idx="1">
+            <a:schemeClr val="accent1"/>
+          </a:lnRef>
+          <a:fillRef idx="3">
+            <a:schemeClr val="accent1"/>
+          </a:fillRef>
+          <a:effectRef idx="2">
+            <a:schemeClr val="accent1"/>
+          </a:effectRef>
+          <a:fontRef idx="minor">
+            <a:schemeClr val="lt1"/>
+          </a:fontRef>
+        </p:style>
+        <p:txBody>
+          <a:bodyPr rtlCol="0" anchor="ctr"/>
+          <a:lstStyle/>
+          <a:p>
+            <a:pPr algn="ctr"/>
+          </a:p>
+        </p:txBody>
+      </p:sp>
+      <p:sp>
+        <p:nvSpPr>
+          <p:cNvPr id="6" name="TextBox 5"/>
+          <p:cNvSpPr txBox="1"/>
+          <p:nvPr/>
+        </p:nvSpPr>
+        <p:spPr>
+          <a:xfrm>
+            <a:off x="1645920" y="3611879"/>
+            <a:ext cx="2286000" cy="365760"/>
+          </a:xfrm>
+          <a:prstGeom prst="rect">
+            <a:avLst/>
+          </a:prstGeom>
+          <a:noFill/>
+        </p:spPr>
+        <p:txBody>
+          <a:bodyPr wrap="square">
+            <a:spAutoFit/>
+          </a:bodyPr>
+          <a:lstStyle/>
+          <a:p>
+            <a:pPr algn="l">
+              <a:defRPr sz="1600" b="0">
+                <a:solidFill>
+                  <a:srgbClr val="E8E8E8"/>
+                </a:solidFill>
+                <a:latin typeface="Courier New"/>
+              </a:defRPr>
+            </a:pPr>
+            <a:r>
+              <a:t>Copilot</a:t>
+            </a:r>
+          </a:p>
+        </p:txBody>
+      </p:sp>
+      <p:sp>
+        <p:nvSpPr>
+          <p:cNvPr id="7" name="TextBox 6"/>
+          <p:cNvSpPr txBox="1"/>
+          <p:nvPr/>
+        </p:nvSpPr>
+        <p:spPr>
+          <a:xfrm>
+            <a:off x="4114800" y="3611879"/>
             <a:ext cx="3657600" cy="365760"/>
           </a:xfrm>
           <a:prstGeom prst="rect">
@@ -7892,43 +8760,43 @@
           <a:lstStyle/>
           <a:p>
             <a:pPr algn="l">
-              <a:defRPr sz="1100" b="0">
-                <a:solidFill>
-                  <a:srgbClr val="2E8B8B"/>
-                </a:solidFill>
-                <a:latin typeface="Courier New"/>
-              </a:defRPr>
-            </a:pPr>
-            <a:r>
-              <a:t>THE INSIGHT</a:t>
-            </a:r>
-          </a:p>
-        </p:txBody>
-      </p:sp>
-      <p:sp>
-        <p:nvSpPr>
-          <p:cNvPr id="3" name="TextBox 2"/>
-          <p:cNvSpPr txBox="1"/>
-          <p:nvPr/>
-        </p:nvSpPr>
-        <p:spPr>
-          <a:xfrm>
-            <a:off x="1097280" y="1188720"/>
-            <a:ext cx="11887200" cy="914400"/>
-          </a:xfrm>
-          <a:prstGeom prst="rect">
-            <a:avLst/>
-          </a:prstGeom>
-          <a:noFill/>
-        </p:spPr>
-        <p:txBody>
-          <a:bodyPr wrap="square">
-            <a:spAutoFit/>
-          </a:bodyPr>
-          <a:lstStyle/>
-          <a:p>
-            <a:pPr algn="l">
-              <a:defRPr sz="3800" b="1">
+              <a:defRPr sz="1400" b="0">
+                <a:solidFill>
+                  <a:srgbClr val="8A9BB0"/>
+                </a:solidFill>
+                <a:latin typeface="Calibri"/>
+              </a:defRPr>
+            </a:pPr>
+            <a:r>
+              <a:t>"Write this function"</a:t>
+            </a:r>
+          </a:p>
+        </p:txBody>
+      </p:sp>
+      <p:sp>
+        <p:nvSpPr>
+          <p:cNvPr id="8" name="TextBox 7"/>
+          <p:cNvSpPr txBox="1"/>
+          <p:nvPr/>
+        </p:nvSpPr>
+        <p:spPr>
+          <a:xfrm>
+            <a:off x="8229600" y="3611879"/>
+            <a:ext cx="4572000" cy="365760"/>
+          </a:xfrm>
+          <a:prstGeom prst="rect">
+            <a:avLst/>
+          </a:prstGeom>
+          <a:noFill/>
+        </p:spPr>
+        <p:txBody>
+          <a:bodyPr wrap="square">
+            <a:spAutoFit/>
+          </a:bodyPr>
+          <a:lstStyle/>
+          <a:p>
+            <a:pPr algn="l">
+              <a:defRPr sz="1400" b="0">
                 <a:solidFill>
                   <a:srgbClr val="E8E8E8"/>
                 </a:solidFill>
@@ -7936,25 +8804,64 @@
               </a:defRPr>
             </a:pPr>
             <a:r>
-              <a:t>AI copilots help developers write code.</a:t>
-            </a:r>
-            <a:br/>
-            <a:r>
-              <a:t>We replaced the org chart.</a:t>
-            </a:r>
-          </a:p>
-        </p:txBody>
-      </p:sp>
-      <p:sp>
-        <p:nvSpPr>
-          <p:cNvPr id="4" name="TextBox 3"/>
-          <p:cNvSpPr txBox="1"/>
-          <p:nvPr/>
-        </p:nvSpPr>
-        <p:spPr>
-          <a:xfrm>
-            <a:off x="1371600" y="2926080"/>
-            <a:ext cx="2286000" cy="457200"/>
+              <a:t>Autocomplete</a:t>
+            </a:r>
+          </a:p>
+        </p:txBody>
+      </p:sp>
+      <p:sp>
+        <p:nvSpPr>
+          <p:cNvPr id="9" name="Rounded Rectangle 8"/>
+          <p:cNvSpPr/>
+          <p:nvPr/>
+        </p:nvSpPr>
+        <p:spPr>
+          <a:xfrm>
+            <a:off x="1371600" y="4389120"/>
+            <a:ext cx="11887200" cy="731520"/>
+          </a:xfrm>
+          <a:prstGeom prst="roundRect">
+            <a:avLst>
+              <a:gd name="adj" fmla="val 5000"/>
+            </a:avLst>
+          </a:prstGeom>
+          <a:solidFill>
+            <a:srgbClr val="1E2A38"/>
+          </a:solidFill>
+          <a:ln/>
+        </p:spPr>
+        <p:style>
+          <a:lnRef idx="1">
+            <a:schemeClr val="accent1"/>
+          </a:lnRef>
+          <a:fillRef idx="3">
+            <a:schemeClr val="accent1"/>
+          </a:fillRef>
+          <a:effectRef idx="2">
+            <a:schemeClr val="accent1"/>
+          </a:effectRef>
+          <a:fontRef idx="minor">
+            <a:schemeClr val="lt1"/>
+          </a:fontRef>
+        </p:style>
+        <p:txBody>
+          <a:bodyPr rtlCol="0" anchor="ctr"/>
+          <a:lstStyle/>
+          <a:p>
+            <a:pPr algn="ctr"/>
+          </a:p>
+        </p:txBody>
+      </p:sp>
+      <p:sp>
+        <p:nvSpPr>
+          <p:cNvPr id="10" name="TextBox 9"/>
+          <p:cNvSpPr txBox="1"/>
+          <p:nvPr/>
+        </p:nvSpPr>
+        <p:spPr>
+          <a:xfrm>
+            <a:off x="1645920" y="4526280"/>
+            <a:ext cx="2286000" cy="365760"/>
           </a:xfrm>
           <a:prstGeom prst="rect">
             <a:avLst/>
@@ -7976,21 +8883,21 @@
               </a:defRPr>
             </a:pPr>
             <a:r>
-              <a:t>Copilot</a:t>
-            </a:r>
-          </a:p>
-        </p:txBody>
-      </p:sp>
-      <p:sp>
-        <p:nvSpPr>
-          <p:cNvPr id="5" name="TextBox 4"/>
-          <p:cNvSpPr txBox="1"/>
-          <p:nvPr/>
-        </p:nvSpPr>
-        <p:spPr>
-          <a:xfrm>
-            <a:off x="4114800" y="2926080"/>
-            <a:ext cx="3657600" cy="457200"/>
+              <a:t>AI Agent</a:t>
+            </a:r>
+          </a:p>
+        </p:txBody>
+      </p:sp>
+      <p:sp>
+        <p:nvSpPr>
+          <p:cNvPr id="11" name="TextBox 10"/>
+          <p:cNvSpPr txBox="1"/>
+          <p:nvPr/>
+        </p:nvSpPr>
+        <p:spPr>
+          <a:xfrm>
+            <a:off x="4114800" y="4526280"/>
+            <a:ext cx="3657600" cy="365760"/>
           </a:xfrm>
           <a:prstGeom prst="rect">
             <a:avLst/>
@@ -8012,21 +8919,21 @@
               </a:defRPr>
             </a:pPr>
             <a:r>
-              <a:t>"Write this function"</a:t>
-            </a:r>
-          </a:p>
-        </p:txBody>
-      </p:sp>
-      <p:sp>
-        <p:nvSpPr>
-          <p:cNvPr id="6" name="TextBox 5"/>
-          <p:cNvSpPr txBox="1"/>
-          <p:nvPr/>
-        </p:nvSpPr>
-        <p:spPr>
-          <a:xfrm>
-            <a:off x="8229600" y="2926080"/>
-            <a:ext cx="3657600" cy="457200"/>
+              <a:t>"Do this task"</a:t>
+            </a:r>
+          </a:p>
+        </p:txBody>
+      </p:sp>
+      <p:sp>
+        <p:nvSpPr>
+          <p:cNvPr id="12" name="TextBox 11"/>
+          <p:cNvSpPr txBox="1"/>
+          <p:nvPr/>
+        </p:nvSpPr>
+        <p:spPr>
+          <a:xfrm>
+            <a:off x="8229600" y="4526280"/>
+            <a:ext cx="4572000" cy="365760"/>
           </a:xfrm>
           <a:prstGeom prst="rect">
             <a:avLst/>
@@ -8048,57 +8955,100 @@
               </a:defRPr>
             </a:pPr>
             <a:r>
-              <a:t>Autocomplete</a:t>
-            </a:r>
-          </a:p>
-        </p:txBody>
-      </p:sp>
-      <p:sp>
-        <p:nvSpPr>
-          <p:cNvPr id="7" name="TextBox 6"/>
-          <p:cNvSpPr txBox="1"/>
-          <p:nvPr/>
-        </p:nvSpPr>
-        <p:spPr>
-          <a:xfrm>
-            <a:off x="1371600" y="3657600"/>
-            <a:ext cx="2286000" cy="457200"/>
-          </a:xfrm>
-          <a:prstGeom prst="rect">
-            <a:avLst/>
-          </a:prstGeom>
-          <a:noFill/>
-        </p:spPr>
-        <p:txBody>
-          <a:bodyPr wrap="square">
-            <a:spAutoFit/>
-          </a:bodyPr>
-          <a:lstStyle/>
-          <a:p>
-            <a:pPr algn="l">
-              <a:defRPr sz="1600" b="0">
-                <a:solidFill>
-                  <a:srgbClr val="E8E8E8"/>
-                </a:solidFill>
-                <a:latin typeface="Courier New"/>
-              </a:defRPr>
-            </a:pPr>
-            <a:r>
-              <a:t>AI Agent</a:t>
-            </a:r>
-          </a:p>
-        </p:txBody>
-      </p:sp>
-      <p:sp>
-        <p:nvSpPr>
-          <p:cNvPr id="8" name="TextBox 7"/>
-          <p:cNvSpPr txBox="1"/>
-          <p:nvPr/>
-        </p:nvSpPr>
-        <p:spPr>
-          <a:xfrm>
-            <a:off x="4114800" y="3657600"/>
-            <a:ext cx="3657600" cy="457200"/>
+              <a:t>Task execution</a:t>
+            </a:r>
+          </a:p>
+        </p:txBody>
+      </p:sp>
+      <p:sp>
+        <p:nvSpPr>
+          <p:cNvPr id="13" name="Rounded Rectangle 12"/>
+          <p:cNvSpPr/>
+          <p:nvPr/>
+        </p:nvSpPr>
+        <p:spPr>
+          <a:xfrm>
+            <a:off x="1371600" y="5303520"/>
+            <a:ext cx="11887200" cy="731520"/>
+          </a:xfrm>
+          <a:prstGeom prst="roundRect">
+            <a:avLst>
+              <a:gd name="adj" fmla="val 5000"/>
+            </a:avLst>
+          </a:prstGeom>
+          <a:solidFill>
+            <a:srgbClr val="1E2A38"/>
+          </a:solidFill>
+          <a:ln/>
+        </p:spPr>
+        <p:style>
+          <a:lnRef idx="1">
+            <a:schemeClr val="accent1"/>
+          </a:lnRef>
+          <a:fillRef idx="3">
+            <a:schemeClr val="accent1"/>
+          </a:fillRef>
+          <a:effectRef idx="2">
+            <a:schemeClr val="accent1"/>
+          </a:effectRef>
+          <a:fontRef idx="minor">
+            <a:schemeClr val="lt1"/>
+          </a:fontRef>
+        </p:style>
+        <p:txBody>
+          <a:bodyPr rtlCol="0" anchor="ctr"/>
+          <a:lstStyle/>
+          <a:p>
+            <a:pPr algn="ctr"/>
+          </a:p>
+        </p:txBody>
+      </p:sp>
+      <p:sp>
+        <p:nvSpPr>
+          <p:cNvPr id="14" name="TextBox 13"/>
+          <p:cNvSpPr txBox="1"/>
+          <p:nvPr/>
+        </p:nvSpPr>
+        <p:spPr>
+          <a:xfrm>
+            <a:off x="1645920" y="5440680"/>
+            <a:ext cx="2286000" cy="365760"/>
+          </a:xfrm>
+          <a:prstGeom prst="rect">
+            <a:avLst/>
+          </a:prstGeom>
+          <a:noFill/>
+        </p:spPr>
+        <p:txBody>
+          <a:bodyPr wrap="square">
+            <a:spAutoFit/>
+          </a:bodyPr>
+          <a:lstStyle/>
+          <a:p>
+            <a:pPr algn="l">
+              <a:defRPr sz="1600" b="1">
+                <a:solidFill>
+                  <a:srgbClr val="D4A84B"/>
+                </a:solidFill>
+                <a:latin typeface="Courier New"/>
+              </a:defRPr>
+            </a:pPr>
+            <a:r>
+              <a:t>AI Eng Org</a:t>
+            </a:r>
+          </a:p>
+        </p:txBody>
+      </p:sp>
+      <p:sp>
+        <p:nvSpPr>
+          <p:cNvPr id="15" name="TextBox 14"/>
+          <p:cNvSpPr txBox="1"/>
+          <p:nvPr/>
+        </p:nvSpPr>
+        <p:spPr>
+          <a:xfrm>
+            <a:off x="4114800" y="5440680"/>
+            <a:ext cx="3657600" cy="365760"/>
           </a:xfrm>
           <a:prstGeom prst="rect">
             <a:avLst/>
@@ -8120,21 +9070,21 @@
               </a:defRPr>
             </a:pPr>
             <a:r>
-              <a:t>"Do this task"</a:t>
-            </a:r>
-          </a:p>
-        </p:txBody>
-      </p:sp>
-      <p:sp>
-        <p:nvSpPr>
-          <p:cNvPr id="9" name="TextBox 8"/>
-          <p:cNvSpPr txBox="1"/>
-          <p:nvPr/>
-        </p:nvSpPr>
-        <p:spPr>
-          <a:xfrm>
-            <a:off x="8229600" y="3657600"/>
-            <a:ext cx="3657600" cy="457200"/>
+              <a:t>"Ship this — correctly"</a:t>
+            </a:r>
+          </a:p>
+        </p:txBody>
+      </p:sp>
+      <p:sp>
+        <p:nvSpPr>
+          <p:cNvPr id="16" name="TextBox 15"/>
+          <p:cNvSpPr txBox="1"/>
+          <p:nvPr/>
+        </p:nvSpPr>
+        <p:spPr>
+          <a:xfrm>
+            <a:off x="8229600" y="5440680"/>
+            <a:ext cx="4572000" cy="365760"/>
           </a:xfrm>
           <a:prstGeom prst="rect">
             <a:avLst/>
@@ -8150,120 +9100,12 @@
             <a:pPr algn="l">
               <a:defRPr sz="1400" b="0">
                 <a:solidFill>
-                  <a:srgbClr val="E8E8E8"/>
+                  <a:srgbClr val="D4A84B"/>
                 </a:solidFill>
                 <a:latin typeface="Calibri"/>
               </a:defRPr>
             </a:pPr>
             <a:r>
-              <a:t>Task execution</a:t>
-            </a:r>
-          </a:p>
-        </p:txBody>
-      </p:sp>
-      <p:sp>
-        <p:nvSpPr>
-          <p:cNvPr id="10" name="TextBox 9"/>
-          <p:cNvSpPr txBox="1"/>
-          <p:nvPr/>
-        </p:nvSpPr>
-        <p:spPr>
-          <a:xfrm>
-            <a:off x="1371600" y="4389120"/>
-            <a:ext cx="2286000" cy="457200"/>
-          </a:xfrm>
-          <a:prstGeom prst="rect">
-            <a:avLst/>
-          </a:prstGeom>
-          <a:noFill/>
-        </p:spPr>
-        <p:txBody>
-          <a:bodyPr wrap="square">
-            <a:spAutoFit/>
-          </a:bodyPr>
-          <a:lstStyle/>
-          <a:p>
-            <a:pPr algn="l">
-              <a:defRPr sz="1600" b="1">
-                <a:solidFill>
-                  <a:srgbClr val="D4A84B"/>
-                </a:solidFill>
-                <a:latin typeface="Courier New"/>
-              </a:defRPr>
-            </a:pPr>
-            <a:r>
-              <a:t>AI Eng Org</a:t>
-            </a:r>
-          </a:p>
-        </p:txBody>
-      </p:sp>
-      <p:sp>
-        <p:nvSpPr>
-          <p:cNvPr id="11" name="TextBox 10"/>
-          <p:cNvSpPr txBox="1"/>
-          <p:nvPr/>
-        </p:nvSpPr>
-        <p:spPr>
-          <a:xfrm>
-            <a:off x="4114800" y="4389120"/>
-            <a:ext cx="3657600" cy="457200"/>
-          </a:xfrm>
-          <a:prstGeom prst="rect">
-            <a:avLst/>
-          </a:prstGeom>
-          <a:noFill/>
-        </p:spPr>
-        <p:txBody>
-          <a:bodyPr wrap="square">
-            <a:spAutoFit/>
-          </a:bodyPr>
-          <a:lstStyle/>
-          <a:p>
-            <a:pPr algn="l">
-              <a:defRPr sz="1400" b="0">
-                <a:solidFill>
-                  <a:srgbClr val="8A9BB0"/>
-                </a:solidFill>
-                <a:latin typeface="Calibri"/>
-              </a:defRPr>
-            </a:pPr>
-            <a:r>
-              <a:t>"Ship this feature — correctly"</a:t>
-            </a:r>
-          </a:p>
-        </p:txBody>
-      </p:sp>
-      <p:sp>
-        <p:nvSpPr>
-          <p:cNvPr id="12" name="TextBox 11"/>
-          <p:cNvSpPr txBox="1"/>
-          <p:nvPr/>
-        </p:nvSpPr>
-        <p:spPr>
-          <a:xfrm>
-            <a:off x="8229600" y="4389120"/>
-            <a:ext cx="3657600" cy="457200"/>
-          </a:xfrm>
-          <a:prstGeom prst="rect">
-            <a:avLst/>
-          </a:prstGeom>
-          <a:noFill/>
-        </p:spPr>
-        <p:txBody>
-          <a:bodyPr wrap="square">
-            <a:spAutoFit/>
-          </a:bodyPr>
-          <a:lstStyle/>
-          <a:p>
-            <a:pPr algn="l">
-              <a:defRPr sz="1400" b="0">
-                <a:solidFill>
-                  <a:srgbClr val="D4A84B"/>
-                </a:solidFill>
-                <a:latin typeface="Calibri"/>
-              </a:defRPr>
-            </a:pPr>
-            <a:r>
               <a:t>Organizational intelligence</a:t>
             </a:r>
           </a:p>
@@ -8271,13 +9113,13 @@
       </p:sp>
       <p:sp>
         <p:nvSpPr>
-          <p:cNvPr id="13" name="TextBox 12"/>
-          <p:cNvSpPr txBox="1"/>
-          <p:nvPr/>
-        </p:nvSpPr>
-        <p:spPr>
-          <a:xfrm>
-            <a:off x="1371600" y="5943600"/>
+          <p:cNvPr id="17" name="TextBox 16"/>
+          <p:cNvSpPr txBox="1"/>
+          <p:nvPr/>
+        </p:nvSpPr>
+        <p:spPr>
+          <a:xfrm>
+            <a:off x="1371600" y="6858000"/>
             <a:ext cx="11887200" cy="457200"/>
           </a:xfrm>
           <a:prstGeom prst="rect">
@@ -8339,8 +9181,8 @@
         </p:nvSpPr>
         <p:spPr>
           <a:xfrm>
-            <a:off x="1097280" y="731520"/>
-            <a:ext cx="3657600" cy="365760"/>
+            <a:off x="1097280" y="548640"/>
+            <a:ext cx="3657600" cy="274320"/>
           </a:xfrm>
           <a:prstGeom prst="rect">
             <a:avLst/>
@@ -8375,22 +9217,22 @@
         </p:nvSpPr>
         <p:spPr>
           <a:xfrm>
-            <a:off x="1097280" y="1188720"/>
-            <a:ext cx="11887200" cy="914400"/>
-          </a:xfrm>
-          <a:prstGeom prst="rect">
-            <a:avLst/>
-          </a:prstGeom>
-          <a:noFill/>
-        </p:spPr>
-        <p:txBody>
-          <a:bodyPr wrap="square">
-            <a:spAutoFit/>
-          </a:bodyPr>
-          <a:lstStyle/>
-          <a:p>
-            <a:pPr algn="l">
-              <a:defRPr sz="4000" b="1">
+            <a:off x="1097280" y="914400"/>
+            <a:ext cx="11887200" cy="731520"/>
+          </a:xfrm>
+          <a:prstGeom prst="rect">
+            <a:avLst/>
+          </a:prstGeom>
+          <a:noFill/>
+        </p:spPr>
+        <p:txBody>
+          <a:bodyPr wrap="square">
+            <a:spAutoFit/>
+          </a:bodyPr>
+          <a:lstStyle/>
+          <a:p>
+            <a:pPr algn="l">
+              <a:defRPr sz="3800" b="1">
                 <a:solidFill>
                   <a:srgbClr val="E8E8E8"/>
                 </a:solidFill>
@@ -8411,22 +9253,22 @@
         </p:nvSpPr>
         <p:spPr>
           <a:xfrm>
-            <a:off x="1097280" y="2103120"/>
-            <a:ext cx="11887200" cy="457200"/>
-          </a:xfrm>
-          <a:prstGeom prst="rect">
-            <a:avLst/>
-          </a:prstGeom>
-          <a:noFill/>
-        </p:spPr>
-        <p:txBody>
-          <a:bodyPr wrap="square">
-            <a:spAutoFit/>
-          </a:bodyPr>
-          <a:lstStyle/>
-          <a:p>
-            <a:pPr algn="l">
-              <a:defRPr sz="1800" b="0">
+            <a:off x="1097280" y="1828800"/>
+            <a:ext cx="11887200" cy="365760"/>
+          </a:xfrm>
+          <a:prstGeom prst="rect">
+            <a:avLst/>
+          </a:prstGeom>
+          <a:noFill/>
+        </p:spPr>
+        <p:txBody>
+          <a:bodyPr wrap="square">
+            <a:spAutoFit/>
+          </a:bodyPr>
+          <a:lstStyle/>
+          <a:p>
+            <a:pPr algn="l">
+              <a:defRPr sz="1600" b="0">
                 <a:solidFill>
                   <a:srgbClr val="8A9BB0"/>
                 </a:solidFill>
@@ -8441,28 +9283,71 @@
       </p:sp>
       <p:sp>
         <p:nvSpPr>
-          <p:cNvPr id="5" name="TextBox 4"/>
-          <p:cNvSpPr txBox="1"/>
-          <p:nvPr/>
-        </p:nvSpPr>
-        <p:spPr>
-          <a:xfrm>
-            <a:off x="1371600" y="3200400"/>
-            <a:ext cx="11887200" cy="2743200"/>
-          </a:xfrm>
-          <a:prstGeom prst="rect">
-            <a:avLst/>
-          </a:prstGeom>
-          <a:noFill/>
-        </p:spPr>
-        <p:txBody>
-          <a:bodyPr wrap="square">
-            <a:spAutoFit/>
-          </a:bodyPr>
-          <a:lstStyle/>
-          <a:p>
-            <a:pPr algn="l">
-              <a:defRPr sz="1400" b="0">
+          <p:cNvPr id="5" name="Rounded Rectangle 4"/>
+          <p:cNvSpPr/>
+          <p:nvPr/>
+        </p:nvSpPr>
+        <p:spPr>
+          <a:xfrm>
+            <a:off x="1097280" y="2743200"/>
+            <a:ext cx="12344400" cy="2926080"/>
+          </a:xfrm>
+          <a:prstGeom prst="roundRect">
+            <a:avLst>
+              <a:gd name="adj" fmla="val 5000"/>
+            </a:avLst>
+          </a:prstGeom>
+          <a:solidFill>
+            <a:srgbClr val="1E2A38"/>
+          </a:solidFill>
+          <a:ln/>
+        </p:spPr>
+        <p:style>
+          <a:lnRef idx="1">
+            <a:schemeClr val="accent1"/>
+          </a:lnRef>
+          <a:fillRef idx="3">
+            <a:schemeClr val="accent1"/>
+          </a:fillRef>
+          <a:effectRef idx="2">
+            <a:schemeClr val="accent1"/>
+          </a:effectRef>
+          <a:fontRef idx="minor">
+            <a:schemeClr val="lt1"/>
+          </a:fontRef>
+        </p:style>
+        <p:txBody>
+          <a:bodyPr rtlCol="0" anchor="ctr"/>
+          <a:lstStyle/>
+          <a:p>
+            <a:pPr algn="ctr"/>
+          </a:p>
+        </p:txBody>
+      </p:sp>
+      <p:sp>
+        <p:nvSpPr>
+          <p:cNvPr id="6" name="TextBox 5"/>
+          <p:cNvSpPr txBox="1"/>
+          <p:nvPr/>
+        </p:nvSpPr>
+        <p:spPr>
+          <a:xfrm>
+            <a:off x="1371600" y="2926080"/>
+            <a:ext cx="11887200" cy="2560320"/>
+          </a:xfrm>
+          <a:prstGeom prst="rect">
+            <a:avLst/>
+          </a:prstGeom>
+          <a:noFill/>
+        </p:spPr>
+        <p:txBody>
+          <a:bodyPr wrap="square">
+            <a:spAutoFit/>
+          </a:bodyPr>
+          <a:lstStyle/>
+          <a:p>
+            <a:pPr algn="l">
+              <a:defRPr sz="1300" b="0">
                 <a:solidFill>
                   <a:srgbClr val="8A9BB0"/>
                 </a:solidFill>
@@ -8501,7 +9386,7 @@
       </p:sp>
       <p:sp>
         <p:nvSpPr>
-          <p:cNvPr id="6" name="TextBox 5"/>
+          <p:cNvPr id="7" name="TextBox 6"/>
           <p:cNvSpPr txBox="1"/>
           <p:nvPr/>
         </p:nvSpPr>
@@ -8522,7 +9407,7 @@
           <a:lstStyle/>
           <a:p>
             <a:pPr algn="l">
-              <a:defRPr sz="2200" b="1">
+              <a:defRPr sz="2400" b="1">
                 <a:solidFill>
                   <a:srgbClr val="D4A84B"/>
                 </a:solidFill>
@@ -8537,7 +9422,7 @@
       </p:sp>
       <p:sp>
         <p:nvSpPr>
-          <p:cNvPr id="7" name="TextBox 6"/>
+          <p:cNvPr id="8" name="TextBox 7"/>
           <p:cNvSpPr txBox="1"/>
           <p:nvPr/>
         </p:nvSpPr>
@@ -8573,7 +9458,7 @@
       </p:sp>
       <p:sp>
         <p:nvSpPr>
-          <p:cNvPr id="8" name="TextBox 7"/>
+          <p:cNvPr id="9" name="TextBox 8"/>
           <p:cNvSpPr txBox="1"/>
           <p:nvPr/>
         </p:nvSpPr>
@@ -8594,7 +9479,7 @@
           <a:lstStyle/>
           <a:p>
             <a:pPr algn="l">
-              <a:defRPr sz="2200" b="1">
+              <a:defRPr sz="2400" b="1">
                 <a:solidFill>
                   <a:srgbClr val="D4A84B"/>
                 </a:solidFill>
@@ -8609,7 +9494,7 @@
       </p:sp>
       <p:sp>
         <p:nvSpPr>
-          <p:cNvPr id="9" name="TextBox 8"/>
+          <p:cNvPr id="10" name="TextBox 9"/>
           <p:cNvSpPr txBox="1"/>
           <p:nvPr/>
         </p:nvSpPr>
@@ -8645,7 +9530,7 @@
       </p:sp>
       <p:sp>
         <p:nvSpPr>
-          <p:cNvPr id="10" name="TextBox 9"/>
+          <p:cNvPr id="11" name="TextBox 10"/>
           <p:cNvSpPr txBox="1"/>
           <p:nvPr/>
         </p:nvSpPr>
@@ -8666,7 +9551,7 @@
           <a:lstStyle/>
           <a:p>
             <a:pPr algn="l">
-              <a:defRPr sz="2200" b="1">
+              <a:defRPr sz="2400" b="1">
                 <a:solidFill>
                   <a:srgbClr val="D4A84B"/>
                 </a:solidFill>
@@ -8681,7 +9566,7 @@
       </p:sp>
       <p:sp>
         <p:nvSpPr>
-          <p:cNvPr id="11" name="TextBox 10"/>
+          <p:cNvPr id="12" name="TextBox 11"/>
           <p:cNvSpPr txBox="1"/>
           <p:nvPr/>
         </p:nvSpPr>
@@ -8717,7 +9602,7 @@
       </p:sp>
       <p:sp>
         <p:nvSpPr>
-          <p:cNvPr id="12" name="TextBox 11"/>
+          <p:cNvPr id="13" name="TextBox 12"/>
           <p:cNvSpPr txBox="1"/>
           <p:nvPr/>
         </p:nvSpPr>
@@ -8738,7 +9623,7 @@
           <a:lstStyle/>
           <a:p>
             <a:pPr algn="l">
-              <a:defRPr sz="2200" b="1">
+              <a:defRPr sz="2400" b="1">
                 <a:solidFill>
                   <a:srgbClr val="D4A84B"/>
                 </a:solidFill>
@@ -8753,7 +9638,7 @@
       </p:sp>
       <p:sp>
         <p:nvSpPr>
-          <p:cNvPr id="13" name="TextBox 12"/>
+          <p:cNvPr id="14" name="TextBox 13"/>
           <p:cNvSpPr txBox="1"/>
           <p:nvPr/>
         </p:nvSpPr>
@@ -8821,8 +9706,8 @@
         </p:nvSpPr>
         <p:spPr>
           <a:xfrm>
-            <a:off x="1097280" y="731520"/>
-            <a:ext cx="3657600" cy="365760"/>
+            <a:off x="1097280" y="548640"/>
+            <a:ext cx="3657600" cy="274320"/>
           </a:xfrm>
           <a:prstGeom prst="rect">
             <a:avLst/>
@@ -8857,22 +9742,22 @@
         </p:nvSpPr>
         <p:spPr>
           <a:xfrm>
-            <a:off x="1097280" y="1188720"/>
-            <a:ext cx="11887200" cy="914400"/>
-          </a:xfrm>
-          <a:prstGeom prst="rect">
-            <a:avLst/>
-          </a:prstGeom>
-          <a:noFill/>
-        </p:spPr>
-        <p:txBody>
-          <a:bodyPr wrap="square">
-            <a:spAutoFit/>
-          </a:bodyPr>
-          <a:lstStyle/>
-          <a:p>
-            <a:pPr algn="l">
-              <a:defRPr sz="4000" b="1">
+            <a:off x="1097280" y="914400"/>
+            <a:ext cx="11887200" cy="731520"/>
+          </a:xfrm>
+          <a:prstGeom prst="rect">
+            <a:avLst/>
+          </a:prstGeom>
+          <a:noFill/>
+        </p:spPr>
+        <p:txBody>
+          <a:bodyPr wrap="square">
+            <a:spAutoFit/>
+          </a:bodyPr>
+          <a:lstStyle/>
+          <a:p>
+            <a:pPr algn="l">
+              <a:defRPr sz="3800" b="1">
                 <a:solidFill>
                   <a:srgbClr val="E8E8E8"/>
                 </a:solidFill>
@@ -8893,8 +9778,8 @@
         </p:nvSpPr>
         <p:spPr>
           <a:xfrm>
-            <a:off x="1371600" y="2743200"/>
-            <a:ext cx="5486400" cy="365760"/>
+            <a:off x="1371600" y="2560320"/>
+            <a:ext cx="5486400" cy="274320"/>
           </a:xfrm>
           <a:prstGeom prst="rect">
             <a:avLst/>
@@ -8923,13 +9808,99 @@
       </p:sp>
       <p:sp>
         <p:nvSpPr>
-          <p:cNvPr id="5" name="TextBox 4"/>
-          <p:cNvSpPr txBox="1"/>
-          <p:nvPr/>
-        </p:nvSpPr>
-        <p:spPr>
-          <a:xfrm>
-            <a:off x="9144000" y="2743200"/>
+          <p:cNvPr id="5" name="Rounded Rectangle 4"/>
+          <p:cNvSpPr/>
+          <p:nvPr/>
+        </p:nvSpPr>
+        <p:spPr>
+          <a:xfrm>
+            <a:off x="1371600" y="2926080"/>
+            <a:ext cx="9144000" cy="320040"/>
+          </a:xfrm>
+          <a:prstGeom prst="roundRect">
+            <a:avLst>
+              <a:gd name="adj" fmla="val 50000"/>
+            </a:avLst>
+          </a:prstGeom>
+          <a:solidFill>
+            <a:srgbClr val="1E2A38"/>
+          </a:solidFill>
+          <a:ln/>
+        </p:spPr>
+        <p:style>
+          <a:lnRef idx="1">
+            <a:schemeClr val="accent1"/>
+          </a:lnRef>
+          <a:fillRef idx="3">
+            <a:schemeClr val="accent1"/>
+          </a:fillRef>
+          <a:effectRef idx="2">
+            <a:schemeClr val="accent1"/>
+          </a:effectRef>
+          <a:fontRef idx="minor">
+            <a:schemeClr val="lt1"/>
+          </a:fontRef>
+        </p:style>
+        <p:txBody>
+          <a:bodyPr rtlCol="0" anchor="ctr"/>
+          <a:lstStyle/>
+          <a:p>
+            <a:pPr algn="ctr"/>
+          </a:p>
+        </p:txBody>
+      </p:sp>
+      <p:sp>
+        <p:nvSpPr>
+          <p:cNvPr id="6" name="Rounded Rectangle 5"/>
+          <p:cNvSpPr/>
+          <p:nvPr/>
+        </p:nvSpPr>
+        <p:spPr>
+          <a:xfrm>
+            <a:off x="1371600" y="2926080"/>
+            <a:ext cx="8750808" cy="320040"/>
+          </a:xfrm>
+          <a:prstGeom prst="roundRect">
+            <a:avLst>
+              <a:gd name="adj" fmla="val 50000"/>
+            </a:avLst>
+          </a:prstGeom>
+          <a:solidFill>
+            <a:srgbClr val="8A9BB0"/>
+          </a:solidFill>
+          <a:ln/>
+        </p:spPr>
+        <p:style>
+          <a:lnRef idx="1">
+            <a:schemeClr val="accent1"/>
+          </a:lnRef>
+          <a:fillRef idx="3">
+            <a:schemeClr val="accent1"/>
+          </a:fillRef>
+          <a:effectRef idx="2">
+            <a:schemeClr val="accent1"/>
+          </a:effectRef>
+          <a:fontRef idx="minor">
+            <a:schemeClr val="lt1"/>
+          </a:fontRef>
+        </p:style>
+        <p:txBody>
+          <a:bodyPr rtlCol="0" anchor="ctr"/>
+          <a:lstStyle/>
+          <a:p>
+            <a:pPr algn="ctr"/>
+          </a:p>
+        </p:txBody>
+      </p:sp>
+      <p:sp>
+        <p:nvSpPr>
+          <p:cNvPr id="7" name="TextBox 6"/>
+          <p:cNvSpPr txBox="1"/>
+          <p:nvPr/>
+        </p:nvSpPr>
+        <p:spPr>
+          <a:xfrm>
+            <a:off x="10972800" y="2880360"/>
             <a:ext cx="1828800" cy="365760"/>
           </a:xfrm>
           <a:prstGeom prst="rect">
@@ -8944,7 +9915,7 @@
           <a:lstStyle/>
           <a:p>
             <a:pPr algn="l">
-              <a:defRPr sz="2000" b="1">
+              <a:defRPr sz="1800" b="1">
                 <a:solidFill>
                   <a:srgbClr val="8A9BB0"/>
                 </a:solidFill>
@@ -8959,14 +9930,14 @@
       </p:sp>
       <p:sp>
         <p:nvSpPr>
-          <p:cNvPr id="6" name="TextBox 5"/>
-          <p:cNvSpPr txBox="1"/>
-          <p:nvPr/>
-        </p:nvSpPr>
-        <p:spPr>
-          <a:xfrm>
-            <a:off x="1371600" y="3474720"/>
-            <a:ext cx="5486400" cy="365760"/>
+          <p:cNvPr id="8" name="TextBox 7"/>
+          <p:cNvSpPr txBox="1"/>
+          <p:nvPr/>
+        </p:nvSpPr>
+        <p:spPr>
+          <a:xfrm>
+            <a:off x="1371600" y="3657600"/>
+            <a:ext cx="5486400" cy="274320"/>
           </a:xfrm>
           <a:prstGeom prst="rect">
             <a:avLst/>
@@ -8995,13 +9966,99 @@
       </p:sp>
       <p:sp>
         <p:nvSpPr>
-          <p:cNvPr id="7" name="TextBox 6"/>
-          <p:cNvSpPr txBox="1"/>
-          <p:nvPr/>
-        </p:nvSpPr>
-        <p:spPr>
-          <a:xfrm>
-            <a:off x="9144000" y="3474720"/>
+          <p:cNvPr id="9" name="Rounded Rectangle 8"/>
+          <p:cNvSpPr/>
+          <p:nvPr/>
+        </p:nvSpPr>
+        <p:spPr>
+          <a:xfrm>
+            <a:off x="1371600" y="4023360"/>
+            <a:ext cx="9144000" cy="320040"/>
+          </a:xfrm>
+          <a:prstGeom prst="roundRect">
+            <a:avLst>
+              <a:gd name="adj" fmla="val 50000"/>
+            </a:avLst>
+          </a:prstGeom>
+          <a:solidFill>
+            <a:srgbClr val="1E2A38"/>
+          </a:solidFill>
+          <a:ln/>
+        </p:spPr>
+        <p:style>
+          <a:lnRef idx="1">
+            <a:schemeClr val="accent1"/>
+          </a:lnRef>
+          <a:fillRef idx="3">
+            <a:schemeClr val="accent1"/>
+          </a:fillRef>
+          <a:effectRef idx="2">
+            <a:schemeClr val="accent1"/>
+          </a:effectRef>
+          <a:fontRef idx="minor">
+            <a:schemeClr val="lt1"/>
+          </a:fontRef>
+        </p:style>
+        <p:txBody>
+          <a:bodyPr rtlCol="0" anchor="ctr"/>
+          <a:lstStyle/>
+          <a:p>
+            <a:pPr algn="ctr"/>
+          </a:p>
+        </p:txBody>
+      </p:sp>
+      <p:sp>
+        <p:nvSpPr>
+          <p:cNvPr id="10" name="Rounded Rectangle 9"/>
+          <p:cNvSpPr/>
+          <p:nvPr/>
+        </p:nvSpPr>
+        <p:spPr>
+          <a:xfrm>
+            <a:off x="1371600" y="4023360"/>
+            <a:ext cx="9144000" cy="320040"/>
+          </a:xfrm>
+          <a:prstGeom prst="roundRect">
+            <a:avLst>
+              <a:gd name="adj" fmla="val 50000"/>
+            </a:avLst>
+          </a:prstGeom>
+          <a:solidFill>
+            <a:srgbClr val="D4A84B"/>
+          </a:solidFill>
+          <a:ln/>
+        </p:spPr>
+        <p:style>
+          <a:lnRef idx="1">
+            <a:schemeClr val="accent1"/>
+          </a:lnRef>
+          <a:fillRef idx="3">
+            <a:schemeClr val="accent1"/>
+          </a:fillRef>
+          <a:effectRef idx="2">
+            <a:schemeClr val="accent1"/>
+          </a:effectRef>
+          <a:fontRef idx="minor">
+            <a:schemeClr val="lt1"/>
+          </a:fontRef>
+        </p:style>
+        <p:txBody>
+          <a:bodyPr rtlCol="0" anchor="ctr"/>
+          <a:lstStyle/>
+          <a:p>
+            <a:pPr algn="ctr"/>
+          </a:p>
+        </p:txBody>
+      </p:sp>
+      <p:sp>
+        <p:nvSpPr>
+          <p:cNvPr id="11" name="TextBox 10"/>
+          <p:cNvSpPr txBox="1"/>
+          <p:nvPr/>
+        </p:nvSpPr>
+        <p:spPr>
+          <a:xfrm>
+            <a:off x="10972800" y="3977639"/>
             <a:ext cx="1828800" cy="365760"/>
           </a:xfrm>
           <a:prstGeom prst="rect">
@@ -9016,7 +10073,7 @@
           <a:lstStyle/>
           <a:p>
             <a:pPr algn="l">
-              <a:defRPr sz="2000" b="1">
+              <a:defRPr sz="1800" b="1">
                 <a:solidFill>
                   <a:srgbClr val="D4A84B"/>
                 </a:solidFill>
@@ -9031,14 +10088,14 @@
       </p:sp>
       <p:sp>
         <p:nvSpPr>
-          <p:cNvPr id="8" name="TextBox 7"/>
-          <p:cNvSpPr txBox="1"/>
-          <p:nvPr/>
-        </p:nvSpPr>
-        <p:spPr>
-          <a:xfrm>
-            <a:off x="1371600" y="4389120"/>
-            <a:ext cx="9144000" cy="365760"/>
+          <p:cNvPr id="12" name="TextBox 11"/>
+          <p:cNvSpPr txBox="1"/>
+          <p:nvPr/>
+        </p:nvSpPr>
+        <p:spPr>
+          <a:xfrm>
+            <a:off x="1371600" y="4663440"/>
+            <a:ext cx="9144000" cy="274320"/>
           </a:xfrm>
           <a:prstGeom prst="rect">
             <a:avLst/>
@@ -9067,28 +10124,71 @@
       </p:sp>
       <p:sp>
         <p:nvSpPr>
-          <p:cNvPr id="9" name="TextBox 8"/>
-          <p:cNvSpPr txBox="1"/>
+          <p:cNvPr id="13" name="Rounded Rectangle 12"/>
+          <p:cNvSpPr/>
           <p:nvPr/>
         </p:nvSpPr>
         <p:spPr>
           <a:xfrm>
             <a:off x="1371600" y="5303520"/>
-            <a:ext cx="1828800" cy="365760"/>
-          </a:xfrm>
-          <a:prstGeom prst="rect">
-            <a:avLst/>
-          </a:prstGeom>
-          <a:noFill/>
-        </p:spPr>
-        <p:txBody>
-          <a:bodyPr wrap="square">
-            <a:spAutoFit/>
-          </a:bodyPr>
-          <a:lstStyle/>
-          <a:p>
-            <a:pPr algn="l">
-              <a:defRPr sz="1200" b="0">
+            <a:ext cx="11430000" cy="685800"/>
+          </a:xfrm>
+          <a:prstGeom prst="roundRect">
+            <a:avLst>
+              <a:gd name="adj" fmla="val 5000"/>
+            </a:avLst>
+          </a:prstGeom>
+          <a:solidFill>
+            <a:srgbClr val="1E2A38"/>
+          </a:solidFill>
+          <a:ln/>
+        </p:spPr>
+        <p:style>
+          <a:lnRef idx="1">
+            <a:schemeClr val="accent1"/>
+          </a:lnRef>
+          <a:fillRef idx="3">
+            <a:schemeClr val="accent1"/>
+          </a:fillRef>
+          <a:effectRef idx="2">
+            <a:schemeClr val="accent1"/>
+          </a:effectRef>
+          <a:fontRef idx="minor">
+            <a:schemeClr val="lt1"/>
+          </a:fontRef>
+        </p:style>
+        <p:txBody>
+          <a:bodyPr rtlCol="0" anchor="ctr"/>
+          <a:lstStyle/>
+          <a:p>
+            <a:pPr algn="ctr"/>
+          </a:p>
+        </p:txBody>
+      </p:sp>
+      <p:sp>
+        <p:nvSpPr>
+          <p:cNvPr id="14" name="TextBox 13"/>
+          <p:cNvSpPr txBox="1"/>
+          <p:nvPr/>
+        </p:nvSpPr>
+        <p:spPr>
+          <a:xfrm>
+            <a:off x="1645920" y="5394959"/>
+            <a:ext cx="1371600" cy="274320"/>
+          </a:xfrm>
+          <a:prstGeom prst="rect">
+            <a:avLst/>
+          </a:prstGeom>
+          <a:noFill/>
+        </p:spPr>
+        <p:txBody>
+          <a:bodyPr wrap="square">
+            <a:spAutoFit/>
+          </a:bodyPr>
+          <a:lstStyle/>
+          <a:p>
+            <a:pPr algn="l">
+              <a:defRPr sz="1100" b="0">
                 <a:solidFill>
                   <a:srgbClr val="2E8B8B"/>
                 </a:solidFill>
@@ -9103,30 +10203,30 @@
       </p:sp>
       <p:sp>
         <p:nvSpPr>
-          <p:cNvPr id="10" name="TextBox 9"/>
-          <p:cNvSpPr txBox="1"/>
-          <p:nvPr/>
-        </p:nvSpPr>
-        <p:spPr>
-          <a:xfrm>
-            <a:off x="3200400" y="5303520"/>
-            <a:ext cx="2743200" cy="365760"/>
-          </a:xfrm>
-          <a:prstGeom prst="rect">
-            <a:avLst/>
-          </a:prstGeom>
-          <a:noFill/>
-        </p:spPr>
-        <p:txBody>
-          <a:bodyPr wrap="square">
-            <a:spAutoFit/>
-          </a:bodyPr>
-          <a:lstStyle/>
-          <a:p>
-            <a:pPr algn="l">
-              <a:defRPr sz="1600" b="0">
-                <a:solidFill>
-                  <a:srgbClr val="E8E8E8"/>
+          <p:cNvPr id="15" name="TextBox 14"/>
+          <p:cNvSpPr txBox="1"/>
+          <p:nvPr/>
+        </p:nvSpPr>
+        <p:spPr>
+          <a:xfrm>
+            <a:off x="3200400" y="5394959"/>
+            <a:ext cx="2743200" cy="274320"/>
+          </a:xfrm>
+          <a:prstGeom prst="rect">
+            <a:avLst/>
+          </a:prstGeom>
+          <a:noFill/>
+        </p:spPr>
+        <p:txBody>
+          <a:bodyPr wrap="square">
+            <a:spAutoFit/>
+          </a:bodyPr>
+          <a:lstStyle/>
+          <a:p>
+            <a:pPr algn="l">
+              <a:defRPr sz="1500" b="1">
+                <a:solidFill>
+                  <a:srgbClr val="2E8B8B"/>
                 </a:solidFill>
                 <a:latin typeface="Calibri"/>
               </a:defRPr>
@@ -9139,14 +10239,14 @@
       </p:sp>
       <p:sp>
         <p:nvSpPr>
-          <p:cNvPr id="11" name="TextBox 10"/>
-          <p:cNvSpPr txBox="1"/>
-          <p:nvPr/>
-        </p:nvSpPr>
-        <p:spPr>
-          <a:xfrm>
-            <a:off x="6400800" y="5303520"/>
-            <a:ext cx="6400800" cy="365760"/>
+          <p:cNvPr id="16" name="TextBox 15"/>
+          <p:cNvSpPr txBox="1"/>
+          <p:nvPr/>
+        </p:nvSpPr>
+        <p:spPr>
+          <a:xfrm>
+            <a:off x="6400800" y="5394959"/>
+            <a:ext cx="6400800" cy="274320"/>
           </a:xfrm>
           <a:prstGeom prst="rect">
             <a:avLst/>
@@ -9175,30 +10275,73 @@
       </p:sp>
       <p:sp>
         <p:nvSpPr>
-          <p:cNvPr id="12" name="TextBox 11"/>
-          <p:cNvSpPr txBox="1"/>
+          <p:cNvPr id="17" name="Rounded Rectangle 16"/>
+          <p:cNvSpPr/>
           <p:nvPr/>
         </p:nvSpPr>
         <p:spPr>
           <a:xfrm>
             <a:off x="1371600" y="6126480"/>
-            <a:ext cx="1828800" cy="365760"/>
-          </a:xfrm>
-          <a:prstGeom prst="rect">
-            <a:avLst/>
-          </a:prstGeom>
-          <a:noFill/>
-        </p:spPr>
-        <p:txBody>
-          <a:bodyPr wrap="square">
-            <a:spAutoFit/>
-          </a:bodyPr>
-          <a:lstStyle/>
-          <a:p>
-            <a:pPr algn="l">
-              <a:defRPr sz="1200" b="0">
-                <a:solidFill>
-                  <a:srgbClr val="2E8B8B"/>
+            <a:ext cx="11430000" cy="685800"/>
+          </a:xfrm>
+          <a:prstGeom prst="roundRect">
+            <a:avLst>
+              <a:gd name="adj" fmla="val 5000"/>
+            </a:avLst>
+          </a:prstGeom>
+          <a:solidFill>
+            <a:srgbClr val="1E2A38"/>
+          </a:solidFill>
+          <a:ln/>
+        </p:spPr>
+        <p:style>
+          <a:lnRef idx="1">
+            <a:schemeClr val="accent1"/>
+          </a:lnRef>
+          <a:fillRef idx="3">
+            <a:schemeClr val="accent1"/>
+          </a:fillRef>
+          <a:effectRef idx="2">
+            <a:schemeClr val="accent1"/>
+          </a:effectRef>
+          <a:fontRef idx="minor">
+            <a:schemeClr val="lt1"/>
+          </a:fontRef>
+        </p:style>
+        <p:txBody>
+          <a:bodyPr rtlCol="0" anchor="ctr"/>
+          <a:lstStyle/>
+          <a:p>
+            <a:pPr algn="ctr"/>
+          </a:p>
+        </p:txBody>
+      </p:sp>
+      <p:sp>
+        <p:nvSpPr>
+          <p:cNvPr id="18" name="TextBox 17"/>
+          <p:cNvSpPr txBox="1"/>
+          <p:nvPr/>
+        </p:nvSpPr>
+        <p:spPr>
+          <a:xfrm>
+            <a:off x="1645920" y="6217920"/>
+            <a:ext cx="1371600" cy="274320"/>
+          </a:xfrm>
+          <a:prstGeom prst="rect">
+            <a:avLst/>
+          </a:prstGeom>
+          <a:noFill/>
+        </p:spPr>
+        <p:txBody>
+          <a:bodyPr wrap="square">
+            <a:spAutoFit/>
+          </a:bodyPr>
+          <a:lstStyle/>
+          <a:p>
+            <a:pPr algn="l">
+              <a:defRPr sz="1100" b="0">
+                <a:solidFill>
+                  <a:srgbClr val="D4A84B"/>
                 </a:solidFill>
                 <a:latin typeface="Courier New"/>
               </a:defRPr>
@@ -9211,28 +10354,28 @@
       </p:sp>
       <p:sp>
         <p:nvSpPr>
-          <p:cNvPr id="13" name="TextBox 12"/>
-          <p:cNvSpPr txBox="1"/>
-          <p:nvPr/>
-        </p:nvSpPr>
-        <p:spPr>
-          <a:xfrm>
-            <a:off x="3200400" y="6126480"/>
-            <a:ext cx="2743200" cy="365760"/>
-          </a:xfrm>
-          <a:prstGeom prst="rect">
-            <a:avLst/>
-          </a:prstGeom>
-          <a:noFill/>
-        </p:spPr>
-        <p:txBody>
-          <a:bodyPr wrap="square">
-            <a:spAutoFit/>
-          </a:bodyPr>
-          <a:lstStyle/>
-          <a:p>
-            <a:pPr algn="l">
-              <a:defRPr sz="1600" b="1">
+          <p:cNvPr id="19" name="TextBox 18"/>
+          <p:cNvSpPr txBox="1"/>
+          <p:nvPr/>
+        </p:nvSpPr>
+        <p:spPr>
+          <a:xfrm>
+            <a:off x="3200400" y="6217920"/>
+            <a:ext cx="2743200" cy="274320"/>
+          </a:xfrm>
+          <a:prstGeom prst="rect">
+            <a:avLst/>
+          </a:prstGeom>
+          <a:noFill/>
+        </p:spPr>
+        <p:txBody>
+          <a:bodyPr wrap="square">
+            <a:spAutoFit/>
+          </a:bodyPr>
+          <a:lstStyle/>
+          <a:p>
+            <a:pPr algn="l">
+              <a:defRPr sz="1500" b="1">
                 <a:solidFill>
                   <a:srgbClr val="D4A84B"/>
                 </a:solidFill>
@@ -9247,14 +10390,14 @@
       </p:sp>
       <p:sp>
         <p:nvSpPr>
-          <p:cNvPr id="14" name="TextBox 13"/>
-          <p:cNvSpPr txBox="1"/>
-          <p:nvPr/>
-        </p:nvSpPr>
-        <p:spPr>
-          <a:xfrm>
-            <a:off x="6400800" y="6126480"/>
-            <a:ext cx="6400800" cy="365760"/>
+          <p:cNvPr id="20" name="TextBox 19"/>
+          <p:cNvSpPr txBox="1"/>
+          <p:nvPr/>
+        </p:nvSpPr>
+        <p:spPr>
+          <a:xfrm>
+            <a:off x="6400800" y="6217920"/>
+            <a:ext cx="6400800" cy="274320"/>
           </a:xfrm>
           <a:prstGeom prst="rect">
             <a:avLst/>
@@ -9283,30 +10426,73 @@
       </p:sp>
       <p:sp>
         <p:nvSpPr>
-          <p:cNvPr id="15" name="TextBox 14"/>
-          <p:cNvSpPr txBox="1"/>
+          <p:cNvPr id="21" name="Rounded Rectangle 20"/>
+          <p:cNvSpPr/>
           <p:nvPr/>
         </p:nvSpPr>
         <p:spPr>
           <a:xfrm>
             <a:off x="1371600" y="6949440"/>
-            <a:ext cx="1828800" cy="365760"/>
-          </a:xfrm>
-          <a:prstGeom prst="rect">
-            <a:avLst/>
-          </a:prstGeom>
-          <a:noFill/>
-        </p:spPr>
-        <p:txBody>
-          <a:bodyPr wrap="square">
-            <a:spAutoFit/>
-          </a:bodyPr>
-          <a:lstStyle/>
-          <a:p>
-            <a:pPr algn="l">
-              <a:defRPr sz="1200" b="0">
-                <a:solidFill>
-                  <a:srgbClr val="2E8B8B"/>
+            <a:ext cx="11430000" cy="685800"/>
+          </a:xfrm>
+          <a:prstGeom prst="roundRect">
+            <a:avLst>
+              <a:gd name="adj" fmla="val 5000"/>
+            </a:avLst>
+          </a:prstGeom>
+          <a:solidFill>
+            <a:srgbClr val="1E2A38"/>
+          </a:solidFill>
+          <a:ln/>
+        </p:spPr>
+        <p:style>
+          <a:lnRef idx="1">
+            <a:schemeClr val="accent1"/>
+          </a:lnRef>
+          <a:fillRef idx="3">
+            <a:schemeClr val="accent1"/>
+          </a:fillRef>
+          <a:effectRef idx="2">
+            <a:schemeClr val="accent1"/>
+          </a:effectRef>
+          <a:fontRef idx="minor">
+            <a:schemeClr val="lt1"/>
+          </a:fontRef>
+        </p:style>
+        <p:txBody>
+          <a:bodyPr rtlCol="0" anchor="ctr"/>
+          <a:lstStyle/>
+          <a:p>
+            <a:pPr algn="ctr"/>
+          </a:p>
+        </p:txBody>
+      </p:sp>
+      <p:sp>
+        <p:nvSpPr>
+          <p:cNvPr id="22" name="TextBox 21"/>
+          <p:cNvSpPr txBox="1"/>
+          <p:nvPr/>
+        </p:nvSpPr>
+        <p:spPr>
+          <a:xfrm>
+            <a:off x="1645920" y="7040879"/>
+            <a:ext cx="1371600" cy="274320"/>
+          </a:xfrm>
+          <a:prstGeom prst="rect">
+            <a:avLst/>
+          </a:prstGeom>
+          <a:noFill/>
+        </p:spPr>
+        <p:txBody>
+          <a:bodyPr wrap="square">
+            <a:spAutoFit/>
+          </a:bodyPr>
+          <a:lstStyle/>
+          <a:p>
+            <a:pPr algn="l">
+              <a:defRPr sz="1100" b="0">
+                <a:solidFill>
+                  <a:srgbClr val="4A7C59"/>
                 </a:solidFill>
                 <a:latin typeface="Courier New"/>
               </a:defRPr>
@@ -9319,30 +10505,30 @@
       </p:sp>
       <p:sp>
         <p:nvSpPr>
-          <p:cNvPr id="16" name="TextBox 15"/>
-          <p:cNvSpPr txBox="1"/>
-          <p:nvPr/>
-        </p:nvSpPr>
-        <p:spPr>
-          <a:xfrm>
-            <a:off x="3200400" y="6949440"/>
-            <a:ext cx="2743200" cy="365760"/>
-          </a:xfrm>
-          <a:prstGeom prst="rect">
-            <a:avLst/>
-          </a:prstGeom>
-          <a:noFill/>
-        </p:spPr>
-        <p:txBody>
-          <a:bodyPr wrap="square">
-            <a:spAutoFit/>
-          </a:bodyPr>
-          <a:lstStyle/>
-          <a:p>
-            <a:pPr algn="l">
-              <a:defRPr sz="1600" b="0">
-                <a:solidFill>
-                  <a:srgbClr val="E8E8E8"/>
+          <p:cNvPr id="23" name="TextBox 22"/>
+          <p:cNvSpPr txBox="1"/>
+          <p:nvPr/>
+        </p:nvSpPr>
+        <p:spPr>
+          <a:xfrm>
+            <a:off x="3200400" y="7040879"/>
+            <a:ext cx="2743200" cy="274320"/>
+          </a:xfrm>
+          <a:prstGeom prst="rect">
+            <a:avLst/>
+          </a:prstGeom>
+          <a:noFill/>
+        </p:spPr>
+        <p:txBody>
+          <a:bodyPr wrap="square">
+            <a:spAutoFit/>
+          </a:bodyPr>
+          <a:lstStyle/>
+          <a:p>
+            <a:pPr algn="l">
+              <a:defRPr sz="1500" b="1">
+                <a:solidFill>
+                  <a:srgbClr val="4A7C59"/>
                 </a:solidFill>
                 <a:latin typeface="Calibri"/>
               </a:defRPr>
@@ -9355,14 +10541,14 @@
       </p:sp>
       <p:sp>
         <p:nvSpPr>
-          <p:cNvPr id="17" name="TextBox 16"/>
-          <p:cNvSpPr txBox="1"/>
-          <p:nvPr/>
-        </p:nvSpPr>
-        <p:spPr>
-          <a:xfrm>
-            <a:off x="6400800" y="6949440"/>
-            <a:ext cx="6400800" cy="365760"/>
+          <p:cNvPr id="24" name="TextBox 23"/>
+          <p:cNvSpPr txBox="1"/>
+          <p:nvPr/>
+        </p:nvSpPr>
+        <p:spPr>
+          <a:xfrm>
+            <a:off x="6400800" y="7040879"/>
+            <a:ext cx="6400800" cy="274320"/>
           </a:xfrm>
           <a:prstGeom prst="rect">
             <a:avLst/>
@@ -9423,8 +10609,8 @@
         </p:nvSpPr>
         <p:spPr>
           <a:xfrm>
-            <a:off x="1097280" y="731520"/>
-            <a:ext cx="3657600" cy="365760"/>
+            <a:off x="1097280" y="548640"/>
+            <a:ext cx="3657600" cy="274320"/>
           </a:xfrm>
           <a:prstGeom prst="rect">
             <a:avLst/>
@@ -9459,7 +10645,7 @@
         </p:nvSpPr>
         <p:spPr>
           <a:xfrm>
-            <a:off x="1097280" y="1188720"/>
+            <a:off x="1097280" y="914400"/>
             <a:ext cx="11887200" cy="914400"/>
           </a:xfrm>
           <a:prstGeom prst="rect">
@@ -9474,7 +10660,7 @@
           <a:lstStyle/>
           <a:p>
             <a:pPr algn="l">
-              <a:defRPr sz="3800" b="1">
+              <a:defRPr sz="3600" b="1">
                 <a:solidFill>
                   <a:srgbClr val="E8E8E8"/>
                 </a:solidFill>
@@ -9493,14 +10679,57 @@
       </p:sp>
       <p:sp>
         <p:nvSpPr>
-          <p:cNvPr id="4" name="TextBox 3"/>
-          <p:cNvSpPr txBox="1"/>
+          <p:cNvPr id="4" name="Rounded Rectangle 3"/>
+          <p:cNvSpPr/>
           <p:nvPr/>
         </p:nvSpPr>
         <p:spPr>
           <a:xfrm>
             <a:off x="1371600" y="3200400"/>
-            <a:ext cx="1371600" cy="457200"/>
+            <a:ext cx="11430000" cy="1005840"/>
+          </a:xfrm>
+          <a:prstGeom prst="roundRect">
+            <a:avLst>
+              <a:gd name="adj" fmla="val 5000"/>
+            </a:avLst>
+          </a:prstGeom>
+          <a:solidFill>
+            <a:srgbClr val="1E2A38"/>
+          </a:solidFill>
+          <a:ln/>
+        </p:spPr>
+        <p:style>
+          <a:lnRef idx="1">
+            <a:schemeClr val="accent1"/>
+          </a:lnRef>
+          <a:fillRef idx="3">
+            <a:schemeClr val="accent1"/>
+          </a:fillRef>
+          <a:effectRef idx="2">
+            <a:schemeClr val="accent1"/>
+          </a:effectRef>
+          <a:fontRef idx="minor">
+            <a:schemeClr val="lt1"/>
+          </a:fontRef>
+        </p:style>
+        <p:txBody>
+          <a:bodyPr rtlCol="0" anchor="ctr"/>
+          <a:lstStyle/>
+          <a:p>
+            <a:pPr algn="ctr"/>
+          </a:p>
+        </p:txBody>
+      </p:sp>
+      <p:sp>
+        <p:nvSpPr>
+          <p:cNvPr id="5" name="TextBox 4"/>
+          <p:cNvSpPr txBox="1"/>
+          <p:nvPr/>
+        </p:nvSpPr>
+        <p:spPr>
+          <a:xfrm>
+            <a:off x="1645920" y="3383280"/>
+            <a:ext cx="1371600" cy="365760"/>
           </a:xfrm>
           <a:prstGeom prst="rect">
             <a:avLst/>
@@ -9529,28 +10758,28 @@
       </p:sp>
       <p:sp>
         <p:nvSpPr>
-          <p:cNvPr id="5" name="TextBox 4"/>
-          <p:cNvSpPr txBox="1"/>
-          <p:nvPr/>
-        </p:nvSpPr>
-        <p:spPr>
-          <a:xfrm>
-            <a:off x="3200400" y="3200400"/>
-            <a:ext cx="2286000" cy="457200"/>
-          </a:xfrm>
-          <a:prstGeom prst="rect">
-            <a:avLst/>
-          </a:prstGeom>
-          <a:noFill/>
-        </p:spPr>
-        <p:txBody>
-          <a:bodyPr wrap="square">
-            <a:spAutoFit/>
-          </a:bodyPr>
-          <a:lstStyle/>
-          <a:p>
-            <a:pPr algn="l">
-              <a:defRPr sz="2400" b="1">
+          <p:cNvPr id="6" name="TextBox 5"/>
+          <p:cNvSpPr txBox="1"/>
+          <p:nvPr/>
+        </p:nvSpPr>
+        <p:spPr>
+          <a:xfrm>
+            <a:off x="3200400" y="3383280"/>
+            <a:ext cx="2286000" cy="365760"/>
+          </a:xfrm>
+          <a:prstGeom prst="rect">
+            <a:avLst/>
+          </a:prstGeom>
+          <a:noFill/>
+        </p:spPr>
+        <p:txBody>
+          <a:bodyPr wrap="square">
+            <a:spAutoFit/>
+          </a:bodyPr>
+          <a:lstStyle/>
+          <a:p>
+            <a:pPr algn="l">
+              <a:defRPr sz="2800" b="1">
                 <a:solidFill>
                   <a:srgbClr val="D4A84B"/>
                 </a:solidFill>
@@ -9565,14 +10794,14 @@
       </p:sp>
       <p:sp>
         <p:nvSpPr>
-          <p:cNvPr id="6" name="TextBox 5"/>
-          <p:cNvSpPr txBox="1"/>
-          <p:nvPr/>
-        </p:nvSpPr>
-        <p:spPr>
-          <a:xfrm>
-            <a:off x="5943600" y="3200400"/>
-            <a:ext cx="7315200" cy="457200"/>
+          <p:cNvPr id="7" name="TextBox 6"/>
+          <p:cNvSpPr txBox="1"/>
+          <p:nvPr/>
+        </p:nvSpPr>
+        <p:spPr>
+          <a:xfrm>
+            <a:off x="5943600" y="3383280"/>
+            <a:ext cx="6400800" cy="365760"/>
           </a:xfrm>
           <a:prstGeom prst="rect">
             <a:avLst/>
@@ -9594,21 +10823,64 @@
               </a:defRPr>
             </a:pPr>
             <a:r>
-              <a:t>Global software development spend</a:t>
-            </a:r>
-          </a:p>
-        </p:txBody>
-      </p:sp>
-      <p:sp>
-        <p:nvSpPr>
-          <p:cNvPr id="7" name="TextBox 6"/>
-          <p:cNvSpPr txBox="1"/>
-          <p:nvPr/>
-        </p:nvSpPr>
-        <p:spPr>
-          <a:xfrm>
-            <a:off x="1371600" y="4297680"/>
-            <a:ext cx="1371600" cy="457200"/>
+              <a:t>Global software dev spend</a:t>
+            </a:r>
+          </a:p>
+        </p:txBody>
+      </p:sp>
+      <p:sp>
+        <p:nvSpPr>
+          <p:cNvPr id="8" name="Rounded Rectangle 7"/>
+          <p:cNvSpPr/>
+          <p:nvPr/>
+        </p:nvSpPr>
+        <p:spPr>
+          <a:xfrm>
+            <a:off x="1371600" y="4480560"/>
+            <a:ext cx="11430000" cy="1005840"/>
+          </a:xfrm>
+          <a:prstGeom prst="roundRect">
+            <a:avLst>
+              <a:gd name="adj" fmla="val 5000"/>
+            </a:avLst>
+          </a:prstGeom>
+          <a:solidFill>
+            <a:srgbClr val="1E2A38"/>
+          </a:solidFill>
+          <a:ln/>
+        </p:spPr>
+        <p:style>
+          <a:lnRef idx="1">
+            <a:schemeClr val="accent1"/>
+          </a:lnRef>
+          <a:fillRef idx="3">
+            <a:schemeClr val="accent1"/>
+          </a:fillRef>
+          <a:effectRef idx="2">
+            <a:schemeClr val="accent1"/>
+          </a:effectRef>
+          <a:fontRef idx="minor">
+            <a:schemeClr val="lt1"/>
+          </a:fontRef>
+        </p:style>
+        <p:txBody>
+          <a:bodyPr rtlCol="0" anchor="ctr"/>
+          <a:lstStyle/>
+          <a:p>
+            <a:pPr algn="ctr"/>
+          </a:p>
+        </p:txBody>
+      </p:sp>
+      <p:sp>
+        <p:nvSpPr>
+          <p:cNvPr id="9" name="TextBox 8"/>
+          <p:cNvSpPr txBox="1"/>
+          <p:nvPr/>
+        </p:nvSpPr>
+        <p:spPr>
+          <a:xfrm>
+            <a:off x="1645920" y="4663440"/>
+            <a:ext cx="1371600" cy="365760"/>
           </a:xfrm>
           <a:prstGeom prst="rect">
             <a:avLst/>
@@ -9637,28 +10909,28 @@
       </p:sp>
       <p:sp>
         <p:nvSpPr>
-          <p:cNvPr id="8" name="TextBox 7"/>
-          <p:cNvSpPr txBox="1"/>
-          <p:nvPr/>
-        </p:nvSpPr>
-        <p:spPr>
-          <a:xfrm>
-            <a:off x="3200400" y="4297680"/>
-            <a:ext cx="2286000" cy="457200"/>
-          </a:xfrm>
-          <a:prstGeom prst="rect">
-            <a:avLst/>
-          </a:prstGeom>
-          <a:noFill/>
-        </p:spPr>
-        <p:txBody>
-          <a:bodyPr wrap="square">
-            <a:spAutoFit/>
-          </a:bodyPr>
-          <a:lstStyle/>
-          <a:p>
-            <a:pPr algn="l">
-              <a:defRPr sz="2400" b="1">
+          <p:cNvPr id="10" name="TextBox 9"/>
+          <p:cNvSpPr txBox="1"/>
+          <p:nvPr/>
+        </p:nvSpPr>
+        <p:spPr>
+          <a:xfrm>
+            <a:off x="3200400" y="4663440"/>
+            <a:ext cx="2286000" cy="365760"/>
+          </a:xfrm>
+          <a:prstGeom prst="rect">
+            <a:avLst/>
+          </a:prstGeom>
+          <a:noFill/>
+        </p:spPr>
+        <p:txBody>
+          <a:bodyPr wrap="square">
+            <a:spAutoFit/>
+          </a:bodyPr>
+          <a:lstStyle/>
+          <a:p>
+            <a:pPr algn="l">
+              <a:defRPr sz="2800" b="1">
                 <a:solidFill>
                   <a:srgbClr val="D4A84B"/>
                 </a:solidFill>
@@ -9673,14 +10945,14 @@
       </p:sp>
       <p:sp>
         <p:nvSpPr>
-          <p:cNvPr id="9" name="TextBox 8"/>
-          <p:cNvSpPr txBox="1"/>
-          <p:nvPr/>
-        </p:nvSpPr>
-        <p:spPr>
-          <a:xfrm>
-            <a:off x="5943600" y="4297680"/>
-            <a:ext cx="7315200" cy="457200"/>
+          <p:cNvPr id="11" name="TextBox 10"/>
+          <p:cNvSpPr txBox="1"/>
+          <p:nvPr/>
+        </p:nvSpPr>
+        <p:spPr>
+          <a:xfrm>
+            <a:off x="5943600" y="4663440"/>
+            <a:ext cx="6400800" cy="365760"/>
           </a:xfrm>
           <a:prstGeom prst="rect">
             <a:avLst/>
@@ -9702,21 +10974,64 @@
               </a:defRPr>
             </a:pPr>
             <a:r>
-              <a:t>AI-assisted development tools (by 2028)</a:t>
-            </a:r>
-          </a:p>
-        </p:txBody>
-      </p:sp>
-      <p:sp>
-        <p:nvSpPr>
-          <p:cNvPr id="10" name="TextBox 9"/>
-          <p:cNvSpPr txBox="1"/>
-          <p:nvPr/>
-        </p:nvSpPr>
-        <p:spPr>
-          <a:xfrm>
-            <a:off x="1371600" y="5394960"/>
-            <a:ext cx="1371600" cy="457200"/>
+              <a:t>AI-assisted dev tools (2028)</a:t>
+            </a:r>
+          </a:p>
+        </p:txBody>
+      </p:sp>
+      <p:sp>
+        <p:nvSpPr>
+          <p:cNvPr id="12" name="Rounded Rectangle 11"/>
+          <p:cNvSpPr/>
+          <p:nvPr/>
+        </p:nvSpPr>
+        <p:spPr>
+          <a:xfrm>
+            <a:off x="1371600" y="5760720"/>
+            <a:ext cx="11430000" cy="1005840"/>
+          </a:xfrm>
+          <a:prstGeom prst="roundRect">
+            <a:avLst>
+              <a:gd name="adj" fmla="val 5000"/>
+            </a:avLst>
+          </a:prstGeom>
+          <a:solidFill>
+            <a:srgbClr val="1E2A38"/>
+          </a:solidFill>
+          <a:ln/>
+        </p:spPr>
+        <p:style>
+          <a:lnRef idx="1">
+            <a:schemeClr val="accent1"/>
+          </a:lnRef>
+          <a:fillRef idx="3">
+            <a:schemeClr val="accent1"/>
+          </a:fillRef>
+          <a:effectRef idx="2">
+            <a:schemeClr val="accent1"/>
+          </a:effectRef>
+          <a:fontRef idx="minor">
+            <a:schemeClr val="lt1"/>
+          </a:fontRef>
+        </p:style>
+        <p:txBody>
+          <a:bodyPr rtlCol="0" anchor="ctr"/>
+          <a:lstStyle/>
+          <a:p>
+            <a:pPr algn="ctr"/>
+          </a:p>
+        </p:txBody>
+      </p:sp>
+      <p:sp>
+        <p:nvSpPr>
+          <p:cNvPr id="13" name="TextBox 12"/>
+          <p:cNvSpPr txBox="1"/>
+          <p:nvPr/>
+        </p:nvSpPr>
+        <p:spPr>
+          <a:xfrm>
+            <a:off x="1645920" y="5943600"/>
+            <a:ext cx="1371600" cy="365760"/>
           </a:xfrm>
           <a:prstGeom prst="rect">
             <a:avLst/>
@@ -9745,28 +11060,28 @@
       </p:sp>
       <p:sp>
         <p:nvSpPr>
-          <p:cNvPr id="11" name="TextBox 10"/>
-          <p:cNvSpPr txBox="1"/>
-          <p:nvPr/>
-        </p:nvSpPr>
-        <p:spPr>
-          <a:xfrm>
-            <a:off x="3200400" y="5394960"/>
-            <a:ext cx="2286000" cy="457200"/>
-          </a:xfrm>
-          <a:prstGeom prst="rect">
-            <a:avLst/>
-          </a:prstGeom>
-          <a:noFill/>
-        </p:spPr>
-        <p:txBody>
-          <a:bodyPr wrap="square">
-            <a:spAutoFit/>
-          </a:bodyPr>
-          <a:lstStyle/>
-          <a:p>
-            <a:pPr algn="l">
-              <a:defRPr sz="2400" b="1">
+          <p:cNvPr id="14" name="TextBox 13"/>
+          <p:cNvSpPr txBox="1"/>
+          <p:nvPr/>
+        </p:nvSpPr>
+        <p:spPr>
+          <a:xfrm>
+            <a:off x="3200400" y="5943600"/>
+            <a:ext cx="2286000" cy="365760"/>
+          </a:xfrm>
+          <a:prstGeom prst="rect">
+            <a:avLst/>
+          </a:prstGeom>
+          <a:noFill/>
+        </p:spPr>
+        <p:txBody>
+          <a:bodyPr wrap="square">
+            <a:spAutoFit/>
+          </a:bodyPr>
+          <a:lstStyle/>
+          <a:p>
+            <a:pPr algn="l">
+              <a:defRPr sz="2800" b="1">
                 <a:solidFill>
                   <a:srgbClr val="D4A84B"/>
                 </a:solidFill>
@@ -9781,14 +11096,14 @@
       </p:sp>
       <p:sp>
         <p:nvSpPr>
-          <p:cNvPr id="12" name="TextBox 11"/>
-          <p:cNvSpPr txBox="1"/>
-          <p:nvPr/>
-        </p:nvSpPr>
-        <p:spPr>
-          <a:xfrm>
-            <a:off x="5943600" y="5394960"/>
-            <a:ext cx="7315200" cy="457200"/>
+          <p:cNvPr id="15" name="TextBox 14"/>
+          <p:cNvSpPr txBox="1"/>
+          <p:nvPr/>
+        </p:nvSpPr>
+        <p:spPr>
+          <a:xfrm>
+            <a:off x="5943600" y="5943600"/>
+            <a:ext cx="6400800" cy="365760"/>
           </a:xfrm>
           <a:prstGeom prst="rect">
             <a:avLst/>
@@ -9810,21 +11125,21 @@
               </a:defRPr>
             </a:pPr>
             <a:r>
-              <a:t>Enterprise AI engineering platforms</a:t>
-            </a:r>
-          </a:p>
-        </p:txBody>
-      </p:sp>
-      <p:sp>
-        <p:nvSpPr>
-          <p:cNvPr id="13" name="TextBox 12"/>
-          <p:cNvSpPr txBox="1"/>
-          <p:nvPr/>
-        </p:nvSpPr>
-        <p:spPr>
-          <a:xfrm>
-            <a:off x="1371600" y="6400800"/>
-            <a:ext cx="11887200" cy="457200"/>
+              <a:t>Enterprise AI eng platforms</a:t>
+            </a:r>
+          </a:p>
+        </p:txBody>
+      </p:sp>
+      <p:sp>
+        <p:nvSpPr>
+          <p:cNvPr id="16" name="TextBox 15"/>
+          <p:cNvSpPr txBox="1"/>
+          <p:nvPr/>
+        </p:nvSpPr>
+        <p:spPr>
+          <a:xfrm>
+            <a:off x="1371600" y="7132320"/>
+            <a:ext cx="11887200" cy="365760"/>
           </a:xfrm>
           <a:prstGeom prst="rect">
             <a:avLst/>
@@ -9838,7 +11153,7 @@
           <a:lstStyle/>
           <a:p>
             <a:pPr algn="ctr">
-              <a:defRPr sz="1600" b="0">
+              <a:defRPr sz="1500" b="0">
                 <a:solidFill>
                   <a:srgbClr val="D4A84B"/>
                 </a:solidFill>
@@ -9846,7 +11161,7 @@
               </a:defRPr>
             </a:pPr>
             <a:r>
-              <a:t>TheEngOrg does not compete with Copilot. We organize the AI workforce Copilot creates.</a:t>
+              <a:t>We don't compete with Copilot. We organize the AI workforce Copilot creates.</a:t>
             </a:r>
           </a:p>
         </p:txBody>
@@ -9885,8 +11200,8 @@
         </p:nvSpPr>
         <p:spPr>
           <a:xfrm>
-            <a:off x="1097280" y="731520"/>
-            <a:ext cx="3657600" cy="365760"/>
+            <a:off x="1097280" y="548640"/>
+            <a:ext cx="3657600" cy="274320"/>
           </a:xfrm>
           <a:prstGeom prst="rect">
             <a:avLst/>
@@ -9921,7 +11236,7 @@
         </p:nvSpPr>
         <p:spPr>
           <a:xfrm>
-            <a:off x="1097280" y="1188720"/>
+            <a:off x="1097280" y="914400"/>
             <a:ext cx="11887200" cy="914400"/>
           </a:xfrm>
           <a:prstGeom prst="rect">
@@ -9936,7 +11251,7 @@
           <a:lstStyle/>
           <a:p>
             <a:pPr algn="l">
-              <a:defRPr sz="3800" b="1">
+              <a:defRPr sz="3600" b="1">
                 <a:solidFill>
                   <a:srgbClr val="E8E8E8"/>
                 </a:solidFill>
@@ -9955,28 +11270,373 @@
       </p:sp>
       <p:sp>
         <p:nvSpPr>
-          <p:cNvPr id="4" name="TextBox 3"/>
-          <p:cNvSpPr txBox="1"/>
-          <p:nvPr/>
-        </p:nvSpPr>
-        <p:spPr>
-          <a:xfrm>
-            <a:off x="1371600" y="3200400"/>
-            <a:ext cx="3657600" cy="457200"/>
-          </a:xfrm>
-          <a:prstGeom prst="rect">
-            <a:avLst/>
-          </a:prstGeom>
-          <a:noFill/>
-        </p:spPr>
-        <p:txBody>
-          <a:bodyPr wrap="square">
-            <a:spAutoFit/>
-          </a:bodyPr>
-          <a:lstStyle/>
-          <a:p>
-            <a:pPr algn="l">
-              <a:defRPr sz="2000" b="1">
+          <p:cNvPr id="4" name="Rounded Rectangle 3"/>
+          <p:cNvSpPr/>
+          <p:nvPr/>
+        </p:nvSpPr>
+        <p:spPr>
+          <a:xfrm>
+            <a:off x="1371600" y="2743200"/>
+            <a:ext cx="3840480" cy="2286000"/>
+          </a:xfrm>
+          <a:prstGeom prst="roundRect">
+            <a:avLst>
+              <a:gd name="adj" fmla="val 5000"/>
+            </a:avLst>
+          </a:prstGeom>
+          <a:solidFill>
+            <a:srgbClr val="1E2A38"/>
+          </a:solidFill>
+          <a:ln/>
+        </p:spPr>
+        <p:style>
+          <a:lnRef idx="1">
+            <a:schemeClr val="accent1"/>
+          </a:lnRef>
+          <a:fillRef idx="3">
+            <a:schemeClr val="accent1"/>
+          </a:fillRef>
+          <a:effectRef idx="2">
+            <a:schemeClr val="accent1"/>
+          </a:effectRef>
+          <a:fontRef idx="minor">
+            <a:schemeClr val="lt1"/>
+          </a:fontRef>
+        </p:style>
+        <p:txBody>
+          <a:bodyPr rtlCol="0" anchor="ctr"/>
+          <a:lstStyle/>
+          <a:p>
+            <a:pPr algn="ctr"/>
+          </a:p>
+        </p:txBody>
+      </p:sp>
+      <p:sp>
+        <p:nvSpPr>
+          <p:cNvPr id="5" name="TextBox 4"/>
+          <p:cNvSpPr txBox="1"/>
+          <p:nvPr/>
+        </p:nvSpPr>
+        <p:spPr>
+          <a:xfrm>
+            <a:off x="1645920" y="2926080"/>
+            <a:ext cx="3200400" cy="365760"/>
+          </a:xfrm>
+          <a:prstGeom prst="rect">
+            <a:avLst/>
+          </a:prstGeom>
+          <a:noFill/>
+        </p:spPr>
+        <p:txBody>
+          <a:bodyPr wrap="square">
+            <a:spAutoFit/>
+          </a:bodyPr>
+          <a:lstStyle/>
+          <a:p>
+            <a:pPr algn="l">
+              <a:defRPr sz="1800" b="1">
+                <a:solidFill>
+                  <a:srgbClr val="2E8B8B"/>
+                </a:solidFill>
+                <a:latin typeface="Calibri"/>
+              </a:defRPr>
+            </a:pPr>
+            <a:r>
+              <a:t>Community</a:t>
+            </a:r>
+          </a:p>
+        </p:txBody>
+      </p:sp>
+      <p:sp>
+        <p:nvSpPr>
+          <p:cNvPr id="6" name="TextBox 5"/>
+          <p:cNvSpPr txBox="1"/>
+          <p:nvPr/>
+        </p:nvSpPr>
+        <p:spPr>
+          <a:xfrm>
+            <a:off x="1645920" y="3383280"/>
+            <a:ext cx="3200400" cy="457200"/>
+          </a:xfrm>
+          <a:prstGeom prst="rect">
+            <a:avLst/>
+          </a:prstGeom>
+          <a:noFill/>
+        </p:spPr>
+        <p:txBody>
+          <a:bodyPr wrap="square">
+            <a:spAutoFit/>
+          </a:bodyPr>
+          <a:lstStyle/>
+          <a:p>
+            <a:pPr algn="l">
+              <a:defRPr sz="2800" b="1">
+                <a:solidFill>
+                  <a:srgbClr val="2E8B8B"/>
+                </a:solidFill>
+                <a:latin typeface="Courier New"/>
+              </a:defRPr>
+            </a:pPr>
+            <a:r>
+              <a:t>Free</a:t>
+            </a:r>
+          </a:p>
+        </p:txBody>
+      </p:sp>
+      <p:sp>
+        <p:nvSpPr>
+          <p:cNvPr id="7" name="TextBox 6"/>
+          <p:cNvSpPr txBox="1"/>
+          <p:nvPr/>
+        </p:nvSpPr>
+        <p:spPr>
+          <a:xfrm>
+            <a:off x="1645920" y="4023360"/>
+            <a:ext cx="3200400" cy="365760"/>
+          </a:xfrm>
+          <a:prstGeom prst="rect">
+            <a:avLst/>
+          </a:prstGeom>
+          <a:noFill/>
+        </p:spPr>
+        <p:txBody>
+          <a:bodyPr wrap="square">
+            <a:spAutoFit/>
+          </a:bodyPr>
+          <a:lstStyle/>
+          <a:p>
+            <a:pPr algn="l">
+              <a:defRPr sz="1300" b="0">
+                <a:solidFill>
+                  <a:srgbClr val="8A9BB0"/>
+                </a:solidFill>
+                <a:latin typeface="Calibri"/>
+              </a:defRPr>
+            </a:pPr>
+            <a:r>
+              <a:t>OSS framework, 20 agents</a:t>
+            </a:r>
+          </a:p>
+        </p:txBody>
+      </p:sp>
+      <p:sp>
+        <p:nvSpPr>
+          <p:cNvPr id="8" name="Rounded Rectangle 7"/>
+          <p:cNvSpPr/>
+          <p:nvPr/>
+        </p:nvSpPr>
+        <p:spPr>
+          <a:xfrm>
+            <a:off x="5760720" y="2743200"/>
+            <a:ext cx="3840480" cy="2286000"/>
+          </a:xfrm>
+          <a:prstGeom prst="roundRect">
+            <a:avLst>
+              <a:gd name="adj" fmla="val 5000"/>
+            </a:avLst>
+          </a:prstGeom>
+          <a:solidFill>
+            <a:srgbClr val="1E2A38"/>
+          </a:solidFill>
+          <a:ln/>
+        </p:spPr>
+        <p:style>
+          <a:lnRef idx="1">
+            <a:schemeClr val="accent1"/>
+          </a:lnRef>
+          <a:fillRef idx="3">
+            <a:schemeClr val="accent1"/>
+          </a:fillRef>
+          <a:effectRef idx="2">
+            <a:schemeClr val="accent1"/>
+          </a:effectRef>
+          <a:fontRef idx="minor">
+            <a:schemeClr val="lt1"/>
+          </a:fontRef>
+        </p:style>
+        <p:txBody>
+          <a:bodyPr rtlCol="0" anchor="ctr"/>
+          <a:lstStyle/>
+          <a:p>
+            <a:pPr algn="ctr"/>
+          </a:p>
+        </p:txBody>
+      </p:sp>
+      <p:sp>
+        <p:nvSpPr>
+          <p:cNvPr id="9" name="TextBox 8"/>
+          <p:cNvSpPr txBox="1"/>
+          <p:nvPr/>
+        </p:nvSpPr>
+        <p:spPr>
+          <a:xfrm>
+            <a:off x="6035040" y="2926080"/>
+            <a:ext cx="3200400" cy="365760"/>
+          </a:xfrm>
+          <a:prstGeom prst="rect">
+            <a:avLst/>
+          </a:prstGeom>
+          <a:noFill/>
+        </p:spPr>
+        <p:txBody>
+          <a:bodyPr wrap="square">
+            <a:spAutoFit/>
+          </a:bodyPr>
+          <a:lstStyle/>
+          <a:p>
+            <a:pPr algn="l">
+              <a:defRPr sz="1800" b="1">
+                <a:solidFill>
+                  <a:srgbClr val="D4A84B"/>
+                </a:solidFill>
+                <a:latin typeface="Calibri"/>
+              </a:defRPr>
+            </a:pPr>
+            <a:r>
+              <a:t>Enterprise</a:t>
+            </a:r>
+          </a:p>
+        </p:txBody>
+      </p:sp>
+      <p:sp>
+        <p:nvSpPr>
+          <p:cNvPr id="10" name="TextBox 9"/>
+          <p:cNvSpPr txBox="1"/>
+          <p:nvPr/>
+        </p:nvSpPr>
+        <p:spPr>
+          <a:xfrm>
+            <a:off x="6035040" y="3383280"/>
+            <a:ext cx="3200400" cy="457200"/>
+          </a:xfrm>
+          <a:prstGeom prst="rect">
+            <a:avLst/>
+          </a:prstGeom>
+          <a:noFill/>
+        </p:spPr>
+        <p:txBody>
+          <a:bodyPr wrap="square">
+            <a:spAutoFit/>
+          </a:bodyPr>
+          <a:lstStyle/>
+          <a:p>
+            <a:pPr algn="l">
+              <a:defRPr sz="2800" b="1">
+                <a:solidFill>
+                  <a:srgbClr val="D4A84B"/>
+                </a:solidFill>
+                <a:latin typeface="Courier New"/>
+              </a:defRPr>
+            </a:pPr>
+            <a:r>
+              <a:t>$10,000/mo</a:t>
+            </a:r>
+          </a:p>
+        </p:txBody>
+      </p:sp>
+      <p:sp>
+        <p:nvSpPr>
+          <p:cNvPr id="11" name="TextBox 10"/>
+          <p:cNvSpPr txBox="1"/>
+          <p:nvPr/>
+        </p:nvSpPr>
+        <p:spPr>
+          <a:xfrm>
+            <a:off x="6035040" y="4023360"/>
+            <a:ext cx="3200400" cy="365760"/>
+          </a:xfrm>
+          <a:prstGeom prst="rect">
+            <a:avLst/>
+          </a:prstGeom>
+          <a:noFill/>
+        </p:spPr>
+        <p:txBody>
+          <a:bodyPr wrap="square">
+            <a:spAutoFit/>
+          </a:bodyPr>
+          <a:lstStyle/>
+          <a:p>
+            <a:pPr algn="l">
+              <a:defRPr sz="1300" b="0">
+                <a:solidFill>
+                  <a:srgbClr val="8A9BB0"/>
+                </a:solidFill>
+                <a:latin typeface="Calibri"/>
+              </a:defRPr>
+            </a:pPr>
+            <a:r>
+              <a:t>Sage + 24 agents + support</a:t>
+            </a:r>
+          </a:p>
+        </p:txBody>
+      </p:sp>
+      <p:sp>
+        <p:nvSpPr>
+          <p:cNvPr id="12" name="Rounded Rectangle 11"/>
+          <p:cNvSpPr/>
+          <p:nvPr/>
+        </p:nvSpPr>
+        <p:spPr>
+          <a:xfrm>
+            <a:off x="10149840" y="2743200"/>
+            <a:ext cx="3840480" cy="2286000"/>
+          </a:xfrm>
+          <a:prstGeom prst="roundRect">
+            <a:avLst>
+              <a:gd name="adj" fmla="val 5000"/>
+            </a:avLst>
+          </a:prstGeom>
+          <a:solidFill>
+            <a:srgbClr val="1E2A38"/>
+          </a:solidFill>
+          <a:ln/>
+        </p:spPr>
+        <p:style>
+          <a:lnRef idx="1">
+            <a:schemeClr val="accent1"/>
+          </a:lnRef>
+          <a:fillRef idx="3">
+            <a:schemeClr val="accent1"/>
+          </a:fillRef>
+          <a:effectRef idx="2">
+            <a:schemeClr val="accent1"/>
+          </a:effectRef>
+          <a:fontRef idx="minor">
+            <a:schemeClr val="lt1"/>
+          </a:fontRef>
+        </p:style>
+        <p:txBody>
+          <a:bodyPr rtlCol="0" anchor="ctr"/>
+          <a:lstStyle/>
+          <a:p>
+            <a:pPr algn="ctr"/>
+          </a:p>
+        </p:txBody>
+      </p:sp>
+      <p:sp>
+        <p:nvSpPr>
+          <p:cNvPr id="13" name="TextBox 12"/>
+          <p:cNvSpPr txBox="1"/>
+          <p:nvPr/>
+        </p:nvSpPr>
+        <p:spPr>
+          <a:xfrm>
+            <a:off x="10424160" y="2926080"/>
+            <a:ext cx="3200400" cy="365760"/>
+          </a:xfrm>
+          <a:prstGeom prst="rect">
+            <a:avLst/>
+          </a:prstGeom>
+          <a:noFill/>
+        </p:spPr>
+        <p:txBody>
+          <a:bodyPr wrap="square">
+            <a:spAutoFit/>
+          </a:bodyPr>
+          <a:lstStyle/>
+          <a:p>
+            <a:pPr algn="l">
+              <a:defRPr sz="1800" b="1">
                 <a:solidFill>
                   <a:srgbClr val="E8E8E8"/>
                 </a:solidFill>
@@ -9984,21 +11644,21 @@
               </a:defRPr>
             </a:pPr>
             <a:r>
-              <a:t>Community</a:t>
-            </a:r>
-          </a:p>
-        </p:txBody>
-      </p:sp>
-      <p:sp>
-        <p:nvSpPr>
-          <p:cNvPr id="5" name="TextBox 4"/>
-          <p:cNvSpPr txBox="1"/>
-          <p:nvPr/>
-        </p:nvSpPr>
-        <p:spPr>
-          <a:xfrm>
-            <a:off x="1371600" y="3749039"/>
-            <a:ext cx="3657600" cy="457200"/>
+              <a:t>Strategic</a:t>
+            </a:r>
+          </a:p>
+        </p:txBody>
+      </p:sp>
+      <p:sp>
+        <p:nvSpPr>
+          <p:cNvPr id="14" name="TextBox 13"/>
+          <p:cNvSpPr txBox="1"/>
+          <p:nvPr/>
+        </p:nvSpPr>
+        <p:spPr>
+          <a:xfrm>
+            <a:off x="10424160" y="3383280"/>
+            <a:ext cx="3200400" cy="457200"/>
           </a:xfrm>
           <a:prstGeom prst="rect">
             <a:avLst/>
@@ -10020,35 +11680,35 @@
               </a:defRPr>
             </a:pPr>
             <a:r>
-              <a:t>Free</a:t>
-            </a:r>
-          </a:p>
-        </p:txBody>
-      </p:sp>
-      <p:sp>
-        <p:nvSpPr>
-          <p:cNvPr id="6" name="TextBox 5"/>
-          <p:cNvSpPr txBox="1"/>
-          <p:nvPr/>
-        </p:nvSpPr>
-        <p:spPr>
-          <a:xfrm>
-            <a:off x="1371600" y="4389120"/>
-            <a:ext cx="3657600" cy="365760"/>
-          </a:xfrm>
-          <a:prstGeom prst="rect">
-            <a:avLst/>
-          </a:prstGeom>
-          <a:noFill/>
-        </p:spPr>
-        <p:txBody>
-          <a:bodyPr wrap="square">
-            <a:spAutoFit/>
-          </a:bodyPr>
-          <a:lstStyle/>
-          <a:p>
-            <a:pPr algn="l">
-              <a:defRPr sz="1400" b="0">
+              <a:t>$18,000/mo</a:t>
+            </a:r>
+          </a:p>
+        </p:txBody>
+      </p:sp>
+      <p:sp>
+        <p:nvSpPr>
+          <p:cNvPr id="15" name="TextBox 14"/>
+          <p:cNvSpPr txBox="1"/>
+          <p:nvPr/>
+        </p:nvSpPr>
+        <p:spPr>
+          <a:xfrm>
+            <a:off x="10424160" y="4023360"/>
+            <a:ext cx="3200400" cy="365760"/>
+          </a:xfrm>
+          <a:prstGeom prst="rect">
+            <a:avLst/>
+          </a:prstGeom>
+          <a:noFill/>
+        </p:spPr>
+        <p:txBody>
+          <a:bodyPr wrap="square">
+            <a:spAutoFit/>
+          </a:bodyPr>
+          <a:lstStyle/>
+          <a:p>
+            <a:pPr algn="l">
+              <a:defRPr sz="1300" b="0">
                 <a:solidFill>
                   <a:srgbClr val="8A9BB0"/>
                 </a:solidFill>
@@ -10056,222 +11716,6 @@
               </a:defRPr>
             </a:pPr>
             <a:r>
-              <a:t>OSS framework, 20 agents</a:t>
-            </a:r>
-          </a:p>
-        </p:txBody>
-      </p:sp>
-      <p:sp>
-        <p:nvSpPr>
-          <p:cNvPr id="7" name="TextBox 6"/>
-          <p:cNvSpPr txBox="1"/>
-          <p:nvPr/>
-        </p:nvSpPr>
-        <p:spPr>
-          <a:xfrm>
-            <a:off x="5760720" y="3200400"/>
-            <a:ext cx="3657600" cy="457200"/>
-          </a:xfrm>
-          <a:prstGeom prst="rect">
-            <a:avLst/>
-          </a:prstGeom>
-          <a:noFill/>
-        </p:spPr>
-        <p:txBody>
-          <a:bodyPr wrap="square">
-            <a:spAutoFit/>
-          </a:bodyPr>
-          <a:lstStyle/>
-          <a:p>
-            <a:pPr algn="l">
-              <a:defRPr sz="2000" b="1">
-                <a:solidFill>
-                  <a:srgbClr val="D4A84B"/>
-                </a:solidFill>
-                <a:latin typeface="Calibri"/>
-              </a:defRPr>
-            </a:pPr>
-            <a:r>
-              <a:t>Enterprise</a:t>
-            </a:r>
-          </a:p>
-        </p:txBody>
-      </p:sp>
-      <p:sp>
-        <p:nvSpPr>
-          <p:cNvPr id="8" name="TextBox 7"/>
-          <p:cNvSpPr txBox="1"/>
-          <p:nvPr/>
-        </p:nvSpPr>
-        <p:spPr>
-          <a:xfrm>
-            <a:off x="5760720" y="3749039"/>
-            <a:ext cx="3657600" cy="457200"/>
-          </a:xfrm>
-          <a:prstGeom prst="rect">
-            <a:avLst/>
-          </a:prstGeom>
-          <a:noFill/>
-        </p:spPr>
-        <p:txBody>
-          <a:bodyPr wrap="square">
-            <a:spAutoFit/>
-          </a:bodyPr>
-          <a:lstStyle/>
-          <a:p>
-            <a:pPr algn="l">
-              <a:defRPr sz="2800" b="1">
-                <a:solidFill>
-                  <a:srgbClr val="D4A84B"/>
-                </a:solidFill>
-                <a:latin typeface="Courier New"/>
-              </a:defRPr>
-            </a:pPr>
-            <a:r>
-              <a:t>$10,000/mo</a:t>
-            </a:r>
-          </a:p>
-        </p:txBody>
-      </p:sp>
-      <p:sp>
-        <p:nvSpPr>
-          <p:cNvPr id="9" name="TextBox 8"/>
-          <p:cNvSpPr txBox="1"/>
-          <p:nvPr/>
-        </p:nvSpPr>
-        <p:spPr>
-          <a:xfrm>
-            <a:off x="5760720" y="4389120"/>
-            <a:ext cx="3657600" cy="365760"/>
-          </a:xfrm>
-          <a:prstGeom prst="rect">
-            <a:avLst/>
-          </a:prstGeom>
-          <a:noFill/>
-        </p:spPr>
-        <p:txBody>
-          <a:bodyPr wrap="square">
-            <a:spAutoFit/>
-          </a:bodyPr>
-          <a:lstStyle/>
-          <a:p>
-            <a:pPr algn="l">
-              <a:defRPr sz="1400" b="0">
-                <a:solidFill>
-                  <a:srgbClr val="8A9BB0"/>
-                </a:solidFill>
-                <a:latin typeface="Calibri"/>
-              </a:defRPr>
-            </a:pPr>
-            <a:r>
-              <a:t>Sage + 24 agents + support</a:t>
-            </a:r>
-          </a:p>
-        </p:txBody>
-      </p:sp>
-      <p:sp>
-        <p:nvSpPr>
-          <p:cNvPr id="10" name="TextBox 9"/>
-          <p:cNvSpPr txBox="1"/>
-          <p:nvPr/>
-        </p:nvSpPr>
-        <p:spPr>
-          <a:xfrm>
-            <a:off x="10149840" y="3200400"/>
-            <a:ext cx="3657600" cy="457200"/>
-          </a:xfrm>
-          <a:prstGeom prst="rect">
-            <a:avLst/>
-          </a:prstGeom>
-          <a:noFill/>
-        </p:spPr>
-        <p:txBody>
-          <a:bodyPr wrap="square">
-            <a:spAutoFit/>
-          </a:bodyPr>
-          <a:lstStyle/>
-          <a:p>
-            <a:pPr algn="l">
-              <a:defRPr sz="2000" b="1">
-                <a:solidFill>
-                  <a:srgbClr val="E8E8E8"/>
-                </a:solidFill>
-                <a:latin typeface="Calibri"/>
-              </a:defRPr>
-            </a:pPr>
-            <a:r>
-              <a:t>Strategic</a:t>
-            </a:r>
-          </a:p>
-        </p:txBody>
-      </p:sp>
-      <p:sp>
-        <p:nvSpPr>
-          <p:cNvPr id="11" name="TextBox 10"/>
-          <p:cNvSpPr txBox="1"/>
-          <p:nvPr/>
-        </p:nvSpPr>
-        <p:spPr>
-          <a:xfrm>
-            <a:off x="10149840" y="3749039"/>
-            <a:ext cx="3657600" cy="457200"/>
-          </a:xfrm>
-          <a:prstGeom prst="rect">
-            <a:avLst/>
-          </a:prstGeom>
-          <a:noFill/>
-        </p:spPr>
-        <p:txBody>
-          <a:bodyPr wrap="square">
-            <a:spAutoFit/>
-          </a:bodyPr>
-          <a:lstStyle/>
-          <a:p>
-            <a:pPr algn="l">
-              <a:defRPr sz="2800" b="1">
-                <a:solidFill>
-                  <a:srgbClr val="E8E8E8"/>
-                </a:solidFill>
-                <a:latin typeface="Courier New"/>
-              </a:defRPr>
-            </a:pPr>
-            <a:r>
-              <a:t>$18,000/mo</a:t>
-            </a:r>
-          </a:p>
-        </p:txBody>
-      </p:sp>
-      <p:sp>
-        <p:nvSpPr>
-          <p:cNvPr id="12" name="TextBox 11"/>
-          <p:cNvSpPr txBox="1"/>
-          <p:nvPr/>
-        </p:nvSpPr>
-        <p:spPr>
-          <a:xfrm>
-            <a:off x="10149840" y="4389120"/>
-            <a:ext cx="3657600" cy="365760"/>
-          </a:xfrm>
-          <a:prstGeom prst="rect">
-            <a:avLst/>
-          </a:prstGeom>
-          <a:noFill/>
-        </p:spPr>
-        <p:txBody>
-          <a:bodyPr wrap="square">
-            <a:spAutoFit/>
-          </a:bodyPr>
-          <a:lstStyle/>
-          <a:p>
-            <a:pPr algn="l">
-              <a:defRPr sz="1400" b="0">
-                <a:solidFill>
-                  <a:srgbClr val="8A9BB0"/>
-                </a:solidFill>
-                <a:latin typeface="Calibri"/>
-              </a:defRPr>
-            </a:pPr>
-            <a:r>
               <a:t>Custom constitutions + SLA</a:t>
             </a:r>
           </a:p>
@@ -10279,7 +11723,7 @@
       </p:sp>
       <p:sp>
         <p:nvSpPr>
-          <p:cNvPr id="13" name="TextBox 12"/>
+          <p:cNvPr id="16" name="TextBox 15"/>
           <p:cNvSpPr txBox="1"/>
           <p:nvPr/>
         </p:nvSpPr>
@@ -10315,7 +11759,7 @@
       </p:sp>
       <p:sp>
         <p:nvSpPr>
-          <p:cNvPr id="14" name="TextBox 13"/>
+          <p:cNvPr id="17" name="TextBox 16"/>
           <p:cNvSpPr txBox="1"/>
           <p:nvPr/>
         </p:nvSpPr>
@@ -10351,7 +11795,7 @@
       </p:sp>
       <p:sp>
         <p:nvSpPr>
-          <p:cNvPr id="15" name="TextBox 14"/>
+          <p:cNvPr id="18" name="TextBox 17"/>
           <p:cNvSpPr txBox="1"/>
           <p:nvPr/>
         </p:nvSpPr>
@@ -10387,7 +11831,7 @@
       </p:sp>
       <p:sp>
         <p:nvSpPr>
-          <p:cNvPr id="16" name="TextBox 15"/>
+          <p:cNvPr id="19" name="TextBox 18"/>
           <p:cNvSpPr txBox="1"/>
           <p:nvPr/>
         </p:nvSpPr>
@@ -10423,7 +11867,7 @@
       </p:sp>
       <p:sp>
         <p:nvSpPr>
-          <p:cNvPr id="17" name="TextBox 16"/>
+          <p:cNvPr id="20" name="TextBox 19"/>
           <p:cNvSpPr txBox="1"/>
           <p:nvPr/>
         </p:nvSpPr>
@@ -10459,7 +11903,7 @@
       </p:sp>
       <p:sp>
         <p:nvSpPr>
-          <p:cNvPr id="18" name="TextBox 17"/>
+          <p:cNvPr id="21" name="TextBox 20"/>
           <p:cNvSpPr txBox="1"/>
           <p:nvPr/>
         </p:nvSpPr>
@@ -10495,7 +11939,7 @@
       </p:sp>
       <p:sp>
         <p:nvSpPr>
-          <p:cNvPr id="19" name="TextBox 18"/>
+          <p:cNvPr id="22" name="TextBox 21"/>
           <p:cNvSpPr txBox="1"/>
           <p:nvPr/>
         </p:nvSpPr>
@@ -10531,7 +11975,7 @@
       </p:sp>
       <p:sp>
         <p:nvSpPr>
-          <p:cNvPr id="20" name="TextBox 19"/>
+          <p:cNvPr id="23" name="TextBox 22"/>
           <p:cNvSpPr txBox="1"/>
           <p:nvPr/>
         </p:nvSpPr>
@@ -10600,7 +12044,7 @@
         <p:spPr>
           <a:xfrm>
             <a:off x="1097280" y="548640"/>
-            <a:ext cx="3657600" cy="365760"/>
+            <a:ext cx="3657600" cy="274320"/>
           </a:xfrm>
           <a:prstGeom prst="rect">
             <a:avLst/>
@@ -10636,7 +12080,7 @@
         <p:spPr>
           <a:xfrm>
             <a:off x="1097280" y="914400"/>
-            <a:ext cx="11887200" cy="914400"/>
+            <a:ext cx="11887200" cy="731520"/>
           </a:xfrm>
           <a:prstGeom prst="rect">
             <a:avLst/>
@@ -11098,28 +12542,71 @@
       </p:sp>
       <p:sp>
         <p:nvSpPr>
-          <p:cNvPr id="16" name="TextBox 15"/>
-          <p:cNvSpPr txBox="1"/>
-          <p:nvPr/>
-        </p:nvSpPr>
-        <p:spPr>
-          <a:xfrm>
-            <a:off x="1371600" y="5486400"/>
-            <a:ext cx="3657600" cy="457200"/>
-          </a:xfrm>
-          <a:prstGeom prst="rect">
-            <a:avLst/>
-          </a:prstGeom>
-          <a:noFill/>
-        </p:spPr>
-        <p:txBody>
-          <a:bodyPr wrap="square">
-            <a:spAutoFit/>
-          </a:bodyPr>
-          <a:lstStyle/>
-          <a:p>
-            <a:pPr algn="l">
-              <a:defRPr sz="2800" b="1">
+          <p:cNvPr id="16" name="Rounded Rectangle 15"/>
+          <p:cNvSpPr/>
+          <p:nvPr/>
+        </p:nvSpPr>
+        <p:spPr>
+          <a:xfrm>
+            <a:off x="1371600" y="5303520"/>
+            <a:ext cx="3657600" cy="1097280"/>
+          </a:xfrm>
+          <a:prstGeom prst="roundRect">
+            <a:avLst>
+              <a:gd name="adj" fmla="val 5000"/>
+            </a:avLst>
+          </a:prstGeom>
+          <a:solidFill>
+            <a:srgbClr val="1E2A38"/>
+          </a:solidFill>
+          <a:ln/>
+        </p:spPr>
+        <p:style>
+          <a:lnRef idx="1">
+            <a:schemeClr val="accent1"/>
+          </a:lnRef>
+          <a:fillRef idx="3">
+            <a:schemeClr val="accent1"/>
+          </a:fillRef>
+          <a:effectRef idx="2">
+            <a:schemeClr val="accent1"/>
+          </a:effectRef>
+          <a:fontRef idx="minor">
+            <a:schemeClr val="lt1"/>
+          </a:fontRef>
+        </p:style>
+        <p:txBody>
+          <a:bodyPr rtlCol="0" anchor="ctr"/>
+          <a:lstStyle/>
+          <a:p>
+            <a:pPr algn="ctr"/>
+          </a:p>
+        </p:txBody>
+      </p:sp>
+      <p:sp>
+        <p:nvSpPr>
+          <p:cNvPr id="17" name="TextBox 16"/>
+          <p:cNvSpPr txBox="1"/>
+          <p:nvPr/>
+        </p:nvSpPr>
+        <p:spPr>
+          <a:xfrm>
+            <a:off x="1645920" y="5394960"/>
+            <a:ext cx="3108960" cy="457200"/>
+          </a:xfrm>
+          <a:prstGeom prst="rect">
+            <a:avLst/>
+          </a:prstGeom>
+          <a:noFill/>
+        </p:spPr>
+        <p:txBody>
+          <a:bodyPr wrap="square">
+            <a:spAutoFit/>
+          </a:bodyPr>
+          <a:lstStyle/>
+          <a:p>
+            <a:pPr algn="l">
+              <a:defRPr sz="2600" b="1">
                 <a:solidFill>
                   <a:srgbClr val="D4A84B"/>
                 </a:solidFill>
@@ -11134,14 +12621,14 @@
       </p:sp>
       <p:sp>
         <p:nvSpPr>
-          <p:cNvPr id="17" name="TextBox 16"/>
-          <p:cNvSpPr txBox="1"/>
-          <p:nvPr/>
-        </p:nvSpPr>
-        <p:spPr>
-          <a:xfrm>
-            <a:off x="1371600" y="6035040"/>
-            <a:ext cx="3657600" cy="274320"/>
+          <p:cNvPr id="18" name="TextBox 17"/>
+          <p:cNvSpPr txBox="1"/>
+          <p:nvPr/>
+        </p:nvSpPr>
+        <p:spPr>
+          <a:xfrm>
+            <a:off x="1645920" y="5943600"/>
+            <a:ext cx="3108960" cy="274320"/>
           </a:xfrm>
           <a:prstGeom prst="rect">
             <a:avLst/>
@@ -11170,28 +12657,71 @@
       </p:sp>
       <p:sp>
         <p:nvSpPr>
-          <p:cNvPr id="18" name="TextBox 17"/>
-          <p:cNvSpPr txBox="1"/>
-          <p:nvPr/>
-        </p:nvSpPr>
-        <p:spPr>
-          <a:xfrm>
-            <a:off x="5486400" y="5486400"/>
-            <a:ext cx="3657600" cy="457200"/>
-          </a:xfrm>
-          <a:prstGeom prst="rect">
-            <a:avLst/>
-          </a:prstGeom>
-          <a:noFill/>
-        </p:spPr>
-        <p:txBody>
-          <a:bodyPr wrap="square">
-            <a:spAutoFit/>
-          </a:bodyPr>
-          <a:lstStyle/>
-          <a:p>
-            <a:pPr algn="l">
-              <a:defRPr sz="2800" b="1">
+          <p:cNvPr id="19" name="Rounded Rectangle 18"/>
+          <p:cNvSpPr/>
+          <p:nvPr/>
+        </p:nvSpPr>
+        <p:spPr>
+          <a:xfrm>
+            <a:off x="5486400" y="5303520"/>
+            <a:ext cx="3657600" cy="1097280"/>
+          </a:xfrm>
+          <a:prstGeom prst="roundRect">
+            <a:avLst>
+              <a:gd name="adj" fmla="val 5000"/>
+            </a:avLst>
+          </a:prstGeom>
+          <a:solidFill>
+            <a:srgbClr val="1E2A38"/>
+          </a:solidFill>
+          <a:ln/>
+        </p:spPr>
+        <p:style>
+          <a:lnRef idx="1">
+            <a:schemeClr val="accent1"/>
+          </a:lnRef>
+          <a:fillRef idx="3">
+            <a:schemeClr val="accent1"/>
+          </a:fillRef>
+          <a:effectRef idx="2">
+            <a:schemeClr val="accent1"/>
+          </a:effectRef>
+          <a:fontRef idx="minor">
+            <a:schemeClr val="lt1"/>
+          </a:fontRef>
+        </p:style>
+        <p:txBody>
+          <a:bodyPr rtlCol="0" anchor="ctr"/>
+          <a:lstStyle/>
+          <a:p>
+            <a:pPr algn="ctr"/>
+          </a:p>
+        </p:txBody>
+      </p:sp>
+      <p:sp>
+        <p:nvSpPr>
+          <p:cNvPr id="20" name="TextBox 19"/>
+          <p:cNvSpPr txBox="1"/>
+          <p:nvPr/>
+        </p:nvSpPr>
+        <p:spPr>
+          <a:xfrm>
+            <a:off x="5760720" y="5394960"/>
+            <a:ext cx="3108960" cy="457200"/>
+          </a:xfrm>
+          <a:prstGeom prst="rect">
+            <a:avLst/>
+          </a:prstGeom>
+          <a:noFill/>
+        </p:spPr>
+        <p:txBody>
+          <a:bodyPr wrap="square">
+            <a:spAutoFit/>
+          </a:bodyPr>
+          <a:lstStyle/>
+          <a:p>
+            <a:pPr algn="l">
+              <a:defRPr sz="2600" b="1">
                 <a:solidFill>
                   <a:srgbClr val="D4A84B"/>
                 </a:solidFill>
@@ -11206,14 +12736,14 @@
       </p:sp>
       <p:sp>
         <p:nvSpPr>
-          <p:cNvPr id="19" name="TextBox 18"/>
-          <p:cNvSpPr txBox="1"/>
-          <p:nvPr/>
-        </p:nvSpPr>
-        <p:spPr>
-          <a:xfrm>
-            <a:off x="5486400" y="6035040"/>
-            <a:ext cx="3657600" cy="274320"/>
+          <p:cNvPr id="21" name="TextBox 20"/>
+          <p:cNvSpPr txBox="1"/>
+          <p:nvPr/>
+        </p:nvSpPr>
+        <p:spPr>
+          <a:xfrm>
+            <a:off x="5760720" y="5943600"/>
+            <a:ext cx="3108960" cy="274320"/>
           </a:xfrm>
           <a:prstGeom prst="rect">
             <a:avLst/>
@@ -11235,35 +12765,78 @@
               </a:defRPr>
             </a:pPr>
             <a:r>
-              <a:t>Minimum cash position</a:t>
-            </a:r>
-          </a:p>
-        </p:txBody>
-      </p:sp>
-      <p:sp>
-        <p:nvSpPr>
-          <p:cNvPr id="20" name="TextBox 19"/>
-          <p:cNvSpPr txBox="1"/>
-          <p:nvPr/>
-        </p:nvSpPr>
-        <p:spPr>
-          <a:xfrm>
-            <a:off x="9601200" y="5486400"/>
-            <a:ext cx="3657600" cy="457200"/>
-          </a:xfrm>
-          <a:prstGeom prst="rect">
-            <a:avLst/>
-          </a:prstGeom>
-          <a:noFill/>
-        </p:spPr>
-        <p:txBody>
-          <a:bodyPr wrap="square">
-            <a:spAutoFit/>
-          </a:bodyPr>
-          <a:lstStyle/>
-          <a:p>
-            <a:pPr algn="l">
-              <a:defRPr sz="2800" b="1">
+              <a:t>Minimum cash</a:t>
+            </a:r>
+          </a:p>
+        </p:txBody>
+      </p:sp>
+      <p:sp>
+        <p:nvSpPr>
+          <p:cNvPr id="22" name="Rounded Rectangle 21"/>
+          <p:cNvSpPr/>
+          <p:nvPr/>
+        </p:nvSpPr>
+        <p:spPr>
+          <a:xfrm>
+            <a:off x="9601200" y="5303520"/>
+            <a:ext cx="3657600" cy="1097280"/>
+          </a:xfrm>
+          <a:prstGeom prst="roundRect">
+            <a:avLst>
+              <a:gd name="adj" fmla="val 5000"/>
+            </a:avLst>
+          </a:prstGeom>
+          <a:solidFill>
+            <a:srgbClr val="1E2A38"/>
+          </a:solidFill>
+          <a:ln/>
+        </p:spPr>
+        <p:style>
+          <a:lnRef idx="1">
+            <a:schemeClr val="accent1"/>
+          </a:lnRef>
+          <a:fillRef idx="3">
+            <a:schemeClr val="accent1"/>
+          </a:fillRef>
+          <a:effectRef idx="2">
+            <a:schemeClr val="accent1"/>
+          </a:effectRef>
+          <a:fontRef idx="minor">
+            <a:schemeClr val="lt1"/>
+          </a:fontRef>
+        </p:style>
+        <p:txBody>
+          <a:bodyPr rtlCol="0" anchor="ctr"/>
+          <a:lstStyle/>
+          <a:p>
+            <a:pPr algn="ctr"/>
+          </a:p>
+        </p:txBody>
+      </p:sp>
+      <p:sp>
+        <p:nvSpPr>
+          <p:cNvPr id="23" name="TextBox 22"/>
+          <p:cNvSpPr txBox="1"/>
+          <p:nvPr/>
+        </p:nvSpPr>
+        <p:spPr>
+          <a:xfrm>
+            <a:off x="9875520" y="5394960"/>
+            <a:ext cx="3108960" cy="457200"/>
+          </a:xfrm>
+          <a:prstGeom prst="rect">
+            <a:avLst/>
+          </a:prstGeom>
+          <a:noFill/>
+        </p:spPr>
+        <p:txBody>
+          <a:bodyPr wrap="square">
+            <a:spAutoFit/>
+          </a:bodyPr>
+          <a:lstStyle/>
+          <a:p>
+            <a:pPr algn="l">
+              <a:defRPr sz="2600" b="1">
                 <a:solidFill>
                   <a:srgbClr val="D4A84B"/>
                 </a:solidFill>
@@ -11278,14 +12851,14 @@
       </p:sp>
       <p:sp>
         <p:nvSpPr>
-          <p:cNvPr id="21" name="TextBox 20"/>
-          <p:cNvSpPr txBox="1"/>
-          <p:nvPr/>
-        </p:nvSpPr>
-        <p:spPr>
-          <a:xfrm>
-            <a:off x="9601200" y="6035040"/>
-            <a:ext cx="3657600" cy="274320"/>
+          <p:cNvPr id="24" name="TextBox 23"/>
+          <p:cNvSpPr txBox="1"/>
+          <p:nvPr/>
+        </p:nvSpPr>
+        <p:spPr>
+          <a:xfrm>
+            <a:off x="9875520" y="5943600"/>
+            <a:ext cx="3108960" cy="274320"/>
           </a:xfrm>
           <a:prstGeom prst="rect">
             <a:avLst/>
@@ -11314,14 +12887,14 @@
       </p:sp>
       <p:sp>
         <p:nvSpPr>
-          <p:cNvPr id="22" name="TextBox 21"/>
+          <p:cNvPr id="25" name="TextBox 24"/>
           <p:cNvSpPr txBox="1"/>
           <p:nvPr/>
         </p:nvSpPr>
         <p:spPr>
           <a:xfrm>
             <a:off x="1371600" y="7132320"/>
-            <a:ext cx="11887200" cy="365760"/>
+            <a:ext cx="11887200" cy="274320"/>
           </a:xfrm>
           <a:prstGeom prst="rect">
             <a:avLst/>
@@ -11343,7 +12916,7 @@
               </a:defRPr>
             </a:pPr>
             <a:r>
-              <a:t>$35K/month burn. 85+ months of runway on the raise.</a:t>
+              <a:t>$35K/month burn. 85+ months of runway.</a:t>
             </a:r>
           </a:p>
         </p:txBody>
